--- a/Materjalid/Day2 Andmete elutsükkel Power BI/2-paev-andmetarkus-esitlus.pptx
+++ b/Materjalid/Day2 Andmete elutsükkel Power BI/2-paev-andmetarkus-esitlus.pptx
@@ -5,10 +5,10 @@
     <p:sldMasterId id="2147483648" r:id="rId4"/>
   </p:sldMasterIdLst>
   <p:notesMasterIdLst>
-    <p:notesMasterId r:id="rId28"/>
+    <p:notesMasterId r:id="rId31"/>
   </p:notesMasterIdLst>
   <p:handoutMasterIdLst>
-    <p:handoutMasterId r:id="rId29"/>
+    <p:handoutMasterId r:id="rId32"/>
   </p:handoutMasterIdLst>
   <p:sldIdLst>
     <p:sldId id="417" r:id="rId5"/>
@@ -18,48 +18,51 @@
     <p:sldId id="444" r:id="rId9"/>
     <p:sldId id="445" r:id="rId10"/>
     <p:sldId id="635" r:id="rId11"/>
-    <p:sldId id="636" r:id="rId12"/>
-    <p:sldId id="637" r:id="rId13"/>
-    <p:sldId id="535" r:id="rId14"/>
-    <p:sldId id="446" r:id="rId15"/>
-    <p:sldId id="585" r:id="rId16"/>
-    <p:sldId id="640" r:id="rId17"/>
-    <p:sldId id="638" r:id="rId18"/>
-    <p:sldId id="639" r:id="rId19"/>
-    <p:sldId id="586" r:id="rId20"/>
-    <p:sldId id="641" r:id="rId21"/>
-    <p:sldId id="536" r:id="rId22"/>
-    <p:sldId id="584" r:id="rId23"/>
-    <p:sldId id="583" r:id="rId24"/>
-    <p:sldId id="582" r:id="rId25"/>
-    <p:sldId id="537" r:id="rId26"/>
-    <p:sldId id="432" r:id="rId27"/>
+    <p:sldId id="642" r:id="rId12"/>
+    <p:sldId id="636" r:id="rId13"/>
+    <p:sldId id="637" r:id="rId14"/>
+    <p:sldId id="535" r:id="rId15"/>
+    <p:sldId id="446" r:id="rId16"/>
+    <p:sldId id="585" r:id="rId17"/>
+    <p:sldId id="640" r:id="rId18"/>
+    <p:sldId id="643" r:id="rId19"/>
+    <p:sldId id="638" r:id="rId20"/>
+    <p:sldId id="639" r:id="rId21"/>
+    <p:sldId id="586" r:id="rId22"/>
+    <p:sldId id="536" r:id="rId23"/>
+    <p:sldId id="584" r:id="rId24"/>
+    <p:sldId id="583" r:id="rId25"/>
+    <p:sldId id="582" r:id="rId26"/>
+    <p:sldId id="645" r:id="rId27"/>
+    <p:sldId id="537" r:id="rId28"/>
+    <p:sldId id="432" r:id="rId29"/>
+    <p:sldId id="644" r:id="rId30"/>
   </p:sldIdLst>
   <p:sldSz cx="12192000" cy="6858000"/>
   <p:notesSz cx="6858000" cy="9144000"/>
   <p:embeddedFontLst>
     <p:embeddedFont>
       <p:font typeface="Consolas" panose="020B0609020204030204" pitchFamily="49" charset="0"/>
-      <p:regular r:id="rId30"/>
-      <p:bold r:id="rId31"/>
-      <p:italic r:id="rId32"/>
-      <p:boldItalic r:id="rId33"/>
+      <p:regular r:id="rId33"/>
+      <p:bold r:id="rId34"/>
+      <p:italic r:id="rId35"/>
+      <p:boldItalic r:id="rId36"/>
     </p:embeddedFont>
     <p:embeddedFont>
       <p:font typeface="Inter" panose="020B0604020202020204" charset="0"/>
-      <p:regular r:id="rId34"/>
-      <p:bold r:id="rId35"/>
-      <p:italic r:id="rId36"/>
-      <p:boldItalic r:id="rId37"/>
+      <p:regular r:id="rId37"/>
+      <p:bold r:id="rId38"/>
+      <p:italic r:id="rId39"/>
+      <p:boldItalic r:id="rId40"/>
     </p:embeddedFont>
     <p:embeddedFont>
       <p:font typeface="Inter Bold" panose="020B0604020202020204" charset="0"/>
-      <p:bold r:id="rId38"/>
+      <p:bold r:id="rId41"/>
     </p:embeddedFont>
     <p:embeddedFont>
       <p:font typeface="Poppins SemiBold" panose="00000700000000000000" pitchFamily="2" charset="-70"/>
-      <p:bold r:id="rId39"/>
-      <p:boldItalic r:id="rId40"/>
+      <p:bold r:id="rId42"/>
+      <p:boldItalic r:id="rId43"/>
     </p:embeddedFont>
   </p:embeddedFontLst>
   <p:defaultTextStyle>
@@ -4205,7 +4208,7 @@
           <a:p>
             <a:fld id="{46699514-027B-49BD-8B49-5054CA40ECF4}" type="slidenum">
               <a:rPr lang="en-US"/>
-              <a:t>12</a:t>
+              <a:t>13</a:t>
             </a:fld>
             <a:endParaRPr lang="en-US"/>
           </a:p>
@@ -5625,7 +5628,7 @@
           <a:p>
             <a:fld id="{46699514-027B-49BD-8B49-5054CA40ECF4}" type="slidenum">
               <a:rPr lang="en-US"/>
-              <a:t>23</a:t>
+              <a:t>25</a:t>
             </a:fld>
             <a:endParaRPr lang="en-US"/>
           </a:p>
@@ -28789,6 +28792,544 @@
   <p:cSld>
     <p:spTree>
       <p:nvGrpSpPr>
+        <p:cNvPr id="1" name=""/>
+        <p:cNvGrpSpPr/>
+        <p:nvPr/>
+      </p:nvGrpSpPr>
+      <p:grpSpPr>
+        <a:xfrm>
+          <a:off x="0" y="0"/>
+          <a:ext cx="0" cy="0"/>
+          <a:chOff x="0" y="0"/>
+          <a:chExt cx="0" cy="0"/>
+        </a:xfrm>
+      </p:grpSpPr>
+      <p:sp>
+        <p:nvSpPr>
+          <p:cNvPr id="2" name="Title 1">
+            <a:extLst>
+              <a:ext uri="{FF2B5EF4-FFF2-40B4-BE49-F238E27FC236}">
+                <a16:creationId xmlns:a16="http://schemas.microsoft.com/office/drawing/2014/main" id="{1CB74240-DA98-AFD1-5042-F7972DCFC4CA}"/>
+              </a:ext>
+            </a:extLst>
+          </p:cNvPr>
+          <p:cNvSpPr>
+            <a:spLocks noGrp="1"/>
+          </p:cNvSpPr>
+          <p:nvPr>
+            <p:ph type="ctrTitle"/>
+          </p:nvPr>
+        </p:nvSpPr>
+        <p:spPr/>
+        <p:txBody>
+          <a:bodyPr/>
+          <a:lstStyle/>
+          <a:p>
+            <a:r>
+              <a:rPr lang="en-US" dirty="0" err="1"/>
+              <a:t>Andmekvaliteedi</a:t>
+            </a:r>
+            <a:r>
+              <a:rPr lang="en-US" dirty="0"/>
+              <a:t> </a:t>
+            </a:r>
+            <a:r>
+              <a:rPr lang="en-US" dirty="0" err="1"/>
+              <a:t>probleemide</a:t>
+            </a:r>
+            <a:r>
+              <a:rPr lang="en-US" dirty="0"/>
+              <a:t> </a:t>
+            </a:r>
+            <a:r>
+              <a:rPr lang="en-US" dirty="0" err="1"/>
+              <a:t>lahendamine</a:t>
+            </a:r>
+            <a:endParaRPr lang="et-EE" dirty="0"/>
+          </a:p>
+        </p:txBody>
+      </p:sp>
+      <p:sp>
+        <p:nvSpPr>
+          <p:cNvPr id="3" name="Content Placeholder 2">
+            <a:extLst>
+              <a:ext uri="{FF2B5EF4-FFF2-40B4-BE49-F238E27FC236}">
+                <a16:creationId xmlns:a16="http://schemas.microsoft.com/office/drawing/2014/main" id="{B9343AF2-D8CB-E789-1C35-D2762C89402E}"/>
+              </a:ext>
+            </a:extLst>
+          </p:cNvPr>
+          <p:cNvSpPr>
+            <a:spLocks noGrp="1"/>
+          </p:cNvSpPr>
+          <p:nvPr>
+            <p:ph sz="quarter" idx="10"/>
+          </p:nvPr>
+        </p:nvSpPr>
+        <p:spPr>
+          <a:xfrm>
+            <a:off x="497952" y="1027493"/>
+            <a:ext cx="10941050" cy="4465637"/>
+          </a:xfrm>
+        </p:spPr>
+        <p:txBody>
+          <a:bodyPr/>
+          <a:lstStyle/>
+          <a:p>
+            <a:pPr>
+              <a:lnSpc>
+                <a:spcPct val="150000"/>
+              </a:lnSpc>
+            </a:pPr>
+            <a:r>
+              <a:rPr lang="en-US" sz="1800" dirty="0" err="1"/>
+              <a:t>Andmeallikate</a:t>
+            </a:r>
+            <a:r>
+              <a:rPr lang="en-US" sz="1800" dirty="0"/>
+              <a:t> </a:t>
+            </a:r>
+            <a:r>
+              <a:rPr lang="en-US" sz="1800" b="1" dirty="0"/>
+              <a:t>analüüs</a:t>
+            </a:r>
+            <a:r>
+              <a:rPr lang="en-US" sz="1800" dirty="0"/>
+              <a:t> ja </a:t>
+            </a:r>
+            <a:r>
+              <a:rPr lang="en-US" sz="1800" b="1" dirty="0" err="1"/>
+              <a:t>profileerimine</a:t>
+            </a:r>
+            <a:r>
+              <a:rPr lang="en-US" sz="1800" dirty="0"/>
+              <a:t> (selle </a:t>
+            </a:r>
+            <a:r>
+              <a:rPr lang="en-US" sz="1800" dirty="0" err="1"/>
+              <a:t>eelduseks</a:t>
+            </a:r>
+            <a:r>
+              <a:rPr lang="en-US" sz="1800" dirty="0"/>
+              <a:t> on </a:t>
+            </a:r>
+            <a:r>
+              <a:rPr lang="en-US" sz="1800" dirty="0" err="1"/>
+              <a:t>valdkonna</a:t>
+            </a:r>
+            <a:r>
+              <a:rPr lang="en-US" sz="1800" dirty="0"/>
+              <a:t> </a:t>
+            </a:r>
+            <a:r>
+              <a:rPr lang="en-US" sz="1800" dirty="0" err="1"/>
+              <a:t>teadmised</a:t>
+            </a:r>
+            <a:r>
+              <a:rPr lang="en-US" sz="1800" dirty="0"/>
+              <a:t> ja analüütika </a:t>
+            </a:r>
+            <a:r>
+              <a:rPr lang="en-US" sz="1800" dirty="0" err="1"/>
+              <a:t>tehnikad</a:t>
+            </a:r>
+            <a:r>
+              <a:rPr lang="en-US" sz="1800" dirty="0"/>
+              <a:t>). </a:t>
+            </a:r>
+            <a:r>
+              <a:rPr lang="en-US" sz="1800" dirty="0" err="1"/>
+              <a:t>Sageli</a:t>
+            </a:r>
+            <a:r>
+              <a:rPr lang="en-US" sz="1800" dirty="0"/>
+              <a:t> </a:t>
+            </a:r>
+            <a:r>
+              <a:rPr lang="en-US" sz="1800" dirty="0" err="1"/>
+              <a:t>tabelite</a:t>
+            </a:r>
+            <a:r>
+              <a:rPr lang="en-US" sz="1800" dirty="0"/>
+              <a:t>, </a:t>
+            </a:r>
+            <a:r>
+              <a:rPr lang="en-US" sz="1800" dirty="0" err="1"/>
+              <a:t>veergude</a:t>
+            </a:r>
+            <a:r>
+              <a:rPr lang="en-US" sz="1800" dirty="0"/>
+              <a:t> ja </a:t>
+            </a:r>
+            <a:r>
+              <a:rPr lang="en-US" sz="1800" dirty="0" err="1"/>
+              <a:t>ridade</a:t>
+            </a:r>
+            <a:r>
+              <a:rPr lang="en-US" sz="1800" dirty="0"/>
+              <a:t> kaupa. </a:t>
+            </a:r>
+            <a:r>
+              <a:rPr lang="en-US" sz="1800" dirty="0" err="1"/>
+              <a:t>Automatiseerimiseks</a:t>
+            </a:r>
+            <a:r>
+              <a:rPr lang="en-US" sz="1800" dirty="0"/>
+              <a:t> </a:t>
+            </a:r>
+            <a:r>
+              <a:rPr lang="en-US" sz="1800" dirty="0" err="1"/>
+              <a:t>tööriistades</a:t>
+            </a:r>
+            <a:r>
+              <a:rPr lang="en-US" sz="1800" dirty="0"/>
+              <a:t> </a:t>
+            </a:r>
+            <a:r>
+              <a:rPr lang="en-US" sz="1800" dirty="0" err="1"/>
+              <a:t>vahendid</a:t>
+            </a:r>
+            <a:r>
+              <a:rPr lang="en-US" sz="1800" dirty="0"/>
+              <a:t> + AI</a:t>
+            </a:r>
+            <a:br>
+              <a:rPr lang="en-US" sz="1800" dirty="0"/>
+            </a:br>
+            <a:r>
+              <a:rPr lang="en-US" sz="1800" dirty="0">
+                <a:ea typeface="Inter"/>
+              </a:rPr>
+              <a:t>Pm </a:t>
+            </a:r>
+            <a:r>
+              <a:rPr lang="en-US" sz="1800" dirty="0" err="1">
+                <a:ea typeface="Inter"/>
+              </a:rPr>
+              <a:t>hakkad</a:t>
+            </a:r>
+            <a:r>
+              <a:rPr lang="en-US" sz="1800" dirty="0">
+                <a:ea typeface="Inter"/>
+              </a:rPr>
+              <a:t> </a:t>
+            </a:r>
+            <a:r>
+              <a:rPr lang="et-EE" sz="1800" dirty="0">
+                <a:ea typeface="Inter"/>
+              </a:rPr>
+              <a:t>algandmeid </a:t>
+            </a:r>
+            <a:r>
+              <a:rPr lang="en-US" sz="1800" dirty="0" err="1">
+                <a:ea typeface="Inter"/>
+              </a:rPr>
+              <a:t>mööda</a:t>
+            </a:r>
+            <a:r>
+              <a:rPr lang="en-US" sz="1800" dirty="0">
+                <a:ea typeface="Inter"/>
+              </a:rPr>
+              <a:t> </a:t>
+            </a:r>
+            <a:r>
+              <a:rPr lang="en-US" sz="1800" dirty="0" err="1">
+                <a:ea typeface="Inter"/>
+              </a:rPr>
+              <a:t>nõudeid</a:t>
+            </a:r>
+            <a:r>
+              <a:rPr lang="en-US" sz="1800" dirty="0">
+                <a:ea typeface="Inter"/>
+              </a:rPr>
+              <a:t> </a:t>
+            </a:r>
+            <a:r>
+              <a:rPr lang="en-US" sz="1800" dirty="0" err="1">
+                <a:ea typeface="Inter"/>
+              </a:rPr>
+              <a:t>kontrollima</a:t>
+            </a:r>
+            <a:endParaRPr lang="en-US" sz="1800" dirty="0"/>
+          </a:p>
+          <a:p>
+            <a:pPr>
+              <a:lnSpc>
+                <a:spcPct val="150000"/>
+              </a:lnSpc>
+            </a:pPr>
+            <a:r>
+              <a:rPr lang="en-US" sz="1800" dirty="0"/>
+              <a:t>Andmete </a:t>
+            </a:r>
+            <a:r>
+              <a:rPr lang="en-US" sz="1800" b="1" dirty="0" err="1"/>
+              <a:t>korrastamine</a:t>
+            </a:r>
+            <a:endParaRPr lang="en-US" sz="1800" b="1" dirty="0"/>
+          </a:p>
+          <a:p>
+            <a:pPr lvl="1">
+              <a:lnSpc>
+                <a:spcPct val="150000"/>
+              </a:lnSpc>
+            </a:pPr>
+            <a:r>
+              <a:rPr lang="en-US" sz="1800" dirty="0" err="1"/>
+              <a:t>töövahenditega</a:t>
+            </a:r>
+            <a:r>
+              <a:rPr lang="en-US" sz="1800" dirty="0"/>
+              <a:t> </a:t>
+            </a:r>
+            <a:r>
+              <a:rPr lang="en-US" sz="1800" dirty="0" err="1"/>
+              <a:t>puhastamine</a:t>
+            </a:r>
+            <a:endParaRPr lang="en-US" sz="1800" dirty="0"/>
+          </a:p>
+          <a:p>
+            <a:pPr lvl="1">
+              <a:lnSpc>
+                <a:spcPct val="150000"/>
+              </a:lnSpc>
+            </a:pPr>
+            <a:r>
+              <a:rPr lang="en-US" sz="1800" dirty="0" err="1"/>
+              <a:t>rikastamine</a:t>
+            </a:r>
+            <a:r>
+              <a:rPr lang="en-US" sz="1800" dirty="0"/>
+              <a:t> (</a:t>
+            </a:r>
+            <a:r>
+              <a:rPr lang="en-US" sz="1800" dirty="0" err="1"/>
+              <a:t>otsid</a:t>
+            </a:r>
+            <a:r>
+              <a:rPr lang="en-US" sz="1800" dirty="0"/>
+              <a:t> </a:t>
+            </a:r>
+            <a:r>
+              <a:rPr lang="en-US" sz="1800" dirty="0" err="1"/>
+              <a:t>lisaallikaid</a:t>
+            </a:r>
+            <a:r>
+              <a:rPr lang="en-US" sz="1800" dirty="0"/>
+              <a:t>, </a:t>
+            </a:r>
+            <a:r>
+              <a:rPr lang="en-US" sz="1800" dirty="0" err="1"/>
+              <a:t>vahel</a:t>
+            </a:r>
+            <a:r>
+              <a:rPr lang="en-US" sz="1800" dirty="0"/>
+              <a:t> ka </a:t>
+            </a:r>
+            <a:r>
+              <a:rPr lang="en-US" sz="1800" dirty="0" err="1"/>
+              <a:t>kodeerimis</a:t>
+            </a:r>
+            <a:r>
+              <a:rPr lang="en-US" sz="1800" dirty="0"/>
+              <a:t>- ja </a:t>
+            </a:r>
+            <a:r>
+              <a:rPr lang="en-US" sz="1800" dirty="0" err="1"/>
+              <a:t>grupeerimisfaile</a:t>
+            </a:r>
+            <a:r>
+              <a:rPr lang="en-US" sz="1800" dirty="0"/>
+              <a:t>)</a:t>
+            </a:r>
+          </a:p>
+          <a:p>
+            <a:pPr>
+              <a:lnSpc>
+                <a:spcPct val="150000"/>
+              </a:lnSpc>
+            </a:pPr>
+            <a:r>
+              <a:rPr lang="en-US" sz="1800" dirty="0" err="1"/>
+              <a:t>Analüüsi</a:t>
+            </a:r>
+            <a:r>
+              <a:rPr lang="en-US" sz="1800" dirty="0"/>
+              <a:t> </a:t>
+            </a:r>
+            <a:r>
+              <a:rPr lang="en-US" sz="1800" dirty="0" err="1"/>
+              <a:t>tulemuste</a:t>
+            </a:r>
+            <a:r>
+              <a:rPr lang="en-US" sz="1800" dirty="0"/>
+              <a:t> (</a:t>
+            </a:r>
+            <a:r>
+              <a:rPr lang="en-US" sz="1800" dirty="0" err="1"/>
+              <a:t>raportite</a:t>
+            </a:r>
+            <a:r>
+              <a:rPr lang="en-US" sz="1800" dirty="0"/>
+              <a:t>) </a:t>
+            </a:r>
+            <a:r>
+              <a:rPr lang="en-US" sz="1800" b="1" dirty="0"/>
+              <a:t>testimine</a:t>
+            </a:r>
+            <a:r>
+              <a:rPr lang="en-US" sz="1800" dirty="0"/>
+              <a:t> </a:t>
+            </a:r>
+            <a:r>
+              <a:rPr lang="en-US" sz="1800" dirty="0" err="1"/>
+              <a:t>oodatava</a:t>
+            </a:r>
+            <a:r>
+              <a:rPr lang="en-US" sz="1800" dirty="0"/>
+              <a:t> </a:t>
+            </a:r>
+            <a:r>
+              <a:rPr lang="en-US" sz="1800" dirty="0" err="1"/>
+              <a:t>tulemuse</a:t>
+            </a:r>
+            <a:r>
+              <a:rPr lang="en-US" sz="1800" dirty="0"/>
+              <a:t> vastu</a:t>
+            </a:r>
+            <a:r>
+              <a:rPr lang="et-EE" sz="1800" dirty="0"/>
+              <a:t>, nt allikas mingit veergu summeerides või profileerides dimensiooni väärtuste kaupa – topeltkontroll, tellijal ei ole neid numbreid anda</a:t>
+            </a:r>
+            <a:endParaRPr lang="en-US" sz="1800" dirty="0"/>
+          </a:p>
+          <a:p>
+            <a:pPr>
+              <a:lnSpc>
+                <a:spcPct val="150000"/>
+              </a:lnSpc>
+            </a:pPr>
+            <a:r>
+              <a:rPr lang="en-US" sz="1800" dirty="0" err="1"/>
+              <a:t>Regulaarne</a:t>
+            </a:r>
+            <a:r>
+              <a:rPr lang="en-US" sz="1800" dirty="0"/>
+              <a:t> </a:t>
+            </a:r>
+            <a:r>
+              <a:rPr lang="en-US" sz="1800" dirty="0" err="1"/>
+              <a:t>monitoorimine</a:t>
+            </a:r>
+            <a:r>
+              <a:rPr lang="en-US" sz="1800" dirty="0"/>
+              <a:t> ja selle </a:t>
+            </a:r>
+            <a:r>
+              <a:rPr lang="en-US" sz="1800" dirty="0" err="1"/>
+              <a:t>tulemusel</a:t>
+            </a:r>
+            <a:r>
+              <a:rPr lang="en-US" sz="1800" dirty="0"/>
+              <a:t> </a:t>
+            </a:r>
+            <a:r>
+              <a:rPr lang="en-US" sz="1800" dirty="0" err="1"/>
+              <a:t>iteratiivselt</a:t>
+            </a:r>
+            <a:r>
+              <a:rPr lang="en-US" sz="1800" dirty="0"/>
+              <a:t> (</a:t>
+            </a:r>
+            <a:r>
+              <a:rPr lang="en-US" sz="1800" dirty="0" err="1"/>
+              <a:t>samm-sammult</a:t>
+            </a:r>
+            <a:r>
+              <a:rPr lang="en-US" sz="1800" dirty="0"/>
+              <a:t>) </a:t>
+            </a:r>
+            <a:r>
+              <a:rPr lang="en-US" sz="1800" dirty="0" err="1"/>
+              <a:t>andmekorralduse</a:t>
+            </a:r>
+            <a:r>
+              <a:rPr lang="en-US" sz="1800" dirty="0"/>
+              <a:t> </a:t>
+            </a:r>
+            <a:r>
+              <a:rPr lang="en-US" sz="1800" dirty="0" err="1"/>
+              <a:t>täiendamine</a:t>
+            </a:r>
+            <a:r>
+              <a:rPr lang="en-US" sz="1800" dirty="0"/>
+              <a:t> ja </a:t>
+            </a:r>
+            <a:r>
+              <a:rPr lang="en-US" sz="1800" dirty="0" err="1"/>
+              <a:t>töötlemise</a:t>
+            </a:r>
+            <a:r>
+              <a:rPr lang="en-US" sz="1800" dirty="0"/>
+              <a:t> pirandamine/</a:t>
+            </a:r>
+            <a:r>
+              <a:rPr lang="en-US" sz="1800" dirty="0" err="1"/>
+              <a:t>muutmine</a:t>
+            </a:r>
+            <a:r>
+              <a:rPr lang="en-US" sz="1800" dirty="0"/>
+              <a:t>/</a:t>
+            </a:r>
+            <a:r>
+              <a:rPr lang="en-US" sz="1800" dirty="0" err="1"/>
+              <a:t>lisamine</a:t>
+            </a:r>
+            <a:endParaRPr lang="en-US" sz="1800" dirty="0"/>
+          </a:p>
+          <a:p>
+            <a:pPr lvl="1">
+              <a:lnSpc>
+                <a:spcPct val="150000"/>
+              </a:lnSpc>
+            </a:pPr>
+            <a:r>
+              <a:rPr lang="en-US" sz="1800" dirty="0" err="1"/>
+              <a:t>sisendandmete</a:t>
+            </a:r>
+            <a:endParaRPr lang="en-US" sz="1800" dirty="0"/>
+          </a:p>
+          <a:p>
+            <a:pPr lvl="1">
+              <a:lnSpc>
+                <a:spcPct val="150000"/>
+              </a:lnSpc>
+            </a:pPr>
+            <a:r>
+              <a:rPr lang="en-US" sz="1800" dirty="0" err="1"/>
+              <a:t>tulemuste</a:t>
+            </a:r>
+            <a:endParaRPr lang="et-EE" sz="1800" dirty="0"/>
+          </a:p>
+        </p:txBody>
+      </p:sp>
+    </p:spTree>
+    <p:extLst>
+      <p:ext uri="{BB962C8B-B14F-4D97-AF65-F5344CB8AC3E}">
+        <p14:creationId xmlns:p14="http://schemas.microsoft.com/office/powerpoint/2010/main" val="1773291844"/>
+      </p:ext>
+    </p:extLst>
+  </p:cSld>
+  <p:clrMapOvr>
+    <a:masterClrMapping/>
+  </p:clrMapOvr>
+</p:sld>
+</file>
+
+<file path=ppt/slides/slide11.xml><?xml version="1.0" encoding="utf-8"?>
+<p:sld xmlns:a="http://schemas.openxmlformats.org/drawingml/2006/main" xmlns:r="http://schemas.openxmlformats.org/officeDocument/2006/relationships" xmlns:p="http://schemas.openxmlformats.org/presentationml/2006/main">
+  <p:cSld>
+    <p:spTree>
+      <p:nvGrpSpPr>
         <p:cNvPr id="1" name="">
           <a:extLst>
             <a:ext uri="{FF2B5EF4-FFF2-40B4-BE49-F238E27FC236}">
@@ -28897,7 +29438,7 @@
 </p:sld>
 </file>
 
-<file path=ppt/slides/slide11.xml><?xml version="1.0" encoding="utf-8"?>
+<file path=ppt/slides/slide12.xml><?xml version="1.0" encoding="utf-8"?>
 <p:sld xmlns:a="http://schemas.openxmlformats.org/drawingml/2006/main" xmlns:r="http://schemas.openxmlformats.org/officeDocument/2006/relationships" xmlns:p="http://schemas.openxmlformats.org/presentationml/2006/main">
   <p:cSld>
     <p:spTree>
@@ -29173,7 +29714,7 @@
 </p:sld>
 </file>
 
-<file path=ppt/slides/slide12.xml><?xml version="1.0" encoding="utf-8"?>
+<file path=ppt/slides/slide13.xml><?xml version="1.0" encoding="utf-8"?>
 <p:sld xmlns:a="http://schemas.openxmlformats.org/drawingml/2006/main" xmlns:r="http://schemas.openxmlformats.org/officeDocument/2006/relationships" xmlns:p="http://schemas.openxmlformats.org/presentationml/2006/main">
   <p:cSld>
     <p:spTree>
@@ -29700,7 +30241,7 @@
 </p:sld>
 </file>
 
-<file path=ppt/slides/slide13.xml><?xml version="1.0" encoding="utf-8"?>
+<file path=ppt/slides/slide14.xml><?xml version="1.0" encoding="utf-8"?>
 <p:sld xmlns:a="http://schemas.openxmlformats.org/drawingml/2006/main" xmlns:r="http://schemas.openxmlformats.org/officeDocument/2006/relationships" xmlns:p="http://schemas.openxmlformats.org/presentationml/2006/main">
   <p:cSld>
     <p:spTree>
@@ -29810,7 +30351,117 @@
 </p:sld>
 </file>
 
-<file path=ppt/slides/slide14.xml><?xml version="1.0" encoding="utf-8"?>
+<file path=ppt/slides/slide15.xml><?xml version="1.0" encoding="utf-8"?>
+<p:sld xmlns:a="http://schemas.openxmlformats.org/drawingml/2006/main" xmlns:r="http://schemas.openxmlformats.org/officeDocument/2006/relationships" xmlns:p="http://schemas.openxmlformats.org/presentationml/2006/main">
+  <p:cSld>
+    <p:spTree>
+      <p:nvGrpSpPr>
+        <p:cNvPr id="1" name=""/>
+        <p:cNvGrpSpPr/>
+        <p:nvPr/>
+      </p:nvGrpSpPr>
+      <p:grpSpPr>
+        <a:xfrm>
+          <a:off x="0" y="0"/>
+          <a:ext cx="0" cy="0"/>
+          <a:chOff x="0" y="0"/>
+          <a:chExt cx="0" cy="0"/>
+        </a:xfrm>
+      </p:grpSpPr>
+      <p:sp>
+        <p:nvSpPr>
+          <p:cNvPr id="2" name="Title 1">
+            <a:extLst>
+              <a:ext uri="{FF2B5EF4-FFF2-40B4-BE49-F238E27FC236}">
+                <a16:creationId xmlns:a16="http://schemas.microsoft.com/office/drawing/2014/main" id="{9182EFA9-113B-3F35-BA20-9FAC11E551BB}"/>
+              </a:ext>
+            </a:extLst>
+          </p:cNvPr>
+          <p:cNvSpPr>
+            <a:spLocks noGrp="1"/>
+          </p:cNvSpPr>
+          <p:nvPr>
+            <p:ph type="ctrTitle"/>
+          </p:nvPr>
+        </p:nvSpPr>
+        <p:spPr/>
+        <p:txBody>
+          <a:bodyPr/>
+          <a:lstStyle/>
+          <a:p>
+            <a:endParaRPr lang="et-EE"/>
+          </a:p>
+        </p:txBody>
+      </p:sp>
+      <p:sp>
+        <p:nvSpPr>
+          <p:cNvPr id="3" name="Content Placeholder 2">
+            <a:extLst>
+              <a:ext uri="{FF2B5EF4-FFF2-40B4-BE49-F238E27FC236}">
+                <a16:creationId xmlns:a16="http://schemas.microsoft.com/office/drawing/2014/main" id="{2858F2BB-230A-4D83-62C3-1D56AFD34FFB}"/>
+              </a:ext>
+            </a:extLst>
+          </p:cNvPr>
+          <p:cNvSpPr>
+            <a:spLocks noGrp="1"/>
+          </p:cNvSpPr>
+          <p:nvPr>
+            <p:ph sz="quarter" idx="10"/>
+          </p:nvPr>
+        </p:nvSpPr>
+        <p:spPr/>
+        <p:txBody>
+          <a:bodyPr/>
+          <a:lstStyle/>
+          <a:p>
+            <a:endParaRPr lang="et-EE"/>
+          </a:p>
+        </p:txBody>
+      </p:sp>
+      <p:pic>
+        <p:nvPicPr>
+          <p:cNvPr id="4" name="Picture 3" descr="50+ data science memes to fight the weekday blues">
+            <a:extLst>
+              <a:ext uri="{FF2B5EF4-FFF2-40B4-BE49-F238E27FC236}">
+                <a16:creationId xmlns:a16="http://schemas.microsoft.com/office/drawing/2014/main" id="{785876CE-F3A1-65EB-6EC2-C2990356586F}"/>
+              </a:ext>
+            </a:extLst>
+          </p:cNvPr>
+          <p:cNvPicPr>
+            <a:picLocks noChangeAspect="1"/>
+          </p:cNvPicPr>
+          <p:nvPr/>
+        </p:nvPicPr>
+        <p:blipFill>
+          <a:blip r:embed="rId2"/>
+          <a:stretch>
+            <a:fillRect/>
+          </a:stretch>
+        </p:blipFill>
+        <p:spPr>
+          <a:xfrm>
+            <a:off x="3810983" y="1144475"/>
+            <a:ext cx="4572000" cy="4572000"/>
+          </a:xfrm>
+          <a:prstGeom prst="rect">
+            <a:avLst/>
+          </a:prstGeom>
+        </p:spPr>
+      </p:pic>
+    </p:spTree>
+    <p:extLst>
+      <p:ext uri="{BB962C8B-B14F-4D97-AF65-F5344CB8AC3E}">
+        <p14:creationId xmlns:p14="http://schemas.microsoft.com/office/powerpoint/2010/main" val="4174591945"/>
+      </p:ext>
+    </p:extLst>
+  </p:cSld>
+  <p:clrMapOvr>
+    <a:masterClrMapping/>
+  </p:clrMapOvr>
+</p:sld>
+</file>
+
+<file path=ppt/slides/slide16.xml><?xml version="1.0" encoding="utf-8"?>
 <p:sld xmlns:a="http://schemas.openxmlformats.org/drawingml/2006/main" xmlns:r="http://schemas.openxmlformats.org/officeDocument/2006/relationships" xmlns:p="http://schemas.openxmlformats.org/presentationml/2006/main">
   <p:cSld>
     <p:spTree>
@@ -30441,7 +31092,7 @@
 </p:sld>
 </file>
 
-<file path=ppt/slides/slide15.xml><?xml version="1.0" encoding="utf-8"?>
+<file path=ppt/slides/slide17.xml><?xml version="1.0" encoding="utf-8"?>
 <p:sld xmlns:a="http://schemas.openxmlformats.org/drawingml/2006/main" xmlns:r="http://schemas.openxmlformats.org/officeDocument/2006/relationships" xmlns:p="http://schemas.openxmlformats.org/presentationml/2006/main">
   <p:cSld>
     <p:spTree>
@@ -31033,7 +31684,7 @@
 </p:sld>
 </file>
 
-<file path=ppt/slides/slide16.xml><?xml version="1.0" encoding="utf-8"?>
+<file path=ppt/slides/slide18.xml><?xml version="1.0" encoding="utf-8"?>
 <p:sld xmlns:a="http://schemas.openxmlformats.org/drawingml/2006/main" xmlns:r="http://schemas.openxmlformats.org/officeDocument/2006/relationships" xmlns:p="http://schemas.openxmlformats.org/presentationml/2006/main">
   <p:cSld>
     <p:spTree>
@@ -31848,90 +32499,7 @@
 </p:sld>
 </file>
 
-<file path=ppt/slides/slide17.xml><?xml version="1.0" encoding="utf-8"?>
-<p:sld xmlns:a="http://schemas.openxmlformats.org/drawingml/2006/main" xmlns:r="http://schemas.openxmlformats.org/officeDocument/2006/relationships" xmlns:p="http://schemas.openxmlformats.org/presentationml/2006/main">
-  <p:cSld>
-    <p:spTree>
-      <p:nvGrpSpPr>
-        <p:cNvPr id="1" name=""/>
-        <p:cNvGrpSpPr/>
-        <p:nvPr/>
-      </p:nvGrpSpPr>
-      <p:grpSpPr>
-        <a:xfrm>
-          <a:off x="0" y="0"/>
-          <a:ext cx="0" cy="0"/>
-          <a:chOff x="0" y="0"/>
-          <a:chExt cx="0" cy="0"/>
-        </a:xfrm>
-      </p:grpSpPr>
-      <p:sp>
-        <p:nvSpPr>
-          <p:cNvPr id="2" name="Title 1">
-            <a:extLst>
-              <a:ext uri="{FF2B5EF4-FFF2-40B4-BE49-F238E27FC236}">
-                <a16:creationId xmlns:a16="http://schemas.microsoft.com/office/drawing/2014/main" id="{7BF68CA8-8BF9-41CD-59B3-AA2E469DA607}"/>
-              </a:ext>
-            </a:extLst>
-          </p:cNvPr>
-          <p:cNvSpPr>
-            <a:spLocks noGrp="1"/>
-          </p:cNvSpPr>
-          <p:nvPr>
-            <p:ph type="ctrTitle"/>
-          </p:nvPr>
-        </p:nvSpPr>
-        <p:spPr/>
-        <p:txBody>
-          <a:bodyPr/>
-          <a:lstStyle/>
-          <a:p>
-            <a:r>
-              <a:rPr lang="et-EE"/>
-              <a:t>Andmeleping</a:t>
-            </a:r>
-          </a:p>
-        </p:txBody>
-      </p:sp>
-      <p:sp>
-        <p:nvSpPr>
-          <p:cNvPr id="3" name="Content Placeholder 2">
-            <a:extLst>
-              <a:ext uri="{FF2B5EF4-FFF2-40B4-BE49-F238E27FC236}">
-                <a16:creationId xmlns:a16="http://schemas.microsoft.com/office/drawing/2014/main" id="{12F03704-6FC0-C83A-69AC-D82A98E5430A}"/>
-              </a:ext>
-            </a:extLst>
-          </p:cNvPr>
-          <p:cNvSpPr>
-            <a:spLocks noGrp="1"/>
-          </p:cNvSpPr>
-          <p:nvPr>
-            <p:ph sz="quarter" idx="10"/>
-          </p:nvPr>
-        </p:nvSpPr>
-        <p:spPr/>
-        <p:txBody>
-          <a:bodyPr/>
-          <a:lstStyle/>
-          <a:p>
-            <a:endParaRPr lang="et-EE"/>
-          </a:p>
-        </p:txBody>
-      </p:sp>
-    </p:spTree>
-    <p:extLst>
-      <p:ext uri="{BB962C8B-B14F-4D97-AF65-F5344CB8AC3E}">
-        <p14:creationId xmlns:p14="http://schemas.microsoft.com/office/powerpoint/2010/main" val="2866025945"/>
-      </p:ext>
-    </p:extLst>
-  </p:cSld>
-  <p:clrMapOvr>
-    <a:masterClrMapping/>
-  </p:clrMapOvr>
-</p:sld>
-</file>
-
-<file path=ppt/slides/slide18.xml><?xml version="1.0" encoding="utf-8"?>
+<file path=ppt/slides/slide19.xml><?xml version="1.0" encoding="utf-8"?>
 <p:sld xmlns:a="http://schemas.openxmlformats.org/drawingml/2006/main" xmlns:r="http://schemas.openxmlformats.org/officeDocument/2006/relationships" xmlns:p="http://schemas.openxmlformats.org/presentationml/2006/main">
   <p:cSld>
     <p:spTree>
@@ -32045,980 +32613,6 @@
   <p:clrMapOvr>
     <a:masterClrMapping/>
   </p:clrMapOvr>
-</p:sld>
-</file>
-
-<file path=ppt/slides/slide19.xml><?xml version="1.0" encoding="utf-8"?>
-<p:sld xmlns:a="http://schemas.openxmlformats.org/drawingml/2006/main" xmlns:r="http://schemas.openxmlformats.org/officeDocument/2006/relationships" xmlns:p="http://schemas.openxmlformats.org/presentationml/2006/main">
-  <p:cSld>
-    <p:spTree>
-      <p:nvGrpSpPr>
-        <p:cNvPr id="1" name="">
-          <a:extLst>
-            <a:ext uri="{FF2B5EF4-FFF2-40B4-BE49-F238E27FC236}">
-              <a16:creationId xmlns:a16="http://schemas.microsoft.com/office/drawing/2014/main" id="{9B9DA3D0-8C2A-48AF-9EFE-6C50C1190E60}"/>
-            </a:ext>
-          </a:extLst>
-        </p:cNvPr>
-        <p:cNvGrpSpPr/>
-        <p:nvPr/>
-      </p:nvGrpSpPr>
-      <p:grpSpPr>
-        <a:xfrm>
-          <a:off x="0" y="0"/>
-          <a:ext cx="0" cy="0"/>
-          <a:chOff x="0" y="0"/>
-          <a:chExt cx="0" cy="0"/>
-        </a:xfrm>
-      </p:grpSpPr>
-      <p:sp>
-        <p:nvSpPr>
-          <p:cNvPr id="2" name="Title 1">
-            <a:extLst>
-              <a:ext uri="{FF2B5EF4-FFF2-40B4-BE49-F238E27FC236}">
-                <a16:creationId xmlns:a16="http://schemas.microsoft.com/office/drawing/2014/main" id="{DA2B65EE-48A4-69E5-3FEC-7320EC6297EC}"/>
-              </a:ext>
-            </a:extLst>
-          </p:cNvPr>
-          <p:cNvSpPr>
-            <a:spLocks noGrp="1"/>
-          </p:cNvSpPr>
-          <p:nvPr>
-            <p:ph type="ctrTitle"/>
-          </p:nvPr>
-        </p:nvSpPr>
-        <p:spPr/>
-        <p:txBody>
-          <a:bodyPr/>
-          <a:lstStyle/>
-          <a:p>
-            <a:r>
-              <a:rPr lang="en-US" sz="3600" b="1"/>
-              <a:t>Power BI </a:t>
-            </a:r>
-            <a:r>
-              <a:rPr lang="en-US" sz="3600" b="1" err="1"/>
-              <a:t>jätk</a:t>
-            </a:r>
-            <a:r>
-              <a:rPr lang="en-US" sz="3600" b="1"/>
-              <a:t> - </a:t>
-            </a:r>
-            <a:r>
-              <a:rPr lang="en-US" sz="3600" b="1" err="1"/>
-              <a:t>kasumlikkus</a:t>
-            </a:r>
-            <a:r>
-              <a:rPr lang="en-US" sz="3600" b="1"/>
-              <a:t> </a:t>
-            </a:r>
-            <a:r>
-              <a:rPr lang="en-US" sz="3600" b="1" err="1"/>
-              <a:t>toodete</a:t>
-            </a:r>
-            <a:r>
-              <a:rPr lang="en-US" sz="3600" b="1"/>
-              <a:t> </a:t>
-            </a:r>
-            <a:r>
-              <a:rPr lang="en-US" sz="3600" b="1" err="1"/>
-              <a:t>kaupa</a:t>
-            </a:r>
-            <a:endParaRPr lang="en-US" sz="3600" b="1"/>
-          </a:p>
-        </p:txBody>
-      </p:sp>
-      <p:sp>
-        <p:nvSpPr>
-          <p:cNvPr id="3" name="Content Placeholder 2">
-            <a:extLst>
-              <a:ext uri="{FF2B5EF4-FFF2-40B4-BE49-F238E27FC236}">
-                <a16:creationId xmlns:a16="http://schemas.microsoft.com/office/drawing/2014/main" id="{54A5CD7F-2AB0-ECD5-B623-B427F1CA8C21}"/>
-              </a:ext>
-            </a:extLst>
-          </p:cNvPr>
-          <p:cNvSpPr>
-            <a:spLocks noGrp="1"/>
-          </p:cNvSpPr>
-          <p:nvPr>
-            <p:ph sz="quarter" idx="10"/>
-          </p:nvPr>
-        </p:nvSpPr>
-        <p:spPr/>
-        <p:txBody>
-          <a:bodyPr/>
-          <a:lstStyle/>
-          <a:p>
-            <a:pPr marL="342900" indent="-342900">
-              <a:lnSpc>
-                <a:spcPct val="150000"/>
-              </a:lnSpc>
-              <a:buFont typeface="Arial,Sans-Serif" panose="020B0502030000000004" pitchFamily="34" charset="0"/>
-              <a:buChar char="•"/>
-            </a:pPr>
-            <a:r>
-              <a:rPr lang="en-US" sz="2400" dirty="0">
-                <a:solidFill>
-                  <a:srgbClr val="121212"/>
-                </a:solidFill>
-                <a:latin typeface="Inter"/>
-                <a:ea typeface="Inter"/>
-                <a:cs typeface="Arial"/>
-              </a:rPr>
-              <a:t>Kuidas </a:t>
-            </a:r>
-            <a:r>
-              <a:rPr lang="en-US" sz="2400" dirty="0" err="1">
-                <a:solidFill>
-                  <a:srgbClr val="121212"/>
-                </a:solidFill>
-                <a:latin typeface="Inter"/>
-                <a:ea typeface="Inter"/>
-                <a:cs typeface="Arial"/>
-              </a:rPr>
-              <a:t>toodete</a:t>
-            </a:r>
-            <a:r>
-              <a:rPr lang="en-US" sz="2400" dirty="0">
-                <a:solidFill>
-                  <a:srgbClr val="121212"/>
-                </a:solidFill>
-                <a:latin typeface="Inter"/>
-                <a:ea typeface="Inter"/>
-                <a:cs typeface="Arial"/>
-              </a:rPr>
-              <a:t> kaupa on </a:t>
-            </a:r>
-            <a:r>
-              <a:rPr lang="en-US" sz="2400" dirty="0" err="1">
-                <a:solidFill>
-                  <a:srgbClr val="121212"/>
-                </a:solidFill>
-                <a:latin typeface="Inter"/>
-                <a:ea typeface="Inter"/>
-                <a:cs typeface="Arial"/>
-              </a:rPr>
-              <a:t>kasumlikkus</a:t>
-            </a:r>
-            <a:r>
-              <a:rPr lang="en-US" sz="2400" dirty="0">
-                <a:solidFill>
-                  <a:srgbClr val="121212"/>
-                </a:solidFill>
-                <a:latin typeface="Inter"/>
-                <a:ea typeface="Inter"/>
-                <a:cs typeface="Arial"/>
-              </a:rPr>
-              <a:t>?</a:t>
-            </a:r>
-            <a:endParaRPr lang="en-US" sz="2400" dirty="0">
-              <a:solidFill>
-                <a:srgbClr val="121212"/>
-              </a:solidFill>
-              <a:latin typeface="Inter" panose="02000503000000020004" pitchFamily="2" charset="0"/>
-              <a:cs typeface="Arial"/>
-            </a:endParaRPr>
-          </a:p>
-          <a:p>
-            <a:pPr marL="857250" lvl="1" indent="-342900">
-              <a:lnSpc>
-                <a:spcPct val="150000"/>
-              </a:lnSpc>
-              <a:buFont typeface="Arial,Sans-Serif" panose="020B0502030000000004" pitchFamily="34" charset="0"/>
-              <a:buChar char="•"/>
-            </a:pPr>
-            <a:r>
-              <a:rPr lang="en-US" sz="2400" dirty="0" err="1">
-                <a:solidFill>
-                  <a:srgbClr val="121212"/>
-                </a:solidFill>
-                <a:latin typeface="Inter"/>
-                <a:ea typeface="Inter"/>
-                <a:cs typeface="Arial"/>
-              </a:rPr>
-              <a:t>Müügisumma</a:t>
-            </a:r>
-            <a:br>
-              <a:rPr lang="en-US" sz="2400" dirty="0">
-                <a:cs typeface="Arial"/>
-              </a:rPr>
-            </a:br>
-            <a:r>
-              <a:rPr lang="en-US" sz="2000" dirty="0">
-                <a:solidFill>
-                  <a:srgbClr val="121212"/>
-                </a:solidFill>
-                <a:latin typeface="Inter"/>
-                <a:ea typeface="Inter"/>
-                <a:cs typeface="Arial"/>
-              </a:rPr>
-              <a:t>Sales Sum = Quantity * </a:t>
-            </a:r>
-            <a:r>
-              <a:rPr lang="en-US" sz="2000" dirty="0" err="1">
-                <a:solidFill>
-                  <a:srgbClr val="121212"/>
-                </a:solidFill>
-                <a:latin typeface="Inter"/>
-                <a:ea typeface="Inter"/>
-                <a:cs typeface="Arial"/>
-              </a:rPr>
-              <a:t>UnitPrice</a:t>
-            </a:r>
-            <a:r>
-              <a:rPr lang="en-US" sz="2000" dirty="0">
-                <a:solidFill>
-                  <a:srgbClr val="121212"/>
-                </a:solidFill>
-                <a:latin typeface="Inter"/>
-                <a:ea typeface="Inter"/>
-                <a:cs typeface="Arial"/>
-              </a:rPr>
-              <a:t> * (1 - Discount)</a:t>
-            </a:r>
-            <a:endParaRPr lang="en-US" sz="2400" dirty="0">
-              <a:solidFill>
-                <a:srgbClr val="121212"/>
-              </a:solidFill>
-              <a:latin typeface="Inter"/>
-              <a:ea typeface="Inter"/>
-              <a:cs typeface="Arial"/>
-            </a:endParaRPr>
-          </a:p>
-          <a:p>
-            <a:pPr marL="342900" indent="-342900">
-              <a:lnSpc>
-                <a:spcPct val="150000"/>
-              </a:lnSpc>
-              <a:buFont typeface="Arial,Sans-Serif" panose="020B0502030000000004" pitchFamily="34" charset="0"/>
-              <a:buChar char="•"/>
-            </a:pPr>
-            <a:r>
-              <a:rPr lang="en-US" sz="2400" dirty="0">
-                <a:solidFill>
-                  <a:srgbClr val="121212"/>
-                </a:solidFill>
-                <a:latin typeface="Inter"/>
-                <a:ea typeface="Inter"/>
-                <a:cs typeface="Arial"/>
-              </a:rPr>
-              <a:t>Vaja </a:t>
-            </a:r>
-            <a:r>
-              <a:rPr lang="en-US" sz="2400" dirty="0" err="1">
-                <a:solidFill>
-                  <a:srgbClr val="121212"/>
-                </a:solidFill>
-                <a:latin typeface="Inter"/>
-                <a:ea typeface="Inter"/>
-                <a:cs typeface="Arial"/>
-              </a:rPr>
-              <a:t>arvutada</a:t>
-            </a:r>
-            <a:r>
-              <a:rPr lang="en-US" sz="2400" dirty="0">
-                <a:solidFill>
-                  <a:srgbClr val="121212"/>
-                </a:solidFill>
-                <a:latin typeface="Inter"/>
-                <a:ea typeface="Inter"/>
-                <a:cs typeface="Arial"/>
-              </a:rPr>
-              <a:t> </a:t>
-            </a:r>
-            <a:r>
-              <a:rPr lang="en-US" sz="2400" dirty="0" err="1">
-                <a:solidFill>
-                  <a:srgbClr val="121212"/>
-                </a:solidFill>
-                <a:latin typeface="Inter"/>
-                <a:ea typeface="Inter"/>
-                <a:cs typeface="Arial"/>
-              </a:rPr>
-              <a:t>kulu</a:t>
-            </a:r>
-            <a:r>
-              <a:rPr lang="en-US" sz="2400" dirty="0">
-                <a:solidFill>
-                  <a:srgbClr val="121212"/>
-                </a:solidFill>
-                <a:latin typeface="Inter"/>
-                <a:ea typeface="Inter"/>
-                <a:cs typeface="Arial"/>
-              </a:rPr>
-              <a:t>:</a:t>
-            </a:r>
-            <a:endParaRPr lang="en-US" sz="2400" dirty="0"/>
-          </a:p>
-          <a:p>
-            <a:pPr marL="800100" lvl="1" indent="-342900">
-              <a:lnSpc>
-                <a:spcPct val="150000"/>
-              </a:lnSpc>
-              <a:buFont typeface="Courier New,monospace" panose="020B0502030000000004" pitchFamily="34" charset="0"/>
-              <a:buChar char="o"/>
-            </a:pPr>
-            <a:r>
-              <a:rPr lang="en-US" sz="2000" dirty="0" err="1">
-                <a:solidFill>
-                  <a:srgbClr val="121212"/>
-                </a:solidFill>
-                <a:latin typeface="Inter"/>
-                <a:ea typeface="Inter"/>
-                <a:cs typeface="Arial"/>
-              </a:rPr>
-              <a:t>Arvutatud</a:t>
-            </a:r>
-            <a:r>
-              <a:rPr lang="en-US" sz="2000" dirty="0">
-                <a:solidFill>
-                  <a:srgbClr val="121212"/>
-                </a:solidFill>
-                <a:latin typeface="Inter"/>
-                <a:ea typeface="Inter"/>
-                <a:cs typeface="Arial"/>
-              </a:rPr>
-              <a:t> </a:t>
-            </a:r>
-            <a:r>
-              <a:rPr lang="en-US" sz="2000" dirty="0" err="1">
-                <a:solidFill>
-                  <a:srgbClr val="121212"/>
-                </a:solidFill>
-                <a:latin typeface="Inter"/>
-                <a:ea typeface="Inter"/>
-                <a:cs typeface="Arial"/>
-              </a:rPr>
-              <a:t>tulp</a:t>
-            </a:r>
-            <a:r>
-              <a:rPr lang="en-US" sz="2000" dirty="0">
-                <a:solidFill>
-                  <a:srgbClr val="121212"/>
-                </a:solidFill>
-                <a:latin typeface="Inter"/>
-                <a:ea typeface="Inter"/>
-                <a:cs typeface="Arial"/>
-              </a:rPr>
-              <a:t>: </a:t>
-            </a:r>
-            <a:br>
-              <a:rPr lang="en-US" sz="2000" dirty="0">
-                <a:solidFill>
-                  <a:srgbClr val="121212"/>
-                </a:solidFill>
-                <a:latin typeface="Inter"/>
-                <a:ea typeface="Inter"/>
-                <a:cs typeface="Arial"/>
-              </a:rPr>
-            </a:br>
-            <a:r>
-              <a:rPr lang="en-US" sz="2000" dirty="0">
-                <a:solidFill>
-                  <a:srgbClr val="121212"/>
-                </a:solidFill>
-                <a:latin typeface="Inter"/>
-                <a:ea typeface="Inter"/>
-                <a:cs typeface="Arial"/>
-              </a:rPr>
-              <a:t>Cost Sum = </a:t>
-            </a:r>
-            <a:r>
-              <a:rPr lang="en-US" sz="2000" dirty="0" err="1">
-                <a:solidFill>
-                  <a:srgbClr val="121212"/>
-                </a:solidFill>
-                <a:latin typeface="Inter"/>
-                <a:ea typeface="Inter"/>
-                <a:cs typeface="Arial"/>
-              </a:rPr>
-              <a:t>SalesTable</a:t>
-            </a:r>
-            <a:r>
-              <a:rPr lang="en-US" sz="2000" dirty="0">
-                <a:solidFill>
-                  <a:srgbClr val="121212"/>
-                </a:solidFill>
-                <a:latin typeface="Inter"/>
-                <a:ea typeface="Inter"/>
-                <a:cs typeface="Arial"/>
-              </a:rPr>
-              <a:t>[Quantity] * RELATED(</a:t>
-            </a:r>
-            <a:r>
-              <a:rPr lang="en-US" sz="2000" dirty="0" err="1">
-                <a:solidFill>
-                  <a:srgbClr val="121212"/>
-                </a:solidFill>
-                <a:latin typeface="Inter"/>
-                <a:ea typeface="Inter"/>
-                <a:cs typeface="Arial"/>
-              </a:rPr>
-              <a:t>ProductTable</a:t>
-            </a:r>
-            <a:r>
-              <a:rPr lang="en-US" sz="2000" dirty="0">
-                <a:solidFill>
-                  <a:srgbClr val="121212"/>
-                </a:solidFill>
-                <a:latin typeface="Inter"/>
-                <a:ea typeface="Inter"/>
-                <a:cs typeface="Arial"/>
-              </a:rPr>
-              <a:t>[Cost Price])</a:t>
-            </a:r>
-            <a:endParaRPr lang="en-US" sz="2000" dirty="0"/>
-          </a:p>
-          <a:p>
-            <a:pPr marL="342900" indent="-342900">
-              <a:lnSpc>
-                <a:spcPct val="150000"/>
-              </a:lnSpc>
-              <a:buFont typeface="Arial,Sans-Serif" panose="020B0502030000000004" pitchFamily="34" charset="0"/>
-              <a:buChar char="•"/>
-            </a:pPr>
-            <a:r>
-              <a:rPr lang="en-US" sz="2400" dirty="0">
-                <a:solidFill>
-                  <a:srgbClr val="121212"/>
-                </a:solidFill>
-                <a:latin typeface="Inter"/>
-                <a:ea typeface="Inter"/>
-                <a:cs typeface="Arial"/>
-              </a:rPr>
-              <a:t>Vaja </a:t>
-            </a:r>
-            <a:r>
-              <a:rPr lang="en-US" sz="2400" dirty="0" err="1">
-                <a:solidFill>
-                  <a:srgbClr val="121212"/>
-                </a:solidFill>
-                <a:latin typeface="Inter"/>
-                <a:ea typeface="Inter"/>
-                <a:cs typeface="Arial"/>
-              </a:rPr>
-              <a:t>arvutada</a:t>
-            </a:r>
-            <a:r>
-              <a:rPr lang="en-US" sz="2400" dirty="0">
-                <a:solidFill>
-                  <a:srgbClr val="121212"/>
-                </a:solidFill>
-                <a:latin typeface="Inter"/>
-                <a:ea typeface="Inter"/>
-                <a:cs typeface="Arial"/>
-              </a:rPr>
-              <a:t> </a:t>
-            </a:r>
-            <a:r>
-              <a:rPr lang="en-US" sz="2400" dirty="0" err="1">
-                <a:solidFill>
-                  <a:srgbClr val="121212"/>
-                </a:solidFill>
-                <a:latin typeface="Inter"/>
-                <a:ea typeface="Inter"/>
-                <a:cs typeface="Arial"/>
-              </a:rPr>
-              <a:t>kasum</a:t>
-            </a:r>
-            <a:r>
-              <a:rPr lang="en-US" sz="2400" dirty="0">
-                <a:solidFill>
-                  <a:srgbClr val="121212"/>
-                </a:solidFill>
-                <a:latin typeface="Inter"/>
-                <a:ea typeface="Inter"/>
-                <a:cs typeface="Arial"/>
-              </a:rPr>
-              <a:t>: </a:t>
-            </a:r>
-            <a:endParaRPr lang="en-US" sz="2400" dirty="0"/>
-          </a:p>
-          <a:p>
-            <a:pPr marL="800100" lvl="1" indent="-342900">
-              <a:lnSpc>
-                <a:spcPct val="150000"/>
-              </a:lnSpc>
-              <a:buFont typeface="Courier New,monospace" panose="020B0502030000000004" pitchFamily="34" charset="0"/>
-              <a:buChar char="o"/>
-            </a:pPr>
-            <a:r>
-              <a:rPr lang="en-US" sz="2000" dirty="0" err="1">
-                <a:solidFill>
-                  <a:srgbClr val="121212"/>
-                </a:solidFill>
-                <a:latin typeface="Inter"/>
-                <a:ea typeface="Inter"/>
-                <a:cs typeface="Arial"/>
-              </a:rPr>
-              <a:t>Mõõdik</a:t>
-            </a:r>
-            <a:r>
-              <a:rPr lang="en-US" sz="2000" dirty="0">
-                <a:solidFill>
-                  <a:srgbClr val="121212"/>
-                </a:solidFill>
-                <a:latin typeface="Inter"/>
-                <a:ea typeface="Inter"/>
-                <a:cs typeface="Arial"/>
-              </a:rPr>
-              <a:t>:</a:t>
-            </a:r>
-          </a:p>
-          <a:p>
-            <a:pPr marL="857250" lvl="2" indent="0">
-              <a:lnSpc>
-                <a:spcPct val="150000"/>
-              </a:lnSpc>
-              <a:buNone/>
-            </a:pPr>
-            <a:r>
-              <a:rPr lang="en-US" sz="2000" dirty="0">
-                <a:solidFill>
-                  <a:srgbClr val="121212"/>
-                </a:solidFill>
-                <a:latin typeface="Inter"/>
-                <a:ea typeface="Inter"/>
-                <a:cs typeface="Arial"/>
-              </a:rPr>
-              <a:t>Profit = SUM(</a:t>
-            </a:r>
-            <a:r>
-              <a:rPr lang="en-US" sz="2000" dirty="0" err="1">
-                <a:solidFill>
-                  <a:srgbClr val="121212"/>
-                </a:solidFill>
-                <a:latin typeface="Inter"/>
-                <a:ea typeface="Inter"/>
-                <a:cs typeface="Arial"/>
-              </a:rPr>
-              <a:t>SalesTable</a:t>
-            </a:r>
-            <a:r>
-              <a:rPr lang="en-US" sz="2000" dirty="0">
-                <a:solidFill>
-                  <a:srgbClr val="121212"/>
-                </a:solidFill>
-                <a:latin typeface="Inter"/>
-                <a:ea typeface="Inter"/>
-                <a:cs typeface="Arial"/>
-              </a:rPr>
-              <a:t>[Sales Sum]) - SUM(</a:t>
-            </a:r>
-            <a:r>
-              <a:rPr lang="en-US" sz="2000" dirty="0" err="1">
-                <a:solidFill>
-                  <a:srgbClr val="121212"/>
-                </a:solidFill>
-                <a:latin typeface="Inter"/>
-                <a:ea typeface="Inter"/>
-                <a:cs typeface="Arial"/>
-              </a:rPr>
-              <a:t>SalesTable</a:t>
-            </a:r>
-            <a:r>
-              <a:rPr lang="en-US" sz="2000" dirty="0">
-                <a:solidFill>
-                  <a:srgbClr val="121212"/>
-                </a:solidFill>
-                <a:latin typeface="Inter"/>
-                <a:ea typeface="Inter"/>
-                <a:cs typeface="Arial"/>
-              </a:rPr>
-              <a:t>[Cost Sum])</a:t>
-            </a:r>
-            <a:endParaRPr lang="en-US" dirty="0"/>
-          </a:p>
-          <a:p>
-            <a:pPr marL="514350" indent="-514350">
-              <a:lnSpc>
-                <a:spcPct val="150000"/>
-              </a:lnSpc>
-              <a:buClr>
-                <a:srgbClr val="121212"/>
-              </a:buClr>
-            </a:pPr>
-            <a:endParaRPr lang="en-US" sz="2800" dirty="0"/>
-          </a:p>
-          <a:p>
-            <a:pPr marL="0" indent="0">
-              <a:lnSpc>
-                <a:spcPct val="150000"/>
-              </a:lnSpc>
-              <a:buNone/>
-            </a:pPr>
-            <a:endParaRPr lang="en-US" sz="2800" dirty="0"/>
-          </a:p>
-        </p:txBody>
-      </p:sp>
-    </p:spTree>
-    <p:extLst>
-      <p:ext uri="{BB962C8B-B14F-4D97-AF65-F5344CB8AC3E}">
-        <p14:creationId xmlns:p14="http://schemas.microsoft.com/office/powerpoint/2010/main" val="3620925123"/>
-      </p:ext>
-    </p:extLst>
-  </p:cSld>
-  <p:clrMapOvr>
-    <a:masterClrMapping/>
-  </p:clrMapOvr>
-  <p:timing>
-    <p:tnLst>
-      <p:par>
-        <p:cTn id="1" dur="indefinite" restart="never" nodeType="tmRoot">
-          <p:childTnLst>
-            <p:seq concurrent="1" nextAc="seek">
-              <p:cTn id="2" dur="indefinite" nodeType="mainSeq">
-                <p:childTnLst>
-                  <p:par>
-                    <p:cTn id="3" fill="hold">
-                      <p:stCondLst>
-                        <p:cond delay="indefinite"/>
-                      </p:stCondLst>
-                      <p:childTnLst>
-                        <p:par>
-                          <p:cTn id="4" fill="hold">
-                            <p:stCondLst>
-                              <p:cond delay="0"/>
-                            </p:stCondLst>
-                            <p:childTnLst>
-                              <p:par>
-                                <p:cTn id="5" presetID="1" presetClass="entr" presetSubtype="0" fill="hold" grpId="0" nodeType="clickEffect">
-                                  <p:stCondLst>
-                                    <p:cond delay="0"/>
-                                  </p:stCondLst>
-                                  <p:childTnLst>
-                                    <p:set>
-                                      <p:cBhvr>
-                                        <p:cTn id="6" dur="1" fill="hold">
-                                          <p:stCondLst>
-                                            <p:cond delay="0"/>
-                                          </p:stCondLst>
-                                        </p:cTn>
-                                        <p:tgtEl>
-                                          <p:spTgt spid="3">
-                                            <p:txEl>
-                                              <p:pRg st="0" end="0"/>
-                                            </p:txEl>
-                                          </p:spTgt>
-                                        </p:tgtEl>
-                                        <p:attrNameLst>
-                                          <p:attrName>style.visibility</p:attrName>
-                                        </p:attrNameLst>
-                                      </p:cBhvr>
-                                      <p:to>
-                                        <p:strVal val="visible"/>
-                                      </p:to>
-                                    </p:set>
-                                  </p:childTnLst>
-                                </p:cTn>
-                              </p:par>
-                              <p:par>
-                                <p:cTn id="7" presetID="1" presetClass="entr" presetSubtype="0" fill="hold" grpId="0" nodeType="withEffect">
-                                  <p:stCondLst>
-                                    <p:cond delay="0"/>
-                                  </p:stCondLst>
-                                  <p:childTnLst>
-                                    <p:set>
-                                      <p:cBhvr>
-                                        <p:cTn id="8" dur="1" fill="hold">
-                                          <p:stCondLst>
-                                            <p:cond delay="0"/>
-                                          </p:stCondLst>
-                                        </p:cTn>
-                                        <p:tgtEl>
-                                          <p:spTgt spid="3">
-                                            <p:txEl>
-                                              <p:pRg st="1" end="1"/>
-                                            </p:txEl>
-                                          </p:spTgt>
-                                        </p:tgtEl>
-                                        <p:attrNameLst>
-                                          <p:attrName>style.visibility</p:attrName>
-                                        </p:attrNameLst>
-                                      </p:cBhvr>
-                                      <p:to>
-                                        <p:strVal val="visible"/>
-                                      </p:to>
-                                    </p:set>
-                                  </p:childTnLst>
-                                </p:cTn>
-                              </p:par>
-                            </p:childTnLst>
-                          </p:cTn>
-                        </p:par>
-                      </p:childTnLst>
-                    </p:cTn>
-                  </p:par>
-                  <p:par>
-                    <p:cTn id="9" fill="hold">
-                      <p:stCondLst>
-                        <p:cond delay="indefinite"/>
-                      </p:stCondLst>
-                      <p:childTnLst>
-                        <p:par>
-                          <p:cTn id="10" fill="hold">
-                            <p:stCondLst>
-                              <p:cond delay="0"/>
-                            </p:stCondLst>
-                            <p:childTnLst>
-                              <p:par>
-                                <p:cTn id="11" presetID="1" presetClass="entr" presetSubtype="0" fill="hold" grpId="0" nodeType="clickEffect">
-                                  <p:stCondLst>
-                                    <p:cond delay="0"/>
-                                  </p:stCondLst>
-                                  <p:childTnLst>
-                                    <p:set>
-                                      <p:cBhvr>
-                                        <p:cTn id="12" dur="1" fill="hold">
-                                          <p:stCondLst>
-                                            <p:cond delay="0"/>
-                                          </p:stCondLst>
-                                        </p:cTn>
-                                        <p:tgtEl>
-                                          <p:spTgt spid="3">
-                                            <p:txEl>
-                                              <p:pRg st="2" end="2"/>
-                                            </p:txEl>
-                                          </p:spTgt>
-                                        </p:tgtEl>
-                                        <p:attrNameLst>
-                                          <p:attrName>style.visibility</p:attrName>
-                                        </p:attrNameLst>
-                                      </p:cBhvr>
-                                      <p:to>
-                                        <p:strVal val="visible"/>
-                                      </p:to>
-                                    </p:set>
-                                  </p:childTnLst>
-                                </p:cTn>
-                              </p:par>
-                            </p:childTnLst>
-                          </p:cTn>
-                        </p:par>
-                      </p:childTnLst>
-                    </p:cTn>
-                  </p:par>
-                  <p:par>
-                    <p:cTn id="13" fill="hold">
-                      <p:stCondLst>
-                        <p:cond delay="indefinite"/>
-                      </p:stCondLst>
-                      <p:childTnLst>
-                        <p:par>
-                          <p:cTn id="14" fill="hold">
-                            <p:stCondLst>
-                              <p:cond delay="0"/>
-                            </p:stCondLst>
-                            <p:childTnLst>
-                              <p:par>
-                                <p:cTn id="15" presetID="1" presetClass="entr" presetSubtype="0" fill="hold" grpId="0" nodeType="clickEffect">
-                                  <p:stCondLst>
-                                    <p:cond delay="0"/>
-                                  </p:stCondLst>
-                                  <p:childTnLst>
-                                    <p:set>
-                                      <p:cBhvr>
-                                        <p:cTn id="16" dur="1" fill="hold">
-                                          <p:stCondLst>
-                                            <p:cond delay="0"/>
-                                          </p:stCondLst>
-                                        </p:cTn>
-                                        <p:tgtEl>
-                                          <p:spTgt spid="3">
-                                            <p:txEl>
-                                              <p:pRg st="3" end="3"/>
-                                            </p:txEl>
-                                          </p:spTgt>
-                                        </p:tgtEl>
-                                        <p:attrNameLst>
-                                          <p:attrName>style.visibility</p:attrName>
-                                        </p:attrNameLst>
-                                      </p:cBhvr>
-                                      <p:to>
-                                        <p:strVal val="visible"/>
-                                      </p:to>
-                                    </p:set>
-                                  </p:childTnLst>
-                                </p:cTn>
-                              </p:par>
-                            </p:childTnLst>
-                          </p:cTn>
-                        </p:par>
-                      </p:childTnLst>
-                    </p:cTn>
-                  </p:par>
-                  <p:par>
-                    <p:cTn id="17" fill="hold">
-                      <p:stCondLst>
-                        <p:cond delay="indefinite"/>
-                      </p:stCondLst>
-                      <p:childTnLst>
-                        <p:par>
-                          <p:cTn id="18" fill="hold">
-                            <p:stCondLst>
-                              <p:cond delay="0"/>
-                            </p:stCondLst>
-                            <p:childTnLst>
-                              <p:par>
-                                <p:cTn id="19" presetID="1" presetClass="entr" presetSubtype="0" fill="hold" grpId="0" nodeType="clickEffect">
-                                  <p:stCondLst>
-                                    <p:cond delay="0"/>
-                                  </p:stCondLst>
-                                  <p:childTnLst>
-                                    <p:set>
-                                      <p:cBhvr>
-                                        <p:cTn id="20" dur="1" fill="hold">
-                                          <p:stCondLst>
-                                            <p:cond delay="0"/>
-                                          </p:stCondLst>
-                                        </p:cTn>
-                                        <p:tgtEl>
-                                          <p:spTgt spid="3">
-                                            <p:txEl>
-                                              <p:pRg st="4" end="4"/>
-                                            </p:txEl>
-                                          </p:spTgt>
-                                        </p:tgtEl>
-                                        <p:attrNameLst>
-                                          <p:attrName>style.visibility</p:attrName>
-                                        </p:attrNameLst>
-                                      </p:cBhvr>
-                                      <p:to>
-                                        <p:strVal val="visible"/>
-                                      </p:to>
-                                    </p:set>
-                                  </p:childTnLst>
-                                </p:cTn>
-                              </p:par>
-                            </p:childTnLst>
-                          </p:cTn>
-                        </p:par>
-                      </p:childTnLst>
-                    </p:cTn>
-                  </p:par>
-                  <p:par>
-                    <p:cTn id="21" fill="hold">
-                      <p:stCondLst>
-                        <p:cond delay="indefinite"/>
-                      </p:stCondLst>
-                      <p:childTnLst>
-                        <p:par>
-                          <p:cTn id="22" fill="hold">
-                            <p:stCondLst>
-                              <p:cond delay="0"/>
-                            </p:stCondLst>
-                            <p:childTnLst>
-                              <p:par>
-                                <p:cTn id="23" presetID="1" presetClass="entr" presetSubtype="0" fill="hold" grpId="0" nodeType="clickEffect">
-                                  <p:stCondLst>
-                                    <p:cond delay="0"/>
-                                  </p:stCondLst>
-                                  <p:childTnLst>
-                                    <p:set>
-                                      <p:cBhvr>
-                                        <p:cTn id="24" dur="1" fill="hold">
-                                          <p:stCondLst>
-                                            <p:cond delay="0"/>
-                                          </p:stCondLst>
-                                        </p:cTn>
-                                        <p:tgtEl>
-                                          <p:spTgt spid="3">
-                                            <p:txEl>
-                                              <p:pRg st="5" end="5"/>
-                                            </p:txEl>
-                                          </p:spTgt>
-                                        </p:tgtEl>
-                                        <p:attrNameLst>
-                                          <p:attrName>style.visibility</p:attrName>
-                                        </p:attrNameLst>
-                                      </p:cBhvr>
-                                      <p:to>
-                                        <p:strVal val="visible"/>
-                                      </p:to>
-                                    </p:set>
-                                  </p:childTnLst>
-                                </p:cTn>
-                              </p:par>
-                            </p:childTnLst>
-                          </p:cTn>
-                        </p:par>
-                      </p:childTnLst>
-                    </p:cTn>
-                  </p:par>
-                  <p:par>
-                    <p:cTn id="25" fill="hold">
-                      <p:stCondLst>
-                        <p:cond delay="indefinite"/>
-                      </p:stCondLst>
-                      <p:childTnLst>
-                        <p:par>
-                          <p:cTn id="26" fill="hold">
-                            <p:stCondLst>
-                              <p:cond delay="0"/>
-                            </p:stCondLst>
-                            <p:childTnLst>
-                              <p:par>
-                                <p:cTn id="27" presetID="1" presetClass="entr" presetSubtype="0" fill="hold" grpId="0" nodeType="clickEffect">
-                                  <p:stCondLst>
-                                    <p:cond delay="0"/>
-                                  </p:stCondLst>
-                                  <p:childTnLst>
-                                    <p:set>
-                                      <p:cBhvr>
-                                        <p:cTn id="28" dur="1" fill="hold">
-                                          <p:stCondLst>
-                                            <p:cond delay="0"/>
-                                          </p:stCondLst>
-                                        </p:cTn>
-                                        <p:tgtEl>
-                                          <p:spTgt spid="3">
-                                            <p:txEl>
-                                              <p:pRg st="6" end="6"/>
-                                            </p:txEl>
-                                          </p:spTgt>
-                                        </p:tgtEl>
-                                        <p:attrNameLst>
-                                          <p:attrName>style.visibility</p:attrName>
-                                        </p:attrNameLst>
-                                      </p:cBhvr>
-                                      <p:to>
-                                        <p:strVal val="visible"/>
-                                      </p:to>
-                                    </p:set>
-                                  </p:childTnLst>
-                                </p:cTn>
-                              </p:par>
-                            </p:childTnLst>
-                          </p:cTn>
-                        </p:par>
-                      </p:childTnLst>
-                    </p:cTn>
-                  </p:par>
-                </p:childTnLst>
-              </p:cTn>
-              <p:prevCondLst>
-                <p:cond evt="onPrev" delay="0">
-                  <p:tgtEl>
-                    <p:sldTgt/>
-                  </p:tgtEl>
-                </p:cond>
-              </p:prevCondLst>
-              <p:nextCondLst>
-                <p:cond evt="onNext" delay="0">
-                  <p:tgtEl>
-                    <p:sldTgt/>
-                  </p:tgtEl>
-                </p:cond>
-              </p:nextCondLst>
-            </p:seq>
-          </p:childTnLst>
-        </p:cTn>
-      </p:par>
-    </p:tnLst>
-    <p:bldLst>
-      <p:bldP spid="3" grpId="0" build="p"/>
-    </p:bldLst>
-  </p:timing>
 </p:sld>
 </file>
 
@@ -33909,6 +33503,980 @@
         <p:cNvPr id="1" name="">
           <a:extLst>
             <a:ext uri="{FF2B5EF4-FFF2-40B4-BE49-F238E27FC236}">
+              <a16:creationId xmlns:a16="http://schemas.microsoft.com/office/drawing/2014/main" id="{9B9DA3D0-8C2A-48AF-9EFE-6C50C1190E60}"/>
+            </a:ext>
+          </a:extLst>
+        </p:cNvPr>
+        <p:cNvGrpSpPr/>
+        <p:nvPr/>
+      </p:nvGrpSpPr>
+      <p:grpSpPr>
+        <a:xfrm>
+          <a:off x="0" y="0"/>
+          <a:ext cx="0" cy="0"/>
+          <a:chOff x="0" y="0"/>
+          <a:chExt cx="0" cy="0"/>
+        </a:xfrm>
+      </p:grpSpPr>
+      <p:sp>
+        <p:nvSpPr>
+          <p:cNvPr id="2" name="Title 1">
+            <a:extLst>
+              <a:ext uri="{FF2B5EF4-FFF2-40B4-BE49-F238E27FC236}">
+                <a16:creationId xmlns:a16="http://schemas.microsoft.com/office/drawing/2014/main" id="{DA2B65EE-48A4-69E5-3FEC-7320EC6297EC}"/>
+              </a:ext>
+            </a:extLst>
+          </p:cNvPr>
+          <p:cNvSpPr>
+            <a:spLocks noGrp="1"/>
+          </p:cNvSpPr>
+          <p:nvPr>
+            <p:ph type="ctrTitle"/>
+          </p:nvPr>
+        </p:nvSpPr>
+        <p:spPr/>
+        <p:txBody>
+          <a:bodyPr/>
+          <a:lstStyle/>
+          <a:p>
+            <a:r>
+              <a:rPr lang="en-US" sz="3600" b="1"/>
+              <a:t>Power BI </a:t>
+            </a:r>
+            <a:r>
+              <a:rPr lang="en-US" sz="3600" b="1" err="1"/>
+              <a:t>jätk</a:t>
+            </a:r>
+            <a:r>
+              <a:rPr lang="en-US" sz="3600" b="1"/>
+              <a:t> - </a:t>
+            </a:r>
+            <a:r>
+              <a:rPr lang="en-US" sz="3600" b="1" err="1"/>
+              <a:t>kasumlikkus</a:t>
+            </a:r>
+            <a:r>
+              <a:rPr lang="en-US" sz="3600" b="1"/>
+              <a:t> </a:t>
+            </a:r>
+            <a:r>
+              <a:rPr lang="en-US" sz="3600" b="1" err="1"/>
+              <a:t>toodete</a:t>
+            </a:r>
+            <a:r>
+              <a:rPr lang="en-US" sz="3600" b="1"/>
+              <a:t> </a:t>
+            </a:r>
+            <a:r>
+              <a:rPr lang="en-US" sz="3600" b="1" err="1"/>
+              <a:t>kaupa</a:t>
+            </a:r>
+            <a:endParaRPr lang="en-US" sz="3600" b="1"/>
+          </a:p>
+        </p:txBody>
+      </p:sp>
+      <p:sp>
+        <p:nvSpPr>
+          <p:cNvPr id="3" name="Content Placeholder 2">
+            <a:extLst>
+              <a:ext uri="{FF2B5EF4-FFF2-40B4-BE49-F238E27FC236}">
+                <a16:creationId xmlns:a16="http://schemas.microsoft.com/office/drawing/2014/main" id="{54A5CD7F-2AB0-ECD5-B623-B427F1CA8C21}"/>
+              </a:ext>
+            </a:extLst>
+          </p:cNvPr>
+          <p:cNvSpPr>
+            <a:spLocks noGrp="1"/>
+          </p:cNvSpPr>
+          <p:nvPr>
+            <p:ph sz="quarter" idx="10"/>
+          </p:nvPr>
+        </p:nvSpPr>
+        <p:spPr/>
+        <p:txBody>
+          <a:bodyPr/>
+          <a:lstStyle/>
+          <a:p>
+            <a:pPr marL="342900" indent="-342900">
+              <a:lnSpc>
+                <a:spcPct val="150000"/>
+              </a:lnSpc>
+              <a:buFont typeface="Arial,Sans-Serif" panose="020B0502030000000004" pitchFamily="34" charset="0"/>
+              <a:buChar char="•"/>
+            </a:pPr>
+            <a:r>
+              <a:rPr lang="en-US" sz="2400" dirty="0">
+                <a:solidFill>
+                  <a:srgbClr val="121212"/>
+                </a:solidFill>
+                <a:latin typeface="Inter"/>
+                <a:ea typeface="Inter"/>
+                <a:cs typeface="Arial"/>
+              </a:rPr>
+              <a:t>Kuidas </a:t>
+            </a:r>
+            <a:r>
+              <a:rPr lang="en-US" sz="2400" dirty="0" err="1">
+                <a:solidFill>
+                  <a:srgbClr val="121212"/>
+                </a:solidFill>
+                <a:latin typeface="Inter"/>
+                <a:ea typeface="Inter"/>
+                <a:cs typeface="Arial"/>
+              </a:rPr>
+              <a:t>toodete</a:t>
+            </a:r>
+            <a:r>
+              <a:rPr lang="en-US" sz="2400" dirty="0">
+                <a:solidFill>
+                  <a:srgbClr val="121212"/>
+                </a:solidFill>
+                <a:latin typeface="Inter"/>
+                <a:ea typeface="Inter"/>
+                <a:cs typeface="Arial"/>
+              </a:rPr>
+              <a:t> kaupa on </a:t>
+            </a:r>
+            <a:r>
+              <a:rPr lang="en-US" sz="2400" dirty="0" err="1">
+                <a:solidFill>
+                  <a:srgbClr val="121212"/>
+                </a:solidFill>
+                <a:latin typeface="Inter"/>
+                <a:ea typeface="Inter"/>
+                <a:cs typeface="Arial"/>
+              </a:rPr>
+              <a:t>kasumlikkus</a:t>
+            </a:r>
+            <a:r>
+              <a:rPr lang="en-US" sz="2400" dirty="0">
+                <a:solidFill>
+                  <a:srgbClr val="121212"/>
+                </a:solidFill>
+                <a:latin typeface="Inter"/>
+                <a:ea typeface="Inter"/>
+                <a:cs typeface="Arial"/>
+              </a:rPr>
+              <a:t>?</a:t>
+            </a:r>
+            <a:endParaRPr lang="en-US" sz="2400" dirty="0">
+              <a:solidFill>
+                <a:srgbClr val="121212"/>
+              </a:solidFill>
+              <a:latin typeface="Inter" panose="02000503000000020004" pitchFamily="2" charset="0"/>
+              <a:cs typeface="Arial"/>
+            </a:endParaRPr>
+          </a:p>
+          <a:p>
+            <a:pPr marL="857250" lvl="1" indent="-342900">
+              <a:lnSpc>
+                <a:spcPct val="150000"/>
+              </a:lnSpc>
+              <a:buFont typeface="Arial,Sans-Serif" panose="020B0502030000000004" pitchFamily="34" charset="0"/>
+              <a:buChar char="•"/>
+            </a:pPr>
+            <a:r>
+              <a:rPr lang="en-US" sz="2400" dirty="0" err="1">
+                <a:solidFill>
+                  <a:srgbClr val="121212"/>
+                </a:solidFill>
+                <a:latin typeface="Inter"/>
+                <a:ea typeface="Inter"/>
+                <a:cs typeface="Arial"/>
+              </a:rPr>
+              <a:t>Müügisumma</a:t>
+            </a:r>
+            <a:br>
+              <a:rPr lang="en-US" sz="2400" dirty="0">
+                <a:cs typeface="Arial"/>
+              </a:rPr>
+            </a:br>
+            <a:r>
+              <a:rPr lang="en-US" sz="2000" dirty="0">
+                <a:solidFill>
+                  <a:srgbClr val="121212"/>
+                </a:solidFill>
+                <a:latin typeface="Inter"/>
+                <a:ea typeface="Inter"/>
+                <a:cs typeface="Arial"/>
+              </a:rPr>
+              <a:t>Sales Sum = Quantity * </a:t>
+            </a:r>
+            <a:r>
+              <a:rPr lang="en-US" sz="2000" dirty="0" err="1">
+                <a:solidFill>
+                  <a:srgbClr val="121212"/>
+                </a:solidFill>
+                <a:latin typeface="Inter"/>
+                <a:ea typeface="Inter"/>
+                <a:cs typeface="Arial"/>
+              </a:rPr>
+              <a:t>UnitPrice</a:t>
+            </a:r>
+            <a:r>
+              <a:rPr lang="en-US" sz="2000" dirty="0">
+                <a:solidFill>
+                  <a:srgbClr val="121212"/>
+                </a:solidFill>
+                <a:latin typeface="Inter"/>
+                <a:ea typeface="Inter"/>
+                <a:cs typeface="Arial"/>
+              </a:rPr>
+              <a:t> * (1 - Discount)</a:t>
+            </a:r>
+            <a:endParaRPr lang="en-US" sz="2400" dirty="0">
+              <a:solidFill>
+                <a:srgbClr val="121212"/>
+              </a:solidFill>
+              <a:latin typeface="Inter"/>
+              <a:ea typeface="Inter"/>
+              <a:cs typeface="Arial"/>
+            </a:endParaRPr>
+          </a:p>
+          <a:p>
+            <a:pPr marL="342900" indent="-342900">
+              <a:lnSpc>
+                <a:spcPct val="150000"/>
+              </a:lnSpc>
+              <a:buFont typeface="Arial,Sans-Serif" panose="020B0502030000000004" pitchFamily="34" charset="0"/>
+              <a:buChar char="•"/>
+            </a:pPr>
+            <a:r>
+              <a:rPr lang="en-US" sz="2400" dirty="0">
+                <a:solidFill>
+                  <a:srgbClr val="121212"/>
+                </a:solidFill>
+                <a:latin typeface="Inter"/>
+                <a:ea typeface="Inter"/>
+                <a:cs typeface="Arial"/>
+              </a:rPr>
+              <a:t>Vaja </a:t>
+            </a:r>
+            <a:r>
+              <a:rPr lang="en-US" sz="2400" dirty="0" err="1">
+                <a:solidFill>
+                  <a:srgbClr val="121212"/>
+                </a:solidFill>
+                <a:latin typeface="Inter"/>
+                <a:ea typeface="Inter"/>
+                <a:cs typeface="Arial"/>
+              </a:rPr>
+              <a:t>arvutada</a:t>
+            </a:r>
+            <a:r>
+              <a:rPr lang="en-US" sz="2400" dirty="0">
+                <a:solidFill>
+                  <a:srgbClr val="121212"/>
+                </a:solidFill>
+                <a:latin typeface="Inter"/>
+                <a:ea typeface="Inter"/>
+                <a:cs typeface="Arial"/>
+              </a:rPr>
+              <a:t> </a:t>
+            </a:r>
+            <a:r>
+              <a:rPr lang="en-US" sz="2400" dirty="0" err="1">
+                <a:solidFill>
+                  <a:srgbClr val="121212"/>
+                </a:solidFill>
+                <a:latin typeface="Inter"/>
+                <a:ea typeface="Inter"/>
+                <a:cs typeface="Arial"/>
+              </a:rPr>
+              <a:t>kulu</a:t>
+            </a:r>
+            <a:r>
+              <a:rPr lang="en-US" sz="2400" dirty="0">
+                <a:solidFill>
+                  <a:srgbClr val="121212"/>
+                </a:solidFill>
+                <a:latin typeface="Inter"/>
+                <a:ea typeface="Inter"/>
+                <a:cs typeface="Arial"/>
+              </a:rPr>
+              <a:t>:</a:t>
+            </a:r>
+            <a:endParaRPr lang="en-US" sz="2400" dirty="0"/>
+          </a:p>
+          <a:p>
+            <a:pPr marL="800100" lvl="1" indent="-342900">
+              <a:lnSpc>
+                <a:spcPct val="150000"/>
+              </a:lnSpc>
+              <a:buFont typeface="Courier New,monospace" panose="020B0502030000000004" pitchFamily="34" charset="0"/>
+              <a:buChar char="o"/>
+            </a:pPr>
+            <a:r>
+              <a:rPr lang="en-US" sz="2000" dirty="0" err="1">
+                <a:solidFill>
+                  <a:srgbClr val="121212"/>
+                </a:solidFill>
+                <a:latin typeface="Inter"/>
+                <a:ea typeface="Inter"/>
+                <a:cs typeface="Arial"/>
+              </a:rPr>
+              <a:t>Arvutatud</a:t>
+            </a:r>
+            <a:r>
+              <a:rPr lang="en-US" sz="2000" dirty="0">
+                <a:solidFill>
+                  <a:srgbClr val="121212"/>
+                </a:solidFill>
+                <a:latin typeface="Inter"/>
+                <a:ea typeface="Inter"/>
+                <a:cs typeface="Arial"/>
+              </a:rPr>
+              <a:t> </a:t>
+            </a:r>
+            <a:r>
+              <a:rPr lang="en-US" sz="2000" dirty="0" err="1">
+                <a:solidFill>
+                  <a:srgbClr val="121212"/>
+                </a:solidFill>
+                <a:latin typeface="Inter"/>
+                <a:ea typeface="Inter"/>
+                <a:cs typeface="Arial"/>
+              </a:rPr>
+              <a:t>tulp</a:t>
+            </a:r>
+            <a:r>
+              <a:rPr lang="en-US" sz="2000" dirty="0">
+                <a:solidFill>
+                  <a:srgbClr val="121212"/>
+                </a:solidFill>
+                <a:latin typeface="Inter"/>
+                <a:ea typeface="Inter"/>
+                <a:cs typeface="Arial"/>
+              </a:rPr>
+              <a:t>: </a:t>
+            </a:r>
+            <a:br>
+              <a:rPr lang="en-US" sz="2000" dirty="0">
+                <a:solidFill>
+                  <a:srgbClr val="121212"/>
+                </a:solidFill>
+                <a:latin typeface="Inter"/>
+                <a:ea typeface="Inter"/>
+                <a:cs typeface="Arial"/>
+              </a:rPr>
+            </a:br>
+            <a:r>
+              <a:rPr lang="en-US" sz="2000" dirty="0">
+                <a:solidFill>
+                  <a:srgbClr val="121212"/>
+                </a:solidFill>
+                <a:latin typeface="Inter"/>
+                <a:ea typeface="Inter"/>
+                <a:cs typeface="Arial"/>
+              </a:rPr>
+              <a:t>Cost Sum = </a:t>
+            </a:r>
+            <a:r>
+              <a:rPr lang="en-US" sz="2000" dirty="0" err="1">
+                <a:solidFill>
+                  <a:srgbClr val="121212"/>
+                </a:solidFill>
+                <a:latin typeface="Inter"/>
+                <a:ea typeface="Inter"/>
+                <a:cs typeface="Arial"/>
+              </a:rPr>
+              <a:t>SalesTable</a:t>
+            </a:r>
+            <a:r>
+              <a:rPr lang="en-US" sz="2000" dirty="0">
+                <a:solidFill>
+                  <a:srgbClr val="121212"/>
+                </a:solidFill>
+                <a:latin typeface="Inter"/>
+                <a:ea typeface="Inter"/>
+                <a:cs typeface="Arial"/>
+              </a:rPr>
+              <a:t>[Quantity] * RELATED(</a:t>
+            </a:r>
+            <a:r>
+              <a:rPr lang="en-US" sz="2000" dirty="0" err="1">
+                <a:solidFill>
+                  <a:srgbClr val="121212"/>
+                </a:solidFill>
+                <a:latin typeface="Inter"/>
+                <a:ea typeface="Inter"/>
+                <a:cs typeface="Arial"/>
+              </a:rPr>
+              <a:t>ProductTable</a:t>
+            </a:r>
+            <a:r>
+              <a:rPr lang="en-US" sz="2000" dirty="0">
+                <a:solidFill>
+                  <a:srgbClr val="121212"/>
+                </a:solidFill>
+                <a:latin typeface="Inter"/>
+                <a:ea typeface="Inter"/>
+                <a:cs typeface="Arial"/>
+              </a:rPr>
+              <a:t>[Cost Price])</a:t>
+            </a:r>
+            <a:endParaRPr lang="en-US" sz="2000" dirty="0"/>
+          </a:p>
+          <a:p>
+            <a:pPr marL="342900" indent="-342900">
+              <a:lnSpc>
+                <a:spcPct val="150000"/>
+              </a:lnSpc>
+              <a:buFont typeface="Arial,Sans-Serif" panose="020B0502030000000004" pitchFamily="34" charset="0"/>
+              <a:buChar char="•"/>
+            </a:pPr>
+            <a:r>
+              <a:rPr lang="en-US" sz="2400" dirty="0">
+                <a:solidFill>
+                  <a:srgbClr val="121212"/>
+                </a:solidFill>
+                <a:latin typeface="Inter"/>
+                <a:ea typeface="Inter"/>
+                <a:cs typeface="Arial"/>
+              </a:rPr>
+              <a:t>Vaja </a:t>
+            </a:r>
+            <a:r>
+              <a:rPr lang="en-US" sz="2400" dirty="0" err="1">
+                <a:solidFill>
+                  <a:srgbClr val="121212"/>
+                </a:solidFill>
+                <a:latin typeface="Inter"/>
+                <a:ea typeface="Inter"/>
+                <a:cs typeface="Arial"/>
+              </a:rPr>
+              <a:t>arvutada</a:t>
+            </a:r>
+            <a:r>
+              <a:rPr lang="en-US" sz="2400" dirty="0">
+                <a:solidFill>
+                  <a:srgbClr val="121212"/>
+                </a:solidFill>
+                <a:latin typeface="Inter"/>
+                <a:ea typeface="Inter"/>
+                <a:cs typeface="Arial"/>
+              </a:rPr>
+              <a:t> </a:t>
+            </a:r>
+            <a:r>
+              <a:rPr lang="en-US" sz="2400" dirty="0" err="1">
+                <a:solidFill>
+                  <a:srgbClr val="121212"/>
+                </a:solidFill>
+                <a:latin typeface="Inter"/>
+                <a:ea typeface="Inter"/>
+                <a:cs typeface="Arial"/>
+              </a:rPr>
+              <a:t>kasum</a:t>
+            </a:r>
+            <a:r>
+              <a:rPr lang="en-US" sz="2400" dirty="0">
+                <a:solidFill>
+                  <a:srgbClr val="121212"/>
+                </a:solidFill>
+                <a:latin typeface="Inter"/>
+                <a:ea typeface="Inter"/>
+                <a:cs typeface="Arial"/>
+              </a:rPr>
+              <a:t>: </a:t>
+            </a:r>
+            <a:endParaRPr lang="en-US" sz="2400" dirty="0"/>
+          </a:p>
+          <a:p>
+            <a:pPr marL="800100" lvl="1" indent="-342900">
+              <a:lnSpc>
+                <a:spcPct val="150000"/>
+              </a:lnSpc>
+              <a:buFont typeface="Courier New,monospace" panose="020B0502030000000004" pitchFamily="34" charset="0"/>
+              <a:buChar char="o"/>
+            </a:pPr>
+            <a:r>
+              <a:rPr lang="en-US" sz="2000" dirty="0" err="1">
+                <a:solidFill>
+                  <a:srgbClr val="121212"/>
+                </a:solidFill>
+                <a:latin typeface="Inter"/>
+                <a:ea typeface="Inter"/>
+                <a:cs typeface="Arial"/>
+              </a:rPr>
+              <a:t>Mõõdik</a:t>
+            </a:r>
+            <a:r>
+              <a:rPr lang="en-US" sz="2000" dirty="0">
+                <a:solidFill>
+                  <a:srgbClr val="121212"/>
+                </a:solidFill>
+                <a:latin typeface="Inter"/>
+                <a:ea typeface="Inter"/>
+                <a:cs typeface="Arial"/>
+              </a:rPr>
+              <a:t>:</a:t>
+            </a:r>
+          </a:p>
+          <a:p>
+            <a:pPr marL="857250" lvl="2" indent="0">
+              <a:lnSpc>
+                <a:spcPct val="150000"/>
+              </a:lnSpc>
+              <a:buNone/>
+            </a:pPr>
+            <a:r>
+              <a:rPr lang="en-US" sz="2000" dirty="0">
+                <a:solidFill>
+                  <a:srgbClr val="121212"/>
+                </a:solidFill>
+                <a:latin typeface="Inter"/>
+                <a:ea typeface="Inter"/>
+                <a:cs typeface="Arial"/>
+              </a:rPr>
+              <a:t>Profit = SUM(</a:t>
+            </a:r>
+            <a:r>
+              <a:rPr lang="en-US" sz="2000" dirty="0" err="1">
+                <a:solidFill>
+                  <a:srgbClr val="121212"/>
+                </a:solidFill>
+                <a:latin typeface="Inter"/>
+                <a:ea typeface="Inter"/>
+                <a:cs typeface="Arial"/>
+              </a:rPr>
+              <a:t>SalesTable</a:t>
+            </a:r>
+            <a:r>
+              <a:rPr lang="en-US" sz="2000" dirty="0">
+                <a:solidFill>
+                  <a:srgbClr val="121212"/>
+                </a:solidFill>
+                <a:latin typeface="Inter"/>
+                <a:ea typeface="Inter"/>
+                <a:cs typeface="Arial"/>
+              </a:rPr>
+              <a:t>[Sales Sum]) - SUM(</a:t>
+            </a:r>
+            <a:r>
+              <a:rPr lang="en-US" sz="2000" dirty="0" err="1">
+                <a:solidFill>
+                  <a:srgbClr val="121212"/>
+                </a:solidFill>
+                <a:latin typeface="Inter"/>
+                <a:ea typeface="Inter"/>
+                <a:cs typeface="Arial"/>
+              </a:rPr>
+              <a:t>SalesTable</a:t>
+            </a:r>
+            <a:r>
+              <a:rPr lang="en-US" sz="2000" dirty="0">
+                <a:solidFill>
+                  <a:srgbClr val="121212"/>
+                </a:solidFill>
+                <a:latin typeface="Inter"/>
+                <a:ea typeface="Inter"/>
+                <a:cs typeface="Arial"/>
+              </a:rPr>
+              <a:t>[Cost Sum])</a:t>
+            </a:r>
+            <a:endParaRPr lang="en-US" dirty="0"/>
+          </a:p>
+          <a:p>
+            <a:pPr marL="514350" indent="-514350">
+              <a:lnSpc>
+                <a:spcPct val="150000"/>
+              </a:lnSpc>
+              <a:buClr>
+                <a:srgbClr val="121212"/>
+              </a:buClr>
+            </a:pPr>
+            <a:endParaRPr lang="en-US" sz="2800" dirty="0"/>
+          </a:p>
+          <a:p>
+            <a:pPr marL="0" indent="0">
+              <a:lnSpc>
+                <a:spcPct val="150000"/>
+              </a:lnSpc>
+              <a:buNone/>
+            </a:pPr>
+            <a:endParaRPr lang="en-US" sz="2800" dirty="0"/>
+          </a:p>
+        </p:txBody>
+      </p:sp>
+    </p:spTree>
+    <p:extLst>
+      <p:ext uri="{BB962C8B-B14F-4D97-AF65-F5344CB8AC3E}">
+        <p14:creationId xmlns:p14="http://schemas.microsoft.com/office/powerpoint/2010/main" val="3620925123"/>
+      </p:ext>
+    </p:extLst>
+  </p:cSld>
+  <p:clrMapOvr>
+    <a:masterClrMapping/>
+  </p:clrMapOvr>
+  <p:timing>
+    <p:tnLst>
+      <p:par>
+        <p:cTn id="1" dur="indefinite" restart="never" nodeType="tmRoot">
+          <p:childTnLst>
+            <p:seq concurrent="1" nextAc="seek">
+              <p:cTn id="2" dur="indefinite" nodeType="mainSeq">
+                <p:childTnLst>
+                  <p:par>
+                    <p:cTn id="3" fill="hold">
+                      <p:stCondLst>
+                        <p:cond delay="indefinite"/>
+                      </p:stCondLst>
+                      <p:childTnLst>
+                        <p:par>
+                          <p:cTn id="4" fill="hold">
+                            <p:stCondLst>
+                              <p:cond delay="0"/>
+                            </p:stCondLst>
+                            <p:childTnLst>
+                              <p:par>
+                                <p:cTn id="5" presetID="1" presetClass="entr" presetSubtype="0" fill="hold" grpId="0" nodeType="clickEffect">
+                                  <p:stCondLst>
+                                    <p:cond delay="0"/>
+                                  </p:stCondLst>
+                                  <p:childTnLst>
+                                    <p:set>
+                                      <p:cBhvr>
+                                        <p:cTn id="6" dur="1" fill="hold">
+                                          <p:stCondLst>
+                                            <p:cond delay="0"/>
+                                          </p:stCondLst>
+                                        </p:cTn>
+                                        <p:tgtEl>
+                                          <p:spTgt spid="3">
+                                            <p:txEl>
+                                              <p:pRg st="0" end="0"/>
+                                            </p:txEl>
+                                          </p:spTgt>
+                                        </p:tgtEl>
+                                        <p:attrNameLst>
+                                          <p:attrName>style.visibility</p:attrName>
+                                        </p:attrNameLst>
+                                      </p:cBhvr>
+                                      <p:to>
+                                        <p:strVal val="visible"/>
+                                      </p:to>
+                                    </p:set>
+                                  </p:childTnLst>
+                                </p:cTn>
+                              </p:par>
+                              <p:par>
+                                <p:cTn id="7" presetID="1" presetClass="entr" presetSubtype="0" fill="hold" grpId="0" nodeType="withEffect">
+                                  <p:stCondLst>
+                                    <p:cond delay="0"/>
+                                  </p:stCondLst>
+                                  <p:childTnLst>
+                                    <p:set>
+                                      <p:cBhvr>
+                                        <p:cTn id="8" dur="1" fill="hold">
+                                          <p:stCondLst>
+                                            <p:cond delay="0"/>
+                                          </p:stCondLst>
+                                        </p:cTn>
+                                        <p:tgtEl>
+                                          <p:spTgt spid="3">
+                                            <p:txEl>
+                                              <p:pRg st="1" end="1"/>
+                                            </p:txEl>
+                                          </p:spTgt>
+                                        </p:tgtEl>
+                                        <p:attrNameLst>
+                                          <p:attrName>style.visibility</p:attrName>
+                                        </p:attrNameLst>
+                                      </p:cBhvr>
+                                      <p:to>
+                                        <p:strVal val="visible"/>
+                                      </p:to>
+                                    </p:set>
+                                  </p:childTnLst>
+                                </p:cTn>
+                              </p:par>
+                            </p:childTnLst>
+                          </p:cTn>
+                        </p:par>
+                      </p:childTnLst>
+                    </p:cTn>
+                  </p:par>
+                  <p:par>
+                    <p:cTn id="9" fill="hold">
+                      <p:stCondLst>
+                        <p:cond delay="indefinite"/>
+                      </p:stCondLst>
+                      <p:childTnLst>
+                        <p:par>
+                          <p:cTn id="10" fill="hold">
+                            <p:stCondLst>
+                              <p:cond delay="0"/>
+                            </p:stCondLst>
+                            <p:childTnLst>
+                              <p:par>
+                                <p:cTn id="11" presetID="1" presetClass="entr" presetSubtype="0" fill="hold" grpId="0" nodeType="clickEffect">
+                                  <p:stCondLst>
+                                    <p:cond delay="0"/>
+                                  </p:stCondLst>
+                                  <p:childTnLst>
+                                    <p:set>
+                                      <p:cBhvr>
+                                        <p:cTn id="12" dur="1" fill="hold">
+                                          <p:stCondLst>
+                                            <p:cond delay="0"/>
+                                          </p:stCondLst>
+                                        </p:cTn>
+                                        <p:tgtEl>
+                                          <p:spTgt spid="3">
+                                            <p:txEl>
+                                              <p:pRg st="2" end="2"/>
+                                            </p:txEl>
+                                          </p:spTgt>
+                                        </p:tgtEl>
+                                        <p:attrNameLst>
+                                          <p:attrName>style.visibility</p:attrName>
+                                        </p:attrNameLst>
+                                      </p:cBhvr>
+                                      <p:to>
+                                        <p:strVal val="visible"/>
+                                      </p:to>
+                                    </p:set>
+                                  </p:childTnLst>
+                                </p:cTn>
+                              </p:par>
+                            </p:childTnLst>
+                          </p:cTn>
+                        </p:par>
+                      </p:childTnLst>
+                    </p:cTn>
+                  </p:par>
+                  <p:par>
+                    <p:cTn id="13" fill="hold">
+                      <p:stCondLst>
+                        <p:cond delay="indefinite"/>
+                      </p:stCondLst>
+                      <p:childTnLst>
+                        <p:par>
+                          <p:cTn id="14" fill="hold">
+                            <p:stCondLst>
+                              <p:cond delay="0"/>
+                            </p:stCondLst>
+                            <p:childTnLst>
+                              <p:par>
+                                <p:cTn id="15" presetID="1" presetClass="entr" presetSubtype="0" fill="hold" grpId="0" nodeType="clickEffect">
+                                  <p:stCondLst>
+                                    <p:cond delay="0"/>
+                                  </p:stCondLst>
+                                  <p:childTnLst>
+                                    <p:set>
+                                      <p:cBhvr>
+                                        <p:cTn id="16" dur="1" fill="hold">
+                                          <p:stCondLst>
+                                            <p:cond delay="0"/>
+                                          </p:stCondLst>
+                                        </p:cTn>
+                                        <p:tgtEl>
+                                          <p:spTgt spid="3">
+                                            <p:txEl>
+                                              <p:pRg st="3" end="3"/>
+                                            </p:txEl>
+                                          </p:spTgt>
+                                        </p:tgtEl>
+                                        <p:attrNameLst>
+                                          <p:attrName>style.visibility</p:attrName>
+                                        </p:attrNameLst>
+                                      </p:cBhvr>
+                                      <p:to>
+                                        <p:strVal val="visible"/>
+                                      </p:to>
+                                    </p:set>
+                                  </p:childTnLst>
+                                </p:cTn>
+                              </p:par>
+                            </p:childTnLst>
+                          </p:cTn>
+                        </p:par>
+                      </p:childTnLst>
+                    </p:cTn>
+                  </p:par>
+                  <p:par>
+                    <p:cTn id="17" fill="hold">
+                      <p:stCondLst>
+                        <p:cond delay="indefinite"/>
+                      </p:stCondLst>
+                      <p:childTnLst>
+                        <p:par>
+                          <p:cTn id="18" fill="hold">
+                            <p:stCondLst>
+                              <p:cond delay="0"/>
+                            </p:stCondLst>
+                            <p:childTnLst>
+                              <p:par>
+                                <p:cTn id="19" presetID="1" presetClass="entr" presetSubtype="0" fill="hold" grpId="0" nodeType="clickEffect">
+                                  <p:stCondLst>
+                                    <p:cond delay="0"/>
+                                  </p:stCondLst>
+                                  <p:childTnLst>
+                                    <p:set>
+                                      <p:cBhvr>
+                                        <p:cTn id="20" dur="1" fill="hold">
+                                          <p:stCondLst>
+                                            <p:cond delay="0"/>
+                                          </p:stCondLst>
+                                        </p:cTn>
+                                        <p:tgtEl>
+                                          <p:spTgt spid="3">
+                                            <p:txEl>
+                                              <p:pRg st="4" end="4"/>
+                                            </p:txEl>
+                                          </p:spTgt>
+                                        </p:tgtEl>
+                                        <p:attrNameLst>
+                                          <p:attrName>style.visibility</p:attrName>
+                                        </p:attrNameLst>
+                                      </p:cBhvr>
+                                      <p:to>
+                                        <p:strVal val="visible"/>
+                                      </p:to>
+                                    </p:set>
+                                  </p:childTnLst>
+                                </p:cTn>
+                              </p:par>
+                            </p:childTnLst>
+                          </p:cTn>
+                        </p:par>
+                      </p:childTnLst>
+                    </p:cTn>
+                  </p:par>
+                  <p:par>
+                    <p:cTn id="21" fill="hold">
+                      <p:stCondLst>
+                        <p:cond delay="indefinite"/>
+                      </p:stCondLst>
+                      <p:childTnLst>
+                        <p:par>
+                          <p:cTn id="22" fill="hold">
+                            <p:stCondLst>
+                              <p:cond delay="0"/>
+                            </p:stCondLst>
+                            <p:childTnLst>
+                              <p:par>
+                                <p:cTn id="23" presetID="1" presetClass="entr" presetSubtype="0" fill="hold" grpId="0" nodeType="clickEffect">
+                                  <p:stCondLst>
+                                    <p:cond delay="0"/>
+                                  </p:stCondLst>
+                                  <p:childTnLst>
+                                    <p:set>
+                                      <p:cBhvr>
+                                        <p:cTn id="24" dur="1" fill="hold">
+                                          <p:stCondLst>
+                                            <p:cond delay="0"/>
+                                          </p:stCondLst>
+                                        </p:cTn>
+                                        <p:tgtEl>
+                                          <p:spTgt spid="3">
+                                            <p:txEl>
+                                              <p:pRg st="5" end="5"/>
+                                            </p:txEl>
+                                          </p:spTgt>
+                                        </p:tgtEl>
+                                        <p:attrNameLst>
+                                          <p:attrName>style.visibility</p:attrName>
+                                        </p:attrNameLst>
+                                      </p:cBhvr>
+                                      <p:to>
+                                        <p:strVal val="visible"/>
+                                      </p:to>
+                                    </p:set>
+                                  </p:childTnLst>
+                                </p:cTn>
+                              </p:par>
+                            </p:childTnLst>
+                          </p:cTn>
+                        </p:par>
+                      </p:childTnLst>
+                    </p:cTn>
+                  </p:par>
+                  <p:par>
+                    <p:cTn id="25" fill="hold">
+                      <p:stCondLst>
+                        <p:cond delay="indefinite"/>
+                      </p:stCondLst>
+                      <p:childTnLst>
+                        <p:par>
+                          <p:cTn id="26" fill="hold">
+                            <p:stCondLst>
+                              <p:cond delay="0"/>
+                            </p:stCondLst>
+                            <p:childTnLst>
+                              <p:par>
+                                <p:cTn id="27" presetID="1" presetClass="entr" presetSubtype="0" fill="hold" grpId="0" nodeType="clickEffect">
+                                  <p:stCondLst>
+                                    <p:cond delay="0"/>
+                                  </p:stCondLst>
+                                  <p:childTnLst>
+                                    <p:set>
+                                      <p:cBhvr>
+                                        <p:cTn id="28" dur="1" fill="hold">
+                                          <p:stCondLst>
+                                            <p:cond delay="0"/>
+                                          </p:stCondLst>
+                                        </p:cTn>
+                                        <p:tgtEl>
+                                          <p:spTgt spid="3">
+                                            <p:txEl>
+                                              <p:pRg st="6" end="6"/>
+                                            </p:txEl>
+                                          </p:spTgt>
+                                        </p:tgtEl>
+                                        <p:attrNameLst>
+                                          <p:attrName>style.visibility</p:attrName>
+                                        </p:attrNameLst>
+                                      </p:cBhvr>
+                                      <p:to>
+                                        <p:strVal val="visible"/>
+                                      </p:to>
+                                    </p:set>
+                                  </p:childTnLst>
+                                </p:cTn>
+                              </p:par>
+                            </p:childTnLst>
+                          </p:cTn>
+                        </p:par>
+                      </p:childTnLst>
+                    </p:cTn>
+                  </p:par>
+                </p:childTnLst>
+              </p:cTn>
+              <p:prevCondLst>
+                <p:cond evt="onPrev" delay="0">
+                  <p:tgtEl>
+                    <p:sldTgt/>
+                  </p:tgtEl>
+                </p:cond>
+              </p:prevCondLst>
+              <p:nextCondLst>
+                <p:cond evt="onNext" delay="0">
+                  <p:tgtEl>
+                    <p:sldTgt/>
+                  </p:tgtEl>
+                </p:cond>
+              </p:nextCondLst>
+            </p:seq>
+          </p:childTnLst>
+        </p:cTn>
+      </p:par>
+    </p:tnLst>
+    <p:bldLst>
+      <p:bldP spid="3" grpId="0" build="p"/>
+    </p:bldLst>
+  </p:timing>
+</p:sld>
+</file>
+
+<file path=ppt/slides/slide21.xml><?xml version="1.0" encoding="utf-8"?>
+<p:sld xmlns:a="http://schemas.openxmlformats.org/drawingml/2006/main" xmlns:r="http://schemas.openxmlformats.org/officeDocument/2006/relationships" xmlns:p="http://schemas.openxmlformats.org/presentationml/2006/main">
+  <p:cSld>
+    <p:spTree>
+      <p:nvGrpSpPr>
+        <p:cNvPr id="1" name="">
+          <a:extLst>
+            <a:ext uri="{FF2B5EF4-FFF2-40B4-BE49-F238E27FC236}">
               <a16:creationId xmlns:a16="http://schemas.microsoft.com/office/drawing/2014/main" id="{829FB7AF-5ADE-7D1A-FC4F-AB36A016A816}"/>
             </a:ext>
           </a:extLst>
@@ -34981,7 +35549,7 @@
 </p:sld>
 </file>
 
-<file path=ppt/slides/slide21.xml><?xml version="1.0" encoding="utf-8"?>
+<file path=ppt/slides/slide22.xml><?xml version="1.0" encoding="utf-8"?>
 <p:sld xmlns:a="http://schemas.openxmlformats.org/drawingml/2006/main" xmlns:r="http://schemas.openxmlformats.org/officeDocument/2006/relationships" xmlns:p="http://schemas.openxmlformats.org/presentationml/2006/main">
   <p:cSld>
     <p:spTree>
@@ -35026,23 +35594,23 @@
           <a:lstStyle/>
           <a:p>
             <a:r>
-              <a:rPr lang="en-US" sz="3600" b="1"/>
+              <a:rPr lang="en-US" sz="3600" b="1" dirty="0"/>
               <a:t>Power BI </a:t>
             </a:r>
             <a:r>
-              <a:rPr lang="en-US" sz="3600" b="1" err="1"/>
+              <a:rPr lang="en-US" sz="3600" b="1" dirty="0" err="1"/>
               <a:t>jätk</a:t>
             </a:r>
             <a:r>
-              <a:rPr lang="en-US" sz="3600" b="1"/>
+              <a:rPr lang="en-US" sz="3600" b="1" dirty="0"/>
               <a:t> - </a:t>
             </a:r>
             <a:r>
-              <a:rPr lang="en-US" sz="3600" b="1" err="1"/>
+              <a:rPr lang="en-US" sz="3600" b="1" dirty="0" err="1"/>
               <a:t>filtrid</a:t>
             </a:r>
             <a:r>
-              <a:rPr lang="en-US" sz="3600" b="1"/>
+              <a:rPr lang="en-US" sz="3600" b="1" dirty="0"/>
               <a:t> </a:t>
             </a:r>
           </a:p>
@@ -35438,7 +36006,138 @@
 </p:sld>
 </file>
 
-<file path=ppt/slides/slide22.xml><?xml version="1.0" encoding="utf-8"?>
+<file path=ppt/slides/slide23.xml><?xml version="1.0" encoding="utf-8"?>
+<p:sld xmlns:a="http://schemas.openxmlformats.org/drawingml/2006/main" xmlns:r="http://schemas.openxmlformats.org/officeDocument/2006/relationships" xmlns:p="http://schemas.openxmlformats.org/presentationml/2006/main">
+  <p:cSld>
+    <p:spTree>
+      <p:nvGrpSpPr>
+        <p:cNvPr id="1" name="">
+          <a:extLst>
+            <a:ext uri="{FF2B5EF4-FFF2-40B4-BE49-F238E27FC236}">
+              <a16:creationId xmlns:a16="http://schemas.microsoft.com/office/drawing/2014/main" id="{3C2AC623-C08B-7895-C71E-108064B8B03A}"/>
+            </a:ext>
+          </a:extLst>
+        </p:cNvPr>
+        <p:cNvGrpSpPr/>
+        <p:nvPr/>
+      </p:nvGrpSpPr>
+      <p:grpSpPr>
+        <a:xfrm>
+          <a:off x="0" y="0"/>
+          <a:ext cx="0" cy="0"/>
+          <a:chOff x="0" y="0"/>
+          <a:chExt cx="0" cy="0"/>
+        </a:xfrm>
+      </p:grpSpPr>
+      <p:sp>
+        <p:nvSpPr>
+          <p:cNvPr id="2" name="Title 1">
+            <a:extLst>
+              <a:ext uri="{FF2B5EF4-FFF2-40B4-BE49-F238E27FC236}">
+                <a16:creationId xmlns:a16="http://schemas.microsoft.com/office/drawing/2014/main" id="{7C935F65-77B6-ED5C-5BAF-BCE91FD8E84A}"/>
+              </a:ext>
+            </a:extLst>
+          </p:cNvPr>
+          <p:cNvSpPr>
+            <a:spLocks noGrp="1"/>
+          </p:cNvSpPr>
+          <p:nvPr>
+            <p:ph type="ctrTitle"/>
+          </p:nvPr>
+        </p:nvSpPr>
+        <p:spPr/>
+        <p:txBody>
+          <a:bodyPr/>
+          <a:lstStyle/>
+          <a:p>
+            <a:r>
+              <a:rPr lang="en-US" sz="3600" b="1" dirty="0"/>
+              <a:t>Power BI </a:t>
+            </a:r>
+            <a:r>
+              <a:rPr lang="en-US" sz="3600" b="1" dirty="0" err="1"/>
+              <a:t>jätk</a:t>
+            </a:r>
+            <a:r>
+              <a:rPr lang="en-US" sz="3600" b="1" dirty="0"/>
+              <a:t> – </a:t>
+            </a:r>
+            <a:r>
+              <a:rPr lang="et-EE" sz="3600" b="1" dirty="0"/>
+              <a:t>drillimine ja sorteerimine</a:t>
+            </a:r>
+            <a:endParaRPr lang="en-US" sz="3600" b="1" dirty="0"/>
+          </a:p>
+        </p:txBody>
+      </p:sp>
+      <p:sp>
+        <p:nvSpPr>
+          <p:cNvPr id="3" name="Content Placeholder 2">
+            <a:extLst>
+              <a:ext uri="{FF2B5EF4-FFF2-40B4-BE49-F238E27FC236}">
+                <a16:creationId xmlns:a16="http://schemas.microsoft.com/office/drawing/2014/main" id="{A9DDC875-0A8E-BD80-F86E-9B9D48EFE522}"/>
+              </a:ext>
+            </a:extLst>
+          </p:cNvPr>
+          <p:cNvSpPr>
+            <a:spLocks noGrp="1"/>
+          </p:cNvSpPr>
+          <p:nvPr>
+            <p:ph sz="quarter" idx="10"/>
+          </p:nvPr>
+        </p:nvSpPr>
+        <p:spPr/>
+        <p:txBody>
+          <a:bodyPr/>
+          <a:lstStyle/>
+          <a:p>
+            <a:pPr marL="514350" indent="-514350">
+              <a:lnSpc>
+                <a:spcPct val="150000"/>
+              </a:lnSpc>
+            </a:pPr>
+            <a:r>
+              <a:rPr lang="et-EE" sz="2800" dirty="0"/>
+              <a:t>Tabelis või graafikul sorteerimine</a:t>
+            </a:r>
+          </a:p>
+          <a:p>
+            <a:pPr marL="514350" indent="-514350">
+              <a:lnSpc>
+                <a:spcPct val="150000"/>
+              </a:lnSpc>
+            </a:pPr>
+            <a:r>
+              <a:rPr lang="et-EE" sz="2800" dirty="0"/>
+              <a:t>Hierarhias alla ja üles liikumine</a:t>
+            </a:r>
+            <a:endParaRPr lang="en-US" sz="2800" dirty="0"/>
+          </a:p>
+          <a:p>
+            <a:pPr marL="0" indent="0">
+              <a:lnSpc>
+                <a:spcPct val="150000"/>
+              </a:lnSpc>
+              <a:buNone/>
+            </a:pPr>
+            <a:endParaRPr lang="en-US" sz="2800" dirty="0"/>
+          </a:p>
+        </p:txBody>
+      </p:sp>
+    </p:spTree>
+    <p:extLst>
+      <p:ext uri="{BB962C8B-B14F-4D97-AF65-F5344CB8AC3E}">
+        <p14:creationId xmlns:p14="http://schemas.microsoft.com/office/powerpoint/2010/main" val="2548011188"/>
+      </p:ext>
+    </p:extLst>
+  </p:cSld>
+  <p:clrMapOvr>
+    <a:masterClrMapping/>
+  </p:clrMapOvr>
+</p:sld>
+</file>
+
+<file path=ppt/slides/slide24.xml><?xml version="1.0" encoding="utf-8"?>
 <p:sld xmlns:a="http://schemas.openxmlformats.org/drawingml/2006/main" xmlns:r="http://schemas.openxmlformats.org/officeDocument/2006/relationships" xmlns:p="http://schemas.openxmlformats.org/presentationml/2006/main">
   <p:cSld>
     <p:spTree>
@@ -35551,7 +36250,7 @@
 </p:sld>
 </file>
 
-<file path=ppt/slides/slide23.xml><?xml version="1.0" encoding="utf-8"?>
+<file path=ppt/slides/slide25.xml><?xml version="1.0" encoding="utf-8"?>
 <p:sld xmlns:a="http://schemas.openxmlformats.org/drawingml/2006/main" xmlns:r="http://schemas.openxmlformats.org/officeDocument/2006/relationships" xmlns:p="http://schemas.openxmlformats.org/presentationml/2006/main">
   <p:cSld>
     <p:spTree>
@@ -36587,6 +37286,117 @@
 </p:sld>
 </file>
 
+<file path=ppt/slides/slide26.xml><?xml version="1.0" encoding="utf-8"?>
+<p:sld xmlns:a="http://schemas.openxmlformats.org/drawingml/2006/main" xmlns:r="http://schemas.openxmlformats.org/officeDocument/2006/relationships" xmlns:p="http://schemas.openxmlformats.org/presentationml/2006/main">
+  <p:cSld>
+    <p:spTree>
+      <p:nvGrpSpPr>
+        <p:cNvPr id="1" name=""/>
+        <p:cNvGrpSpPr/>
+        <p:nvPr/>
+      </p:nvGrpSpPr>
+      <p:grpSpPr>
+        <a:xfrm>
+          <a:off x="0" y="0"/>
+          <a:ext cx="0" cy="0"/>
+          <a:chOff x="0" y="0"/>
+          <a:chExt cx="0" cy="0"/>
+        </a:xfrm>
+      </p:grpSpPr>
+      <p:sp>
+        <p:nvSpPr>
+          <p:cNvPr id="2" name="Title 1">
+            <a:extLst>
+              <a:ext uri="{FF2B5EF4-FFF2-40B4-BE49-F238E27FC236}">
+                <a16:creationId xmlns:a16="http://schemas.microsoft.com/office/drawing/2014/main" id="{D066E52B-B8F7-A10A-3B4F-06BBEF9502B1}"/>
+              </a:ext>
+            </a:extLst>
+          </p:cNvPr>
+          <p:cNvSpPr>
+            <a:spLocks noGrp="1"/>
+          </p:cNvSpPr>
+          <p:nvPr>
+            <p:ph type="ctrTitle"/>
+          </p:nvPr>
+        </p:nvSpPr>
+        <p:spPr/>
+        <p:txBody>
+          <a:bodyPr/>
+          <a:lstStyle/>
+          <a:p>
+            <a:r>
+              <a:rPr lang="et-EE" dirty="0"/>
+              <a:t>Kokkuvõte</a:t>
+            </a:r>
+          </a:p>
+        </p:txBody>
+      </p:sp>
+      <p:sp>
+        <p:nvSpPr>
+          <p:cNvPr id="3" name="Content Placeholder 2">
+            <a:extLst>
+              <a:ext uri="{FF2B5EF4-FFF2-40B4-BE49-F238E27FC236}">
+                <a16:creationId xmlns:a16="http://schemas.microsoft.com/office/drawing/2014/main" id="{44D9B4A8-EF23-6857-EE24-9F47D7604AFB}"/>
+              </a:ext>
+            </a:extLst>
+          </p:cNvPr>
+          <p:cNvSpPr>
+            <a:spLocks noGrp="1"/>
+          </p:cNvSpPr>
+          <p:nvPr>
+            <p:ph sz="quarter" idx="10"/>
+          </p:nvPr>
+        </p:nvSpPr>
+        <p:spPr/>
+        <p:txBody>
+          <a:bodyPr/>
+          <a:lstStyle/>
+          <a:p>
+            <a:r>
+              <a:rPr lang="et-EE" dirty="0"/>
+              <a:t>Õppisime</a:t>
+            </a:r>
+          </a:p>
+          <a:p>
+            <a:pPr lvl="1"/>
+            <a:r>
+              <a:rPr lang="et-EE" dirty="0"/>
+              <a:t>Andmekvaliteet, tüüpilised probleemid</a:t>
+            </a:r>
+          </a:p>
+          <a:p>
+            <a:pPr lvl="1"/>
+            <a:r>
+              <a:rPr lang="et-EE" dirty="0"/>
+              <a:t>Power BI-s andmekvaliteedi hindamine ja lahendamine</a:t>
+            </a:r>
+          </a:p>
+          <a:p>
+            <a:pPr lvl="1"/>
+            <a:r>
+              <a:rPr lang="et-EE" dirty="0"/>
+              <a:t>FIltreerimine</a:t>
+            </a:r>
+          </a:p>
+          <a:p>
+            <a:pPr lvl="1"/>
+            <a:endParaRPr lang="et-EE" dirty="0"/>
+          </a:p>
+        </p:txBody>
+      </p:sp>
+    </p:spTree>
+    <p:extLst>
+      <p:ext uri="{BB962C8B-B14F-4D97-AF65-F5344CB8AC3E}">
+        <p14:creationId xmlns:p14="http://schemas.microsoft.com/office/powerpoint/2010/main" val="904514558"/>
+      </p:ext>
+    </p:extLst>
+  </p:cSld>
+  <p:clrMapOvr>
+    <a:masterClrMapping/>
+  </p:clrMapOvr>
+</p:sld>
+</file>
+
 <file path=ppt/slides/slide3.xml><?xml version="1.0" encoding="utf-8"?>
 <p:sld xmlns:a="http://schemas.openxmlformats.org/drawingml/2006/main" xmlns:r="http://schemas.openxmlformats.org/officeDocument/2006/relationships" xmlns:p="http://schemas.openxmlformats.org/presentationml/2006/main">
   <p:cSld>
@@ -37090,6 +37900,39 @@
                 <a:cs typeface="Arial"/>
               </a:rPr>
               <a:t>aatlused</a:t>
+            </a:r>
+            <a:endParaRPr lang="et-EE" sz="2000" dirty="0">
+              <a:ea typeface="Inter"/>
+              <a:cs typeface="Arial"/>
+            </a:endParaRPr>
+          </a:p>
+          <a:p>
+            <a:pPr marL="342900" indent="-342900">
+              <a:lnSpc>
+                <a:spcPct val="150000"/>
+              </a:lnSpc>
+              <a:buFont typeface="Arial,Sans-Serif" panose="020B0502030000000004" pitchFamily="34" charset="0"/>
+              <a:buChar char="•"/>
+            </a:pPr>
+            <a:endParaRPr lang="et-EE" sz="2000" dirty="0">
+              <a:ea typeface="Inter"/>
+              <a:cs typeface="Arial"/>
+            </a:endParaRPr>
+          </a:p>
+          <a:p>
+            <a:pPr marL="342900" indent="-342900">
+              <a:lnSpc>
+                <a:spcPct val="150000"/>
+              </a:lnSpc>
+              <a:buFont typeface="Arial,Sans-Serif" panose="020B0502030000000004" pitchFamily="34" charset="0"/>
+              <a:buChar char="•"/>
+            </a:pPr>
+            <a:r>
+              <a:rPr lang="et-EE" sz="2000" dirty="0">
+                <a:ea typeface="Inter"/>
+                <a:cs typeface="Arial"/>
+              </a:rPr>
+              <a:t>ANDMED ON sageli vastuolus, arusaamatud, vales formaadis jne</a:t>
             </a:r>
             <a:endParaRPr lang="en-US" sz="2000" dirty="0">
               <a:ea typeface="Inter"/>
@@ -37383,6 +38226,55 @@
                       </p:childTnLst>
                     </p:cTn>
                   </p:par>
+                  <p:par>
+                    <p:cTn id="23" fill="hold">
+                      <p:stCondLst>
+                        <p:cond delay="indefinite"/>
+                      </p:stCondLst>
+                      <p:childTnLst>
+                        <p:par>
+                          <p:cTn id="24" fill="hold">
+                            <p:stCondLst>
+                              <p:cond delay="0"/>
+                            </p:stCondLst>
+                            <p:childTnLst>
+                              <p:par>
+                                <p:cTn id="25" presetID="1" presetClass="entr" presetSubtype="0" fill="hold" grpId="0" nodeType="clickEffect">
+                                  <p:stCondLst>
+                                    <p:cond delay="0"/>
+                                  </p:stCondLst>
+                                  <p:childTnLst>
+                                    <p:set>
+                                      <p:cBhvr>
+                                        <p:cTn id="26" dur="1" fill="hold">
+                                          <p:stCondLst>
+                                            <p:cond delay="0"/>
+                                          </p:stCondLst>
+                                        </p:cTn>
+                                        <p:tgtEl>
+                                          <p:spTgt spid="3">
+                                            <p:txEl>
+                                              <p:pRg st="7" end="7"/>
+                                            </p:txEl>
+                                          </p:spTgt>
+                                        </p:tgtEl>
+                                        <p:attrNameLst>
+                                          <p:attrName>style.visibility</p:attrName>
+                                        </p:attrNameLst>
+                                      </p:cBhvr>
+                                      <p:to>
+                                        <p:strVal val="visible"/>
+                                      </p:to>
+                                    </p:set>
+                                  </p:childTnLst>
+                                </p:cTn>
+                              </p:par>
+                            </p:childTnLst>
+                          </p:cTn>
+                        </p:par>
+                      </p:childTnLst>
+                    </p:cTn>
+                  </p:par>
                 </p:childTnLst>
               </p:cTn>
               <p:prevCondLst>
@@ -37843,6 +38735,16 @@
               </a:rPr>
               <a:t> ja </a:t>
             </a:r>
+            <a:br>
+              <a:rPr lang="et-EE" sz="2000" dirty="0">
+                <a:solidFill>
+                  <a:srgbClr val="121212"/>
+                </a:solidFill>
+                <a:latin typeface="Inter"/>
+                <a:ea typeface="Inter"/>
+                <a:cs typeface="Arial"/>
+              </a:rPr>
+            </a:br>
             <a:r>
               <a:rPr lang="en-US" sz="2000" dirty="0" err="1">
                 <a:solidFill>
@@ -37907,10 +38809,10 @@
                 <a:ea typeface="Inter"/>
                 <a:cs typeface="Arial"/>
               </a:rPr>
-              <a:t> andmete </a:t>
-            </a:r>
-            <a:r>
-              <a:rPr lang="en-US" sz="2000" dirty="0" err="1">
+              <a:t> </a:t>
+            </a:r>
+            <a:r>
+              <a:rPr lang="en-US" sz="2000" b="1" dirty="0">
                 <a:solidFill>
                   <a:srgbClr val="121212"/>
                 </a:solidFill>
@@ -37918,9 +38820,20 @@
                 <a:ea typeface="Inter"/>
                 <a:cs typeface="Arial"/>
               </a:rPr>
+              <a:t>andmete </a:t>
+            </a:r>
+            <a:r>
+              <a:rPr lang="en-US" sz="2000" b="1" dirty="0" err="1">
+                <a:solidFill>
+                  <a:srgbClr val="121212"/>
+                </a:solidFill>
+                <a:latin typeface="Inter"/>
+                <a:ea typeface="Inter"/>
+                <a:cs typeface="Arial"/>
+              </a:rPr>
               <a:t>kvaliteet</a:t>
             </a:r>
-            <a:endParaRPr lang="en-US" sz="2000" dirty="0">
+            <a:endParaRPr lang="en-US" sz="2000" b="1" dirty="0">
               <a:solidFill>
                 <a:srgbClr val="121212"/>
               </a:solidFill>
@@ -37937,51 +38850,10 @@
               <a:buFont typeface="Arial,Sans-Serif" panose="020B0502030000000004" pitchFamily="34" charset="0"/>
               <a:buChar char="•"/>
             </a:pPr>
-            <a:r>
-              <a:rPr lang="en-US" sz="2000" dirty="0">
-                <a:solidFill>
-                  <a:srgbClr val="121212"/>
-                </a:solidFill>
-                <a:latin typeface="Inter"/>
-                <a:ea typeface="Inter"/>
-                <a:cs typeface="Arial"/>
-              </a:rPr>
-              <a:t>Nali </a:t>
-            </a:r>
-            <a:r>
-              <a:rPr lang="en-US" sz="2000" dirty="0" err="1">
-                <a:solidFill>
-                  <a:srgbClr val="121212"/>
-                </a:solidFill>
-                <a:latin typeface="Inter"/>
-                <a:ea typeface="Inter"/>
-                <a:cs typeface="Arial"/>
-              </a:rPr>
-              <a:t>andmeteadlase</a:t>
-            </a:r>
-            <a:r>
-              <a:rPr lang="en-US" sz="2000" dirty="0">
-                <a:solidFill>
-                  <a:srgbClr val="121212"/>
-                </a:solidFill>
-                <a:latin typeface="Inter"/>
-                <a:ea typeface="Inter"/>
-                <a:cs typeface="Arial"/>
-              </a:rPr>
-              <a:t> kohta </a:t>
-            </a:r>
-            <a:r>
-              <a:rPr lang="en-US" sz="2000" dirty="0">
-                <a:solidFill>
-                  <a:srgbClr val="121212"/>
-                </a:solidFill>
-                <a:latin typeface="Inter"/>
-                <a:ea typeface="Inter"/>
-                <a:cs typeface="Arial"/>
-                <a:sym typeface="Wingdings" panose="05000000000000000000" pitchFamily="2" charset="2"/>
-              </a:rPr>
-              <a:t></a:t>
-            </a:r>
+            <a:endParaRPr lang="et-EE" sz="2000" dirty="0">
+              <a:ea typeface="Inter"/>
+              <a:cs typeface="Arial"/>
+            </a:endParaRPr>
           </a:p>
           <a:p>
             <a:pPr marL="342900" indent="-342900">
@@ -38292,7 +39164,7 @@
                                         <p:tgtEl>
                                           <p:spTgt spid="3">
                                             <p:txEl>
-                                              <p:pRg st="1" end="1"/>
+                                              <p:pRg st="2" end="2"/>
                                             </p:txEl>
                                           </p:spTgt>
                                         </p:tgtEl>
@@ -38307,26 +39179,39 @@
                                   </p:childTnLst>
                                 </p:cTn>
                               </p:par>
-                            </p:childTnLst>
-                          </p:cTn>
-                        </p:par>
-                      </p:childTnLst>
-                    </p:cTn>
-                  </p:par>
-                  <p:par>
-                    <p:cTn id="11" fill="hold">
-                      <p:stCondLst>
-                        <p:cond delay="indefinite"/>
-                      </p:stCondLst>
-                      <p:childTnLst>
-                        <p:par>
-                          <p:cTn id="12" fill="hold">
-                            <p:stCondLst>
-                              <p:cond delay="0"/>
-                            </p:stCondLst>
-                            <p:childTnLst>
                               <p:par>
-                                <p:cTn id="13" presetID="1" presetClass="entr" presetSubtype="0" fill="hold" grpId="0" nodeType="clickEffect">
+                                <p:cTn id="11" presetID="1" presetClass="entr" presetSubtype="0" fill="hold" grpId="0" nodeType="withEffect">
+                                  <p:stCondLst>
+                                    <p:cond delay="0"/>
+                                  </p:stCondLst>
+                                  <p:childTnLst>
+                                    <p:set>
+                                      <p:cBhvr>
+                                        <p:cTn id="12" dur="1" fill="hold">
+                                          <p:stCondLst>
+                                            <p:cond delay="0"/>
+                                          </p:stCondLst>
+                                        </p:cTn>
+                                        <p:tgtEl>
+                                          <p:spTgt spid="3">
+                                            <p:txEl>
+                                              <p:pRg st="3" end="3"/>
+                                            </p:txEl>
+                                          </p:spTgt>
+                                        </p:tgtEl>
+                                        <p:attrNameLst>
+                                          <p:attrName>style.visibility</p:attrName>
+                                        </p:attrNameLst>
+                                      </p:cBhvr>
+                                      <p:to>
+                                        <p:strVal val="visible"/>
+                                      </p:to>
+                                    </p:set>
+                                  </p:childTnLst>
+                                </p:cTn>
+                              </p:par>
+                              <p:par>
+                                <p:cTn id="13" presetID="1" presetClass="entr" presetSubtype="0" fill="hold" grpId="0" nodeType="withEffect">
                                   <p:stCondLst>
                                     <p:cond delay="0"/>
                                   </p:stCondLst>
@@ -38341,7 +39226,7 @@
                                         <p:tgtEl>
                                           <p:spTgt spid="3">
                                             <p:txEl>
-                                              <p:pRg st="2" end="2"/>
+                                              <p:pRg st="4" end="4"/>
                                             </p:txEl>
                                           </p:spTgt>
                                         </p:tgtEl>
@@ -38365,68 +39250,6 @@
                                     <p:set>
                                       <p:cBhvr>
                                         <p:cTn id="16" dur="1" fill="hold">
-                                          <p:stCondLst>
-                                            <p:cond delay="0"/>
-                                          </p:stCondLst>
-                                        </p:cTn>
-                                        <p:tgtEl>
-                                          <p:spTgt spid="3">
-                                            <p:txEl>
-                                              <p:pRg st="3" end="3"/>
-                                            </p:txEl>
-                                          </p:spTgt>
-                                        </p:tgtEl>
-                                        <p:attrNameLst>
-                                          <p:attrName>style.visibility</p:attrName>
-                                        </p:attrNameLst>
-                                      </p:cBhvr>
-                                      <p:to>
-                                        <p:strVal val="visible"/>
-                                      </p:to>
-                                    </p:set>
-                                  </p:childTnLst>
-                                </p:cTn>
-                              </p:par>
-                              <p:par>
-                                <p:cTn id="17" presetID="1" presetClass="entr" presetSubtype="0" fill="hold" grpId="0" nodeType="withEffect">
-                                  <p:stCondLst>
-                                    <p:cond delay="0"/>
-                                  </p:stCondLst>
-                                  <p:childTnLst>
-                                    <p:set>
-                                      <p:cBhvr>
-                                        <p:cTn id="18" dur="1" fill="hold">
-                                          <p:stCondLst>
-                                            <p:cond delay="0"/>
-                                          </p:stCondLst>
-                                        </p:cTn>
-                                        <p:tgtEl>
-                                          <p:spTgt spid="3">
-                                            <p:txEl>
-                                              <p:pRg st="4" end="4"/>
-                                            </p:txEl>
-                                          </p:spTgt>
-                                        </p:tgtEl>
-                                        <p:attrNameLst>
-                                          <p:attrName>style.visibility</p:attrName>
-                                        </p:attrNameLst>
-                                      </p:cBhvr>
-                                      <p:to>
-                                        <p:strVal val="visible"/>
-                                      </p:to>
-                                    </p:set>
-                                  </p:childTnLst>
-                                </p:cTn>
-                              </p:par>
-                              <p:par>
-                                <p:cTn id="19" presetID="1" presetClass="entr" presetSubtype="0" fill="hold" grpId="0" nodeType="withEffect">
-                                  <p:stCondLst>
-                                    <p:cond delay="0"/>
-                                  </p:stCondLst>
-                                  <p:childTnLst>
-                                    <p:set>
-                                      <p:cBhvr>
-                                        <p:cTn id="20" dur="1" fill="hold">
                                           <p:stCondLst>
                                             <p:cond delay="0"/>
                                           </p:stCondLst>
@@ -40884,7 +41707,7 @@
           <p:cNvPr id="2" name="Title 1">
             <a:extLst>
               <a:ext uri="{FF2B5EF4-FFF2-40B4-BE49-F238E27FC236}">
-                <a16:creationId xmlns:a16="http://schemas.microsoft.com/office/drawing/2014/main" id="{BCC030D3-F5A0-E509-EA21-9622B5AA1524}"/>
+                <a16:creationId xmlns:a16="http://schemas.microsoft.com/office/drawing/2014/main" id="{273F1CE1-2B6D-F2D4-3FF9-8B7AAD7AC3BF}"/>
               </a:ext>
             </a:extLst>
           </p:cNvPr>
@@ -40900,27 +41723,7 @@
           <a:bodyPr/>
           <a:lstStyle/>
           <a:p>
-            <a:r>
-              <a:rPr lang="en-US" dirty="0" err="1"/>
-              <a:t>Näiteid</a:t>
-            </a:r>
-            <a:r>
-              <a:rPr lang="en-US" dirty="0"/>
-              <a:t> </a:t>
-            </a:r>
-            <a:r>
-              <a:rPr lang="en-US" dirty="0" err="1"/>
-              <a:t>andmekvaliteedi</a:t>
-            </a:r>
-            <a:r>
-              <a:rPr lang="en-US" dirty="0"/>
-              <a:t> </a:t>
-            </a:r>
-            <a:r>
-              <a:rPr lang="en-US" dirty="0" err="1"/>
-              <a:t>probleemidest</a:t>
-            </a:r>
-            <a:endParaRPr lang="et-EE" dirty="0"/>
+            <a:endParaRPr lang="et-EE"/>
           </a:p>
         </p:txBody>
       </p:sp>
@@ -40929,7 +41732,7 @@
           <p:cNvPr id="3" name="Content Placeholder 2">
             <a:extLst>
               <a:ext uri="{FF2B5EF4-FFF2-40B4-BE49-F238E27FC236}">
-                <a16:creationId xmlns:a16="http://schemas.microsoft.com/office/drawing/2014/main" id="{4AE018F4-3DDC-6A2A-49CB-E48023F796D1}"/>
+                <a16:creationId xmlns:a16="http://schemas.microsoft.com/office/drawing/2014/main" id="{FFDB21D7-19D0-975B-5922-8C1CDC24BEF5}"/>
               </a:ext>
             </a:extLst>
           </p:cNvPr>
@@ -40945,462 +41748,44 @@
           <a:bodyPr/>
           <a:lstStyle/>
           <a:p>
-            <a:r>
-              <a:rPr lang="en-US" sz="2000" b="1" dirty="0" err="1"/>
-              <a:t>Lähteandmete</a:t>
-            </a:r>
-            <a:r>
-              <a:rPr lang="en-US" sz="2000" dirty="0"/>
-              <a:t> </a:t>
-            </a:r>
-            <a:r>
-              <a:rPr lang="en-US" sz="2000" b="1" dirty="0" err="1"/>
-              <a:t>vead</a:t>
-            </a:r>
-            <a:endParaRPr lang="en-US" sz="2000" b="1" dirty="0"/>
-          </a:p>
-          <a:p>
-            <a:pPr lvl="1"/>
-            <a:r>
-              <a:rPr lang="en-US" sz="2000" dirty="0" err="1"/>
-              <a:t>Importfailis</a:t>
-            </a:r>
-            <a:r>
-              <a:rPr lang="en-US" sz="2000" dirty="0"/>
-              <a:t> </a:t>
-            </a:r>
-            <a:r>
-              <a:rPr lang="en-US" sz="2000" dirty="0" err="1"/>
-              <a:t>puuduvad</a:t>
-            </a:r>
-            <a:r>
-              <a:rPr lang="en-US" sz="2000" dirty="0"/>
-              <a:t> </a:t>
-            </a:r>
-            <a:r>
-              <a:rPr lang="en-US" sz="2000" dirty="0" err="1"/>
-              <a:t>vajalikud</a:t>
-            </a:r>
-            <a:r>
-              <a:rPr lang="en-US" sz="2000" dirty="0"/>
-              <a:t> </a:t>
-            </a:r>
-            <a:r>
-              <a:rPr lang="en-US" sz="2000" dirty="0" err="1"/>
-              <a:t>aastad</a:t>
-            </a:r>
-            <a:r>
-              <a:rPr lang="en-US" sz="2000" dirty="0"/>
-              <a:t> – ei </a:t>
-            </a:r>
-            <a:r>
-              <a:rPr lang="en-US" sz="2000" dirty="0" err="1"/>
-              <a:t>saa</a:t>
-            </a:r>
-            <a:r>
-              <a:rPr lang="en-US" sz="2000" dirty="0"/>
-              <a:t> </a:t>
-            </a:r>
-            <a:r>
-              <a:rPr lang="en-US" sz="2000" dirty="0" err="1"/>
-              <a:t>näitada</a:t>
-            </a:r>
-            <a:r>
-              <a:rPr lang="en-US" sz="2000" dirty="0"/>
-              <a:t> </a:t>
-            </a:r>
-            <a:r>
-              <a:rPr lang="en-US" sz="2000" dirty="0" err="1"/>
-              <a:t>muutust</a:t>
-            </a:r>
-            <a:r>
-              <a:rPr lang="en-US" sz="2000" dirty="0"/>
-              <a:t> </a:t>
-            </a:r>
-            <a:r>
-              <a:rPr lang="en-US" sz="2000" dirty="0" err="1"/>
-              <a:t>ajas</a:t>
-            </a:r>
-            <a:r>
-              <a:rPr lang="en-US" sz="2000" dirty="0"/>
-              <a:t> alates 2020</a:t>
-            </a:r>
-          </a:p>
-          <a:p>
-            <a:pPr lvl="1"/>
-            <a:r>
-              <a:rPr lang="en-US" sz="2000" dirty="0" err="1"/>
-              <a:t>Osadel</a:t>
-            </a:r>
-            <a:r>
-              <a:rPr lang="en-US" sz="2000" dirty="0"/>
-              <a:t> </a:t>
-            </a:r>
-            <a:r>
-              <a:rPr lang="en-US" sz="2000" dirty="0" err="1"/>
-              <a:t>ridadel</a:t>
-            </a:r>
-            <a:r>
-              <a:rPr lang="en-US" sz="2000" dirty="0"/>
-              <a:t> on </a:t>
-            </a:r>
-            <a:r>
-              <a:rPr lang="en-US" sz="2000" dirty="0" err="1"/>
-              <a:t>tühjad</a:t>
-            </a:r>
-            <a:r>
-              <a:rPr lang="en-US" sz="2000" dirty="0"/>
-              <a:t> </a:t>
-            </a:r>
-            <a:r>
-              <a:rPr lang="en-US" sz="2000" dirty="0" err="1"/>
-              <a:t>väärtused</a:t>
-            </a:r>
-            <a:r>
-              <a:rPr lang="en-US" sz="2000" dirty="0"/>
-              <a:t> – </a:t>
-            </a:r>
-            <a:r>
-              <a:rPr lang="en-US" sz="2000" dirty="0" err="1"/>
-              <a:t>kogused</a:t>
-            </a:r>
-            <a:r>
-              <a:rPr lang="en-US" sz="2000" dirty="0"/>
-              <a:t> pudu, </a:t>
-            </a:r>
-            <a:r>
-              <a:rPr lang="en-US" sz="2000" dirty="0" err="1"/>
-              <a:t>hinnad</a:t>
-            </a:r>
-            <a:r>
-              <a:rPr lang="en-US" sz="2000" dirty="0"/>
-              <a:t> pudu</a:t>
-            </a:r>
-          </a:p>
-          <a:p>
-            <a:pPr lvl="1"/>
-            <a:r>
-              <a:rPr lang="en-US" sz="2000" dirty="0" err="1"/>
-              <a:t>Kuupäevad</a:t>
-            </a:r>
-            <a:r>
-              <a:rPr lang="en-US" sz="2000" dirty="0"/>
-              <a:t> ei ole </a:t>
-            </a:r>
-            <a:r>
-              <a:rPr lang="en-US" sz="2000" dirty="0" err="1"/>
-              <a:t>kuupäeva</a:t>
-            </a:r>
-            <a:r>
-              <a:rPr lang="en-US" sz="2000" dirty="0"/>
-              <a:t> </a:t>
-            </a:r>
-            <a:r>
-              <a:rPr lang="en-US" sz="2000" dirty="0" err="1"/>
-              <a:t>formaadis</a:t>
-            </a:r>
-            <a:r>
-              <a:rPr lang="en-US" sz="2000" dirty="0"/>
-              <a:t>, </a:t>
-            </a:r>
-            <a:r>
-              <a:rPr lang="en-US" sz="2000" dirty="0" err="1"/>
-              <a:t>osaliselt</a:t>
-            </a:r>
-            <a:r>
-              <a:rPr lang="en-US" sz="2000" dirty="0"/>
-              <a:t> </a:t>
-            </a:r>
-            <a:r>
-              <a:rPr lang="en-US" sz="2000" dirty="0" err="1"/>
-              <a:t>kellaajaga</a:t>
-            </a:r>
-            <a:endParaRPr lang="en-US" sz="2000" dirty="0"/>
-          </a:p>
-          <a:p>
-            <a:pPr lvl="1"/>
-            <a:r>
-              <a:rPr lang="en-US" sz="2000" dirty="0" err="1"/>
-              <a:t>Toodetel</a:t>
-            </a:r>
-            <a:r>
-              <a:rPr lang="en-US" sz="2000" dirty="0"/>
-              <a:t> pole </a:t>
-            </a:r>
-            <a:r>
-              <a:rPr lang="en-US" sz="2000" dirty="0" err="1"/>
-              <a:t>kategooriaid</a:t>
-            </a:r>
-            <a:endParaRPr lang="en-US" sz="2000" dirty="0"/>
-          </a:p>
-          <a:p>
-            <a:pPr lvl="1"/>
-            <a:r>
-              <a:rPr lang="en-US" sz="2000" dirty="0" err="1"/>
-              <a:t>Toodetel</a:t>
-            </a:r>
-            <a:r>
-              <a:rPr lang="en-US" sz="2000" dirty="0"/>
-              <a:t> on </a:t>
-            </a:r>
-            <a:r>
-              <a:rPr lang="en-US" sz="2000" dirty="0" err="1"/>
-              <a:t>valed</a:t>
-            </a:r>
-            <a:r>
-              <a:rPr lang="en-US" sz="2000" dirty="0"/>
-              <a:t> </a:t>
-            </a:r>
-            <a:r>
-              <a:rPr lang="en-US" sz="2000" dirty="0" err="1"/>
-              <a:t>kategooriad</a:t>
-            </a:r>
-            <a:endParaRPr lang="en-US" sz="2000" dirty="0"/>
-          </a:p>
-          <a:p>
-            <a:pPr lvl="1"/>
-            <a:r>
-              <a:rPr lang="en-US" sz="2000" dirty="0" err="1"/>
-              <a:t>Summad</a:t>
-            </a:r>
-            <a:r>
-              <a:rPr lang="en-US" sz="2000" dirty="0"/>
-              <a:t> </a:t>
-            </a:r>
-            <a:r>
-              <a:rPr lang="en-US" sz="2000" dirty="0" err="1"/>
-              <a:t>tulevad</a:t>
-            </a:r>
-            <a:r>
-              <a:rPr lang="en-US" sz="2000" dirty="0"/>
-              <a:t> </a:t>
-            </a:r>
-            <a:r>
-              <a:rPr lang="en-US" sz="2000" dirty="0" err="1"/>
-              <a:t>topelt</a:t>
-            </a:r>
-            <a:r>
-              <a:rPr lang="en-US" sz="2000" dirty="0"/>
-              <a:t> (</a:t>
-            </a:r>
-            <a:r>
-              <a:rPr lang="en-US" sz="2000" dirty="0" err="1"/>
-              <a:t>müügiread</a:t>
-            </a:r>
-            <a:r>
-              <a:rPr lang="en-US" sz="2000" dirty="0"/>
-              <a:t> on </a:t>
-            </a:r>
-            <a:r>
-              <a:rPr lang="en-US" sz="2000" dirty="0" err="1"/>
-              <a:t>nt</a:t>
-            </a:r>
-            <a:r>
-              <a:rPr lang="en-US" sz="2000" dirty="0"/>
-              <a:t> </a:t>
-            </a:r>
-            <a:r>
-              <a:rPr lang="en-US" sz="2000" dirty="0" err="1"/>
-              <a:t>samas</a:t>
-            </a:r>
-            <a:r>
-              <a:rPr lang="en-US" sz="2000" dirty="0"/>
-              <a:t> </a:t>
-            </a:r>
-            <a:r>
-              <a:rPr lang="en-US" sz="2000" dirty="0" err="1"/>
-              <a:t>allikas</a:t>
-            </a:r>
-            <a:r>
-              <a:rPr lang="en-US" sz="2000" dirty="0"/>
-              <a:t> </a:t>
-            </a:r>
-            <a:r>
-              <a:rPr lang="en-US" sz="2000" dirty="0" err="1"/>
-              <a:t>kahest</a:t>
-            </a:r>
-            <a:r>
-              <a:rPr lang="en-US" sz="2000" dirty="0"/>
-              <a:t> </a:t>
-            </a:r>
-            <a:r>
-              <a:rPr lang="en-US" sz="2000" dirty="0" err="1"/>
-              <a:t>erinevast</a:t>
-            </a:r>
-            <a:r>
-              <a:rPr lang="en-US" sz="2000" dirty="0"/>
-              <a:t> </a:t>
-            </a:r>
-            <a:r>
-              <a:rPr lang="en-US" sz="2000" dirty="0" err="1"/>
-              <a:t>ajavööndist</a:t>
-            </a:r>
-            <a:r>
-              <a:rPr lang="en-US" sz="2000" dirty="0"/>
-              <a:t>)</a:t>
-            </a:r>
-          </a:p>
-          <a:p>
-            <a:r>
-              <a:rPr lang="en-US" sz="2000" b="1" dirty="0"/>
-              <a:t>Andmete </a:t>
-            </a:r>
-            <a:r>
-              <a:rPr lang="en-US" sz="2000" b="1" dirty="0" err="1"/>
-              <a:t>töötlemise</a:t>
-            </a:r>
-            <a:r>
-              <a:rPr lang="en-US" sz="2000" b="1" dirty="0"/>
-              <a:t> </a:t>
-            </a:r>
-            <a:r>
-              <a:rPr lang="en-US" sz="2000" b="1" dirty="0" err="1"/>
-              <a:t>etapis</a:t>
-            </a:r>
-            <a:r>
-              <a:rPr lang="en-US" sz="2000" b="1" dirty="0"/>
-              <a:t> või </a:t>
-            </a:r>
-            <a:r>
-              <a:rPr lang="en-US" sz="2000" b="1" dirty="0" err="1"/>
-              <a:t>analüüsis</a:t>
-            </a:r>
-            <a:r>
-              <a:rPr lang="en-US" sz="2000" b="1" dirty="0"/>
-              <a:t> </a:t>
-            </a:r>
-            <a:r>
-              <a:rPr lang="en-US" sz="2000" b="1" dirty="0" err="1"/>
-              <a:t>tekkinud</a:t>
-            </a:r>
-            <a:r>
-              <a:rPr lang="en-US" sz="2000" b="1" dirty="0"/>
-              <a:t> </a:t>
-            </a:r>
-            <a:r>
-              <a:rPr lang="en-US" sz="2000" b="1" dirty="0" err="1"/>
-              <a:t>vead</a:t>
-            </a:r>
-            <a:endParaRPr lang="en-US" sz="2000" b="1" dirty="0"/>
-          </a:p>
-          <a:p>
-            <a:pPr lvl="1"/>
-            <a:r>
-              <a:rPr lang="en-US" sz="2000" dirty="0"/>
-              <a:t>Mu </a:t>
-            </a:r>
-            <a:r>
-              <a:rPr lang="en-US" sz="2000" dirty="0" err="1"/>
-              <a:t>kasumi</a:t>
-            </a:r>
-            <a:r>
-              <a:rPr lang="en-US" sz="2000" dirty="0"/>
-              <a:t> nr </a:t>
-            </a:r>
-            <a:r>
-              <a:rPr lang="en-US" sz="2000" dirty="0" err="1"/>
-              <a:t>erineb</a:t>
-            </a:r>
-            <a:r>
-              <a:rPr lang="en-US" sz="2000" dirty="0"/>
-              <a:t> </a:t>
-            </a:r>
-            <a:r>
-              <a:rPr lang="en-US" sz="2000" dirty="0" err="1"/>
-              <a:t>raamatupidamisprogrammis</a:t>
-            </a:r>
-            <a:r>
-              <a:rPr lang="en-US" sz="2000" dirty="0"/>
-              <a:t> </a:t>
-            </a:r>
-            <a:r>
-              <a:rPr lang="en-US" sz="2000" dirty="0" err="1"/>
-              <a:t>olevast</a:t>
-            </a:r>
-            <a:endParaRPr lang="en-US" sz="2000" dirty="0"/>
-          </a:p>
-          <a:p>
-            <a:pPr lvl="1"/>
-            <a:r>
-              <a:rPr lang="en-US" sz="2000" dirty="0"/>
-              <a:t>Töötajate </a:t>
-            </a:r>
-            <a:r>
-              <a:rPr lang="en-US" sz="2000" dirty="0" err="1"/>
-              <a:t>arv</a:t>
-            </a:r>
-            <a:r>
-              <a:rPr lang="en-US" sz="2000" dirty="0"/>
-              <a:t> on </a:t>
-            </a:r>
-            <a:r>
-              <a:rPr lang="en-US" sz="2000" dirty="0" err="1"/>
-              <a:t>teisel</a:t>
-            </a:r>
-            <a:r>
-              <a:rPr lang="en-US" sz="2000" dirty="0"/>
-              <a:t> </a:t>
-            </a:r>
-            <a:r>
-              <a:rPr lang="en-US" sz="2000" dirty="0" err="1"/>
-              <a:t>juhil</a:t>
-            </a:r>
-            <a:r>
-              <a:rPr lang="en-US" sz="2000" dirty="0"/>
-              <a:t> </a:t>
-            </a:r>
-            <a:r>
-              <a:rPr lang="en-US" sz="2000" dirty="0" err="1"/>
-              <a:t>teine</a:t>
-            </a:r>
-            <a:endParaRPr lang="en-US" sz="2000" dirty="0"/>
-          </a:p>
-          <a:p>
-            <a:pPr lvl="1"/>
-            <a:r>
-              <a:rPr lang="en-US" sz="2000" dirty="0" err="1"/>
-              <a:t>Allokatsioonide</a:t>
-            </a:r>
-            <a:r>
-              <a:rPr lang="en-US" sz="2000" dirty="0"/>
-              <a:t> </a:t>
-            </a:r>
-            <a:r>
-              <a:rPr lang="en-US" sz="2000" dirty="0" err="1"/>
-              <a:t>summad</a:t>
-            </a:r>
-            <a:r>
-              <a:rPr lang="en-US" sz="2000" dirty="0"/>
-              <a:t> on </a:t>
-            </a:r>
-            <a:r>
-              <a:rPr lang="en-US" sz="2000" dirty="0" err="1"/>
-              <a:t>muutunud</a:t>
-            </a:r>
-            <a:r>
-              <a:rPr lang="en-US" sz="2000" dirty="0"/>
-              <a:t> </a:t>
-            </a:r>
-            <a:r>
-              <a:rPr lang="en-US" sz="2000" dirty="0" err="1"/>
-              <a:t>võrreldes</a:t>
-            </a:r>
-            <a:r>
-              <a:rPr lang="en-US" sz="2000" dirty="0"/>
-              <a:t> </a:t>
-            </a:r>
-            <a:r>
-              <a:rPr lang="en-US" sz="2000" dirty="0" err="1"/>
-              <a:t>eilsega</a:t>
-            </a:r>
-            <a:endParaRPr lang="et-EE" sz="2000" dirty="0"/>
+            <a:endParaRPr lang="et-EE"/>
           </a:p>
         </p:txBody>
       </p:sp>
+      <p:pic>
+        <p:nvPicPr>
+          <p:cNvPr id="4" name="Picture 3" descr="Funny Data Science How Much Time Is Spent on Data Cleansing&quot; Magnet for  Sale by MadPanda | Redbubble">
+            <a:extLst>
+              <a:ext uri="{FF2B5EF4-FFF2-40B4-BE49-F238E27FC236}">
+                <a16:creationId xmlns:a16="http://schemas.microsoft.com/office/drawing/2014/main" id="{870ED8CD-AFEF-3ACE-6346-0D2FE093602D}"/>
+              </a:ext>
+            </a:extLst>
+          </p:cNvPr>
+          <p:cNvPicPr>
+            <a:picLocks noChangeAspect="1"/>
+          </p:cNvPicPr>
+          <p:nvPr/>
+        </p:nvPicPr>
+        <p:blipFill>
+          <a:blip r:embed="rId2"/>
+          <a:stretch>
+            <a:fillRect/>
+          </a:stretch>
+        </p:blipFill>
+        <p:spPr>
+          <a:xfrm>
+            <a:off x="1598831" y="0"/>
+            <a:ext cx="5119031" cy="6825374"/>
+          </a:xfrm>
+          <a:prstGeom prst="rect">
+            <a:avLst/>
+          </a:prstGeom>
+        </p:spPr>
+      </p:pic>
     </p:spTree>
     <p:extLst>
       <p:ext uri="{BB962C8B-B14F-4D97-AF65-F5344CB8AC3E}">
-        <p14:creationId xmlns:p14="http://schemas.microsoft.com/office/powerpoint/2010/main" val="1818135051"/>
+        <p14:creationId xmlns:p14="http://schemas.microsoft.com/office/powerpoint/2010/main" val="453566327"/>
       </p:ext>
     </p:extLst>
   </p:cSld>
@@ -41432,7 +41817,7 @@
           <p:cNvPr id="2" name="Title 1">
             <a:extLst>
               <a:ext uri="{FF2B5EF4-FFF2-40B4-BE49-F238E27FC236}">
-                <a16:creationId xmlns:a16="http://schemas.microsoft.com/office/drawing/2014/main" id="{1CB74240-DA98-AFD1-5042-F7972DCFC4CA}"/>
+                <a16:creationId xmlns:a16="http://schemas.microsoft.com/office/drawing/2014/main" id="{BCC030D3-F5A0-E509-EA21-9622B5AA1524}"/>
               </a:ext>
             </a:extLst>
           </p:cNvPr>
@@ -41450,7 +41835,7 @@
           <a:p>
             <a:r>
               <a:rPr lang="en-US" dirty="0" err="1"/>
-              <a:t>Andmekvaliteedi</a:t>
+              <a:t>Näiteid</a:t>
             </a:r>
             <a:r>
               <a:rPr lang="en-US" dirty="0"/>
@@ -41458,7 +41843,7 @@
             </a:r>
             <a:r>
               <a:rPr lang="en-US" dirty="0" err="1"/>
-              <a:t>probleemide</a:t>
+              <a:t>andmekvaliteedi</a:t>
             </a:r>
             <a:r>
               <a:rPr lang="en-US" dirty="0"/>
@@ -41466,7 +41851,7 @@
             </a:r>
             <a:r>
               <a:rPr lang="en-US" dirty="0" err="1"/>
-              <a:t>lahendamine</a:t>
+              <a:t>probleemidest</a:t>
             </a:r>
             <a:endParaRPr lang="et-EE" dirty="0"/>
           </a:p>
@@ -41477,7 +41862,7 @@
           <p:cNvPr id="3" name="Content Placeholder 2">
             <a:extLst>
               <a:ext uri="{FF2B5EF4-FFF2-40B4-BE49-F238E27FC236}">
-                <a16:creationId xmlns:a16="http://schemas.microsoft.com/office/drawing/2014/main" id="{B9343AF2-D8CB-E789-1C35-D2762C89402E}"/>
+                <a16:creationId xmlns:a16="http://schemas.microsoft.com/office/drawing/2014/main" id="{4AE018F4-3DDC-6A2A-49CB-E48023F796D1}"/>
               </a:ext>
             </a:extLst>
           </p:cNvPr>
@@ -41488,457 +41873,476 @@
             <p:ph sz="quarter" idx="10"/>
           </p:nvPr>
         </p:nvSpPr>
-        <p:spPr>
-          <a:xfrm>
-            <a:off x="497952" y="1027493"/>
-            <a:ext cx="10941050" cy="4465637"/>
-          </a:xfrm>
-        </p:spPr>
+        <p:spPr/>
         <p:txBody>
           <a:bodyPr/>
           <a:lstStyle/>
           <a:p>
-            <a:pPr>
-              <a:lnSpc>
-                <a:spcPct val="150000"/>
-              </a:lnSpc>
-            </a:pPr>
-            <a:r>
-              <a:rPr lang="en-US" sz="1800" dirty="0" err="1"/>
-              <a:t>Andmeallikate</a:t>
-            </a:r>
-            <a:r>
-              <a:rPr lang="en-US" sz="1800" dirty="0"/>
+            <a:r>
+              <a:rPr lang="en-US" sz="2000" b="1" dirty="0" err="1"/>
+              <a:t>Lähteandmete</a:t>
+            </a:r>
+            <a:r>
+              <a:rPr lang="en-US" sz="2000" dirty="0"/>
               <a:t> </a:t>
             </a:r>
             <a:r>
-              <a:rPr lang="en-US" sz="1800" b="1" dirty="0"/>
-              <a:t>analüüs</a:t>
-            </a:r>
-            <a:r>
-              <a:rPr lang="en-US" sz="1800" dirty="0"/>
-              <a:t> ja </a:t>
-            </a:r>
-            <a:r>
-              <a:rPr lang="en-US" sz="1800" b="1" dirty="0" err="1"/>
-              <a:t>profileerimine</a:t>
-            </a:r>
-            <a:r>
-              <a:rPr lang="en-US" sz="1800" dirty="0"/>
-              <a:t> (selle </a:t>
-            </a:r>
-            <a:r>
-              <a:rPr lang="en-US" sz="1800" dirty="0" err="1"/>
-              <a:t>eelduseks</a:t>
-            </a:r>
-            <a:r>
-              <a:rPr lang="en-US" sz="1800" dirty="0"/>
-              <a:t> on </a:t>
-            </a:r>
-            <a:r>
-              <a:rPr lang="en-US" sz="1800" dirty="0" err="1"/>
-              <a:t>valdkonna</a:t>
-            </a:r>
-            <a:r>
-              <a:rPr lang="en-US" sz="1800" dirty="0"/>
-              <a:t> </a:t>
-            </a:r>
-            <a:r>
-              <a:rPr lang="en-US" sz="1800" dirty="0" err="1"/>
-              <a:t>teadmised</a:t>
-            </a:r>
-            <a:r>
-              <a:rPr lang="en-US" sz="1800" dirty="0"/>
-              <a:t> ja analüütika </a:t>
-            </a:r>
-            <a:r>
-              <a:rPr lang="en-US" sz="1800" dirty="0" err="1"/>
-              <a:t>tehnikad</a:t>
-            </a:r>
-            <a:r>
-              <a:rPr lang="en-US" sz="1800" dirty="0"/>
-              <a:t>). </a:t>
-            </a:r>
-            <a:r>
-              <a:rPr lang="en-US" sz="1800" dirty="0" err="1"/>
-              <a:t>Sageli</a:t>
-            </a:r>
-            <a:r>
-              <a:rPr lang="en-US" sz="1800" dirty="0"/>
-              <a:t> </a:t>
-            </a:r>
-            <a:r>
-              <a:rPr lang="en-US" sz="1800" dirty="0" err="1"/>
-              <a:t>tabelite</a:t>
-            </a:r>
-            <a:r>
-              <a:rPr lang="en-US" sz="1800" dirty="0"/>
-              <a:t>, </a:t>
-            </a:r>
-            <a:r>
-              <a:rPr lang="en-US" sz="1800" dirty="0" err="1"/>
-              <a:t>veergude</a:t>
-            </a:r>
-            <a:r>
-              <a:rPr lang="en-US" sz="1800" dirty="0"/>
-              <a:t> ja </a:t>
-            </a:r>
-            <a:r>
-              <a:rPr lang="en-US" sz="1800" dirty="0" err="1"/>
-              <a:t>ridade</a:t>
-            </a:r>
-            <a:r>
-              <a:rPr lang="en-US" sz="1800" dirty="0"/>
-              <a:t> kaupa. </a:t>
-            </a:r>
-            <a:r>
-              <a:rPr lang="en-US" sz="1800" dirty="0" err="1"/>
-              <a:t>Automatiseerimiseks</a:t>
-            </a:r>
-            <a:r>
-              <a:rPr lang="en-US" sz="1800" dirty="0"/>
-              <a:t> </a:t>
-            </a:r>
-            <a:r>
-              <a:rPr lang="en-US" sz="1800" dirty="0" err="1"/>
-              <a:t>tööriistades</a:t>
-            </a:r>
-            <a:r>
-              <a:rPr lang="en-US" sz="1800" dirty="0"/>
-              <a:t> </a:t>
-            </a:r>
-            <a:r>
-              <a:rPr lang="en-US" sz="1800" dirty="0" err="1"/>
-              <a:t>vahendid</a:t>
-            </a:r>
-            <a:r>
-              <a:rPr lang="en-US" sz="1800" dirty="0"/>
-              <a:t> + AI</a:t>
-            </a:r>
-            <a:br>
-              <a:rPr lang="en-US" sz="1800" dirty="0"/>
-            </a:br>
-            <a:r>
-              <a:rPr lang="en-US" sz="1800" dirty="0">
-                <a:ea typeface="Inter"/>
-              </a:rPr>
-              <a:t>Pm </a:t>
-            </a:r>
-            <a:r>
-              <a:rPr lang="en-US" sz="1800" dirty="0" err="1">
-                <a:ea typeface="Inter"/>
-              </a:rPr>
-              <a:t>hakkad</a:t>
-            </a:r>
-            <a:r>
-              <a:rPr lang="en-US" sz="1800" dirty="0">
-                <a:ea typeface="Inter"/>
-              </a:rPr>
-              <a:t> </a:t>
-            </a:r>
-            <a:r>
-              <a:rPr lang="et-EE" sz="1800" dirty="0">
-                <a:ea typeface="Inter"/>
-              </a:rPr>
-              <a:t>algandmeid </a:t>
-            </a:r>
-            <a:r>
-              <a:rPr lang="en-US" sz="1800" dirty="0" err="1">
-                <a:ea typeface="Inter"/>
-              </a:rPr>
-              <a:t>mööda</a:t>
-            </a:r>
-            <a:r>
-              <a:rPr lang="en-US" sz="1800" dirty="0">
-                <a:ea typeface="Inter"/>
-              </a:rPr>
-              <a:t> </a:t>
-            </a:r>
-            <a:r>
-              <a:rPr lang="en-US" sz="1800" dirty="0" err="1">
-                <a:ea typeface="Inter"/>
-              </a:rPr>
-              <a:t>nõudeid</a:t>
-            </a:r>
-            <a:r>
-              <a:rPr lang="en-US" sz="1800" dirty="0">
-                <a:ea typeface="Inter"/>
-              </a:rPr>
-              <a:t> </a:t>
-            </a:r>
-            <a:r>
-              <a:rPr lang="en-US" sz="1800" dirty="0" err="1">
-                <a:ea typeface="Inter"/>
-              </a:rPr>
-              <a:t>kontrollima</a:t>
-            </a:r>
-            <a:endParaRPr lang="en-US" sz="1800" dirty="0"/>
+              <a:rPr lang="en-US" sz="2000" b="1" dirty="0" err="1"/>
+              <a:t>vead</a:t>
+            </a:r>
+            <a:endParaRPr lang="en-US" sz="2000" b="1" dirty="0"/>
           </a:p>
           <a:p>
-            <a:pPr>
-              <a:lnSpc>
-                <a:spcPct val="150000"/>
-              </a:lnSpc>
-            </a:pPr>
-            <a:r>
-              <a:rPr lang="en-US" sz="1800" dirty="0"/>
-              <a:t>Andmete </a:t>
-            </a:r>
-            <a:r>
-              <a:rPr lang="en-US" sz="1800" b="1" dirty="0" err="1"/>
-              <a:t>korrastamine</a:t>
-            </a:r>
-            <a:endParaRPr lang="en-US" sz="1800" b="1" dirty="0"/>
+            <a:pPr lvl="1"/>
+            <a:r>
+              <a:rPr lang="en-US" sz="2000" dirty="0" err="1"/>
+              <a:t>Importfailis</a:t>
+            </a:r>
+            <a:r>
+              <a:rPr lang="en-US" sz="2000" dirty="0"/>
+              <a:t> </a:t>
+            </a:r>
+            <a:r>
+              <a:rPr lang="en-US" sz="2000" dirty="0" err="1"/>
+              <a:t>puuduvad</a:t>
+            </a:r>
+            <a:r>
+              <a:rPr lang="en-US" sz="2000" dirty="0"/>
+              <a:t> </a:t>
+            </a:r>
+            <a:r>
+              <a:rPr lang="en-US" sz="2000" dirty="0" err="1"/>
+              <a:t>vajalikud</a:t>
+            </a:r>
+            <a:r>
+              <a:rPr lang="en-US" sz="2000" dirty="0"/>
+              <a:t> </a:t>
+            </a:r>
+            <a:r>
+              <a:rPr lang="en-US" sz="2000" dirty="0" err="1"/>
+              <a:t>aastad</a:t>
+            </a:r>
+            <a:r>
+              <a:rPr lang="en-US" sz="2000" dirty="0"/>
+              <a:t> – ei </a:t>
+            </a:r>
+            <a:r>
+              <a:rPr lang="en-US" sz="2000" dirty="0" err="1"/>
+              <a:t>saa</a:t>
+            </a:r>
+            <a:r>
+              <a:rPr lang="en-US" sz="2000" dirty="0"/>
+              <a:t> </a:t>
+            </a:r>
+            <a:r>
+              <a:rPr lang="en-US" sz="2000" dirty="0" err="1"/>
+              <a:t>näitada</a:t>
+            </a:r>
+            <a:r>
+              <a:rPr lang="en-US" sz="2000" dirty="0"/>
+              <a:t> </a:t>
+            </a:r>
+            <a:r>
+              <a:rPr lang="en-US" sz="2000" dirty="0" err="1"/>
+              <a:t>muutust</a:t>
+            </a:r>
+            <a:r>
+              <a:rPr lang="en-US" sz="2000" dirty="0"/>
+              <a:t> </a:t>
+            </a:r>
+            <a:r>
+              <a:rPr lang="en-US" sz="2000" dirty="0" err="1"/>
+              <a:t>ajas</a:t>
+            </a:r>
+            <a:r>
+              <a:rPr lang="en-US" sz="2000" dirty="0"/>
+              <a:t> alates 2020</a:t>
+            </a:r>
           </a:p>
           <a:p>
-            <a:pPr lvl="1">
-              <a:lnSpc>
-                <a:spcPct val="150000"/>
-              </a:lnSpc>
-            </a:pPr>
-            <a:r>
-              <a:rPr lang="en-US" sz="1800" dirty="0" err="1"/>
-              <a:t>töövahenditega</a:t>
-            </a:r>
-            <a:r>
-              <a:rPr lang="en-US" sz="1800" dirty="0"/>
+            <a:pPr lvl="1"/>
+            <a:r>
+              <a:rPr lang="en-US" sz="2000" dirty="0" err="1"/>
+              <a:t>Osadel</a:t>
+            </a:r>
+            <a:r>
+              <a:rPr lang="en-US" sz="2000" dirty="0"/>
               <a:t> </a:t>
             </a:r>
             <a:r>
-              <a:rPr lang="en-US" sz="1800" dirty="0" err="1"/>
-              <a:t>puhastamine</a:t>
-            </a:r>
-            <a:endParaRPr lang="en-US" sz="1800" dirty="0"/>
+              <a:rPr lang="en-US" sz="2000" dirty="0" err="1"/>
+              <a:t>ridadel</a:t>
+            </a:r>
+            <a:r>
+              <a:rPr lang="en-US" sz="2000" dirty="0"/>
+              <a:t> on </a:t>
+            </a:r>
+            <a:r>
+              <a:rPr lang="en-US" sz="2000" dirty="0" err="1"/>
+              <a:t>tühjad</a:t>
+            </a:r>
+            <a:r>
+              <a:rPr lang="en-US" sz="2000" dirty="0"/>
+              <a:t> </a:t>
+            </a:r>
+            <a:r>
+              <a:rPr lang="en-US" sz="2000" dirty="0" err="1"/>
+              <a:t>väärtused</a:t>
+            </a:r>
+            <a:r>
+              <a:rPr lang="en-US" sz="2000" dirty="0"/>
+              <a:t> – </a:t>
+            </a:r>
+            <a:r>
+              <a:rPr lang="en-US" sz="2000" dirty="0" err="1"/>
+              <a:t>kogused</a:t>
+            </a:r>
+            <a:r>
+              <a:rPr lang="en-US" sz="2000" dirty="0"/>
+              <a:t> pudu, </a:t>
+            </a:r>
+            <a:r>
+              <a:rPr lang="en-US" sz="2000" dirty="0" err="1"/>
+              <a:t>hinnad</a:t>
+            </a:r>
+            <a:r>
+              <a:rPr lang="en-US" sz="2000" dirty="0"/>
+              <a:t> pudu</a:t>
+            </a:r>
+            <a:endParaRPr lang="et-EE" sz="2000" dirty="0"/>
           </a:p>
           <a:p>
-            <a:pPr lvl="1">
-              <a:lnSpc>
-                <a:spcPct val="150000"/>
-              </a:lnSpc>
-            </a:pPr>
-            <a:r>
-              <a:rPr lang="en-US" sz="1800" dirty="0" err="1"/>
-              <a:t>rikastamine</a:t>
-            </a:r>
-            <a:r>
-              <a:rPr lang="en-US" sz="1800" dirty="0"/>
-              <a:t> (</a:t>
-            </a:r>
-            <a:r>
-              <a:rPr lang="en-US" sz="1800" dirty="0" err="1"/>
-              <a:t>otsid</a:t>
-            </a:r>
-            <a:r>
-              <a:rPr lang="en-US" sz="1800" dirty="0"/>
-              <a:t> </a:t>
-            </a:r>
-            <a:r>
-              <a:rPr lang="en-US" sz="1800" dirty="0" err="1"/>
-              <a:t>lisaallikaid</a:t>
-            </a:r>
-            <a:r>
-              <a:rPr lang="en-US" sz="1800" dirty="0"/>
-              <a:t>, </a:t>
-            </a:r>
-            <a:r>
-              <a:rPr lang="en-US" sz="1800" dirty="0" err="1"/>
-              <a:t>vahel</a:t>
-            </a:r>
-            <a:r>
-              <a:rPr lang="en-US" sz="1800" dirty="0"/>
-              <a:t> ka </a:t>
-            </a:r>
-            <a:r>
-              <a:rPr lang="en-US" sz="1800" dirty="0" err="1"/>
-              <a:t>kodeerimis</a:t>
-            </a:r>
-            <a:r>
-              <a:rPr lang="en-US" sz="1800" dirty="0"/>
-              <a:t>- ja </a:t>
-            </a:r>
-            <a:r>
-              <a:rPr lang="en-US" sz="1800" dirty="0" err="1"/>
-              <a:t>grupeerimisfaile</a:t>
-            </a:r>
-            <a:r>
-              <a:rPr lang="en-US" sz="1800" dirty="0"/>
-              <a:t>)</a:t>
-            </a:r>
+            <a:pPr lvl="1"/>
+            <a:r>
+              <a:rPr lang="et-EE" sz="2000" dirty="0"/>
+              <a:t>Osad read on tühjad</a:t>
+            </a:r>
+            <a:endParaRPr lang="en-US" sz="2000" dirty="0"/>
           </a:p>
           <a:p>
-            <a:pPr>
-              <a:lnSpc>
-                <a:spcPct val="150000"/>
-              </a:lnSpc>
-            </a:pPr>
-            <a:r>
-              <a:rPr lang="en-US" sz="1800" dirty="0" err="1"/>
-              <a:t>Analüüsi</a:t>
-            </a:r>
-            <a:r>
-              <a:rPr lang="en-US" sz="1800" dirty="0"/>
+            <a:pPr lvl="1"/>
+            <a:r>
+              <a:rPr lang="en-US" sz="2000" dirty="0" err="1"/>
+              <a:t>Kuupäevad</a:t>
+            </a:r>
+            <a:r>
+              <a:rPr lang="en-US" sz="2000" dirty="0"/>
+              <a:t> ei ole </a:t>
+            </a:r>
+            <a:r>
+              <a:rPr lang="en-US" sz="2000" dirty="0" err="1"/>
+              <a:t>kuupäeva</a:t>
+            </a:r>
+            <a:r>
+              <a:rPr lang="en-US" sz="2000" dirty="0"/>
               <a:t> </a:t>
             </a:r>
             <a:r>
-              <a:rPr lang="en-US" sz="1800" dirty="0" err="1"/>
-              <a:t>tulemuste</a:t>
-            </a:r>
-            <a:r>
-              <a:rPr lang="en-US" sz="1800" dirty="0"/>
-              <a:t> (</a:t>
-            </a:r>
-            <a:r>
-              <a:rPr lang="en-US" sz="1800" dirty="0" err="1"/>
-              <a:t>raportite</a:t>
-            </a:r>
-            <a:r>
-              <a:rPr lang="en-US" sz="1800" dirty="0"/>
-              <a:t>) </a:t>
-            </a:r>
-            <a:r>
-              <a:rPr lang="en-US" sz="1800" b="1" dirty="0"/>
-              <a:t>testimine</a:t>
-            </a:r>
-            <a:r>
-              <a:rPr lang="en-US" sz="1800" dirty="0"/>
+              <a:rPr lang="en-US" sz="2000" dirty="0" err="1"/>
+              <a:t>formaadis</a:t>
+            </a:r>
+            <a:r>
+              <a:rPr lang="en-US" sz="2000" dirty="0"/>
+              <a:t>, </a:t>
+            </a:r>
+            <a:r>
+              <a:rPr lang="en-US" sz="2000" dirty="0" err="1"/>
+              <a:t>osaliselt</a:t>
+            </a:r>
+            <a:r>
+              <a:rPr lang="en-US" sz="2000" dirty="0"/>
               <a:t> </a:t>
             </a:r>
             <a:r>
-              <a:rPr lang="en-US" sz="1800" dirty="0" err="1"/>
-              <a:t>oodatava</a:t>
-            </a:r>
-            <a:r>
-              <a:rPr lang="en-US" sz="1800" dirty="0"/>
-              <a:t> </a:t>
-            </a:r>
-            <a:r>
-              <a:rPr lang="en-US" sz="1800" dirty="0" err="1"/>
-              <a:t>tulemuse</a:t>
-            </a:r>
-            <a:r>
-              <a:rPr lang="en-US" sz="1800" dirty="0"/>
-              <a:t> vastu</a:t>
-            </a:r>
-            <a:r>
-              <a:rPr lang="et-EE" sz="1800" dirty="0"/>
-              <a:t>, nt allikas mingit veergu summeerides või profileerides dimensiooni väärtuste kaupa – topeltkontroll, tellijal ei ole neid numbreid anda</a:t>
-            </a:r>
-            <a:endParaRPr lang="en-US" sz="1800" dirty="0"/>
+              <a:rPr lang="en-US" sz="2000" dirty="0" err="1"/>
+              <a:t>kellaajaga</a:t>
+            </a:r>
+            <a:endParaRPr lang="en-US" sz="2000" dirty="0"/>
           </a:p>
           <a:p>
-            <a:pPr>
-              <a:lnSpc>
-                <a:spcPct val="150000"/>
-              </a:lnSpc>
-            </a:pPr>
-            <a:r>
-              <a:rPr lang="en-US" sz="1800" dirty="0" err="1"/>
-              <a:t>Regulaarne</a:t>
-            </a:r>
-            <a:r>
-              <a:rPr lang="en-US" sz="1800" dirty="0"/>
-              <a:t> </a:t>
-            </a:r>
-            <a:r>
-              <a:rPr lang="en-US" sz="1800" dirty="0" err="1"/>
-              <a:t>monitoorimine</a:t>
-            </a:r>
-            <a:r>
-              <a:rPr lang="en-US" sz="1800" dirty="0"/>
-              <a:t> ja selle </a:t>
-            </a:r>
-            <a:r>
-              <a:rPr lang="en-US" sz="1800" dirty="0" err="1"/>
-              <a:t>tulemusel</a:t>
-            </a:r>
-            <a:r>
-              <a:rPr lang="en-US" sz="1800" dirty="0"/>
-              <a:t> </a:t>
-            </a:r>
-            <a:r>
-              <a:rPr lang="en-US" sz="1800" dirty="0" err="1"/>
-              <a:t>iteratiivselt</a:t>
-            </a:r>
-            <a:r>
-              <a:rPr lang="en-US" sz="1800" dirty="0"/>
-              <a:t> (</a:t>
-            </a:r>
-            <a:r>
-              <a:rPr lang="en-US" sz="1800" dirty="0" err="1"/>
-              <a:t>samm-sammult</a:t>
-            </a:r>
-            <a:r>
-              <a:rPr lang="en-US" sz="1800" dirty="0"/>
-              <a:t>) </a:t>
-            </a:r>
-            <a:r>
-              <a:rPr lang="en-US" sz="1800" dirty="0" err="1"/>
-              <a:t>andmekorralduse</a:t>
-            </a:r>
-            <a:r>
-              <a:rPr lang="en-US" sz="1800" dirty="0"/>
-              <a:t> </a:t>
-            </a:r>
-            <a:r>
-              <a:rPr lang="en-US" sz="1800" dirty="0" err="1"/>
-              <a:t>täiendamine</a:t>
-            </a:r>
-            <a:r>
-              <a:rPr lang="en-US" sz="1800" dirty="0"/>
-              <a:t> ja </a:t>
-            </a:r>
-            <a:r>
-              <a:rPr lang="en-US" sz="1800" dirty="0" err="1"/>
-              <a:t>töötlemise</a:t>
-            </a:r>
-            <a:r>
-              <a:rPr lang="en-US" sz="1800" dirty="0"/>
-              <a:t> pirandamine/</a:t>
-            </a:r>
-            <a:r>
-              <a:rPr lang="en-US" sz="1800" dirty="0" err="1"/>
-              <a:t>muutmine</a:t>
-            </a:r>
-            <a:r>
-              <a:rPr lang="en-US" sz="1800" dirty="0"/>
-              <a:t>/</a:t>
-            </a:r>
-            <a:r>
-              <a:rPr lang="en-US" sz="1800" dirty="0" err="1"/>
-              <a:t>lisamine</a:t>
-            </a:r>
-            <a:endParaRPr lang="en-US" sz="1800" dirty="0"/>
+            <a:pPr lvl="1"/>
+            <a:r>
+              <a:rPr lang="en-US" sz="2000" dirty="0" err="1"/>
+              <a:t>Toodetel</a:t>
+            </a:r>
+            <a:r>
+              <a:rPr lang="en-US" sz="2000" dirty="0"/>
+              <a:t> pole </a:t>
+            </a:r>
+            <a:r>
+              <a:rPr lang="en-US" sz="2000" dirty="0" err="1"/>
+              <a:t>kategooriaid</a:t>
+            </a:r>
+            <a:endParaRPr lang="en-US" sz="2000" dirty="0"/>
           </a:p>
           <a:p>
-            <a:pPr lvl="1">
-              <a:lnSpc>
-                <a:spcPct val="150000"/>
-              </a:lnSpc>
-            </a:pPr>
-            <a:r>
-              <a:rPr lang="en-US" sz="1800" dirty="0" err="1"/>
-              <a:t>sisendandmete</a:t>
-            </a:r>
-            <a:endParaRPr lang="en-US" sz="1800" dirty="0"/>
+            <a:pPr lvl="1"/>
+            <a:r>
+              <a:rPr lang="en-US" sz="2000" dirty="0" err="1"/>
+              <a:t>Toodetel</a:t>
+            </a:r>
+            <a:r>
+              <a:rPr lang="en-US" sz="2000" dirty="0"/>
+              <a:t> on </a:t>
+            </a:r>
+            <a:r>
+              <a:rPr lang="en-US" sz="2000" dirty="0" err="1"/>
+              <a:t>valed</a:t>
+            </a:r>
+            <a:r>
+              <a:rPr lang="en-US" sz="2000" dirty="0"/>
+              <a:t> </a:t>
+            </a:r>
+            <a:r>
+              <a:rPr lang="en-US" sz="2000" dirty="0" err="1"/>
+              <a:t>kategooriad</a:t>
+            </a:r>
+            <a:endParaRPr lang="en-US" sz="2000" dirty="0"/>
           </a:p>
           <a:p>
-            <a:pPr lvl="1">
-              <a:lnSpc>
-                <a:spcPct val="150000"/>
-              </a:lnSpc>
-            </a:pPr>
-            <a:r>
-              <a:rPr lang="en-US" sz="1800" dirty="0" err="1"/>
-              <a:t>tulemuste</a:t>
-            </a:r>
-            <a:endParaRPr lang="et-EE" sz="1800" dirty="0"/>
+            <a:pPr lvl="1"/>
+            <a:r>
+              <a:rPr lang="en-US" sz="2000" dirty="0" err="1"/>
+              <a:t>Summad</a:t>
+            </a:r>
+            <a:r>
+              <a:rPr lang="en-US" sz="2000" dirty="0"/>
+              <a:t> </a:t>
+            </a:r>
+            <a:r>
+              <a:rPr lang="en-US" sz="2000" dirty="0" err="1"/>
+              <a:t>tulevad</a:t>
+            </a:r>
+            <a:r>
+              <a:rPr lang="en-US" sz="2000" dirty="0"/>
+              <a:t> </a:t>
+            </a:r>
+            <a:r>
+              <a:rPr lang="en-US" sz="2000" dirty="0" err="1"/>
+              <a:t>topelt</a:t>
+            </a:r>
+            <a:r>
+              <a:rPr lang="en-US" sz="2000" dirty="0"/>
+              <a:t> (</a:t>
+            </a:r>
+            <a:r>
+              <a:rPr lang="en-US" sz="2000" dirty="0" err="1"/>
+              <a:t>müügiread</a:t>
+            </a:r>
+            <a:r>
+              <a:rPr lang="en-US" sz="2000" dirty="0"/>
+              <a:t> on </a:t>
+            </a:r>
+            <a:r>
+              <a:rPr lang="en-US" sz="2000" dirty="0" err="1"/>
+              <a:t>nt</a:t>
+            </a:r>
+            <a:r>
+              <a:rPr lang="en-US" sz="2000" dirty="0"/>
+              <a:t> </a:t>
+            </a:r>
+            <a:r>
+              <a:rPr lang="en-US" sz="2000" dirty="0" err="1"/>
+              <a:t>samas</a:t>
+            </a:r>
+            <a:r>
+              <a:rPr lang="en-US" sz="2000" dirty="0"/>
+              <a:t> </a:t>
+            </a:r>
+            <a:r>
+              <a:rPr lang="en-US" sz="2000" dirty="0" err="1"/>
+              <a:t>allikas</a:t>
+            </a:r>
+            <a:r>
+              <a:rPr lang="en-US" sz="2000" dirty="0"/>
+              <a:t> </a:t>
+            </a:r>
+            <a:r>
+              <a:rPr lang="en-US" sz="2000" dirty="0" err="1"/>
+              <a:t>kahest</a:t>
+            </a:r>
+            <a:r>
+              <a:rPr lang="en-US" sz="2000" dirty="0"/>
+              <a:t> </a:t>
+            </a:r>
+            <a:r>
+              <a:rPr lang="en-US" sz="2000" dirty="0" err="1"/>
+              <a:t>erinevast</a:t>
+            </a:r>
+            <a:r>
+              <a:rPr lang="en-US" sz="2000" dirty="0"/>
+              <a:t> </a:t>
+            </a:r>
+            <a:r>
+              <a:rPr lang="en-US" sz="2000" dirty="0" err="1"/>
+              <a:t>ajavööndist</a:t>
+            </a:r>
+            <a:r>
+              <a:rPr lang="en-US" sz="2000" dirty="0"/>
+              <a:t>)</a:t>
+            </a:r>
+          </a:p>
+          <a:p>
+            <a:r>
+              <a:rPr lang="en-US" sz="2000" b="1" dirty="0"/>
+              <a:t>Andmete </a:t>
+            </a:r>
+            <a:r>
+              <a:rPr lang="en-US" sz="2000" b="1" dirty="0" err="1"/>
+              <a:t>töötlemise</a:t>
+            </a:r>
+            <a:r>
+              <a:rPr lang="en-US" sz="2000" b="1" dirty="0"/>
+              <a:t> </a:t>
+            </a:r>
+            <a:r>
+              <a:rPr lang="en-US" sz="2000" b="1" dirty="0" err="1"/>
+              <a:t>etapis</a:t>
+            </a:r>
+            <a:r>
+              <a:rPr lang="en-US" sz="2000" b="1" dirty="0"/>
+              <a:t> või </a:t>
+            </a:r>
+            <a:r>
+              <a:rPr lang="en-US" sz="2000" b="1" dirty="0" err="1"/>
+              <a:t>analüüsis</a:t>
+            </a:r>
+            <a:r>
+              <a:rPr lang="en-US" sz="2000" b="1" dirty="0"/>
+              <a:t> </a:t>
+            </a:r>
+            <a:r>
+              <a:rPr lang="en-US" sz="2000" b="1" dirty="0" err="1"/>
+              <a:t>tekkinud</a:t>
+            </a:r>
+            <a:r>
+              <a:rPr lang="en-US" sz="2000" b="1" dirty="0"/>
+              <a:t> </a:t>
+            </a:r>
+            <a:r>
+              <a:rPr lang="en-US" sz="2000" b="1" dirty="0" err="1"/>
+              <a:t>vead</a:t>
+            </a:r>
+            <a:endParaRPr lang="en-US" sz="2000" b="1" dirty="0"/>
+          </a:p>
+          <a:p>
+            <a:pPr lvl="1"/>
+            <a:r>
+              <a:rPr lang="en-US" sz="2000" dirty="0"/>
+              <a:t>Mu </a:t>
+            </a:r>
+            <a:r>
+              <a:rPr lang="en-US" sz="2000" dirty="0" err="1"/>
+              <a:t>kasumi</a:t>
+            </a:r>
+            <a:r>
+              <a:rPr lang="en-US" sz="2000" dirty="0"/>
+              <a:t> nr </a:t>
+            </a:r>
+            <a:r>
+              <a:rPr lang="en-US" sz="2000" dirty="0" err="1"/>
+              <a:t>erineb</a:t>
+            </a:r>
+            <a:r>
+              <a:rPr lang="en-US" sz="2000" dirty="0"/>
+              <a:t> </a:t>
+            </a:r>
+            <a:r>
+              <a:rPr lang="en-US" sz="2000" dirty="0" err="1"/>
+              <a:t>raamatupidamisprogrammis</a:t>
+            </a:r>
+            <a:r>
+              <a:rPr lang="en-US" sz="2000" dirty="0"/>
+              <a:t> </a:t>
+            </a:r>
+            <a:r>
+              <a:rPr lang="en-US" sz="2000" dirty="0" err="1"/>
+              <a:t>olevast</a:t>
+            </a:r>
+            <a:endParaRPr lang="en-US" sz="2000" dirty="0"/>
+          </a:p>
+          <a:p>
+            <a:pPr lvl="1"/>
+            <a:r>
+              <a:rPr lang="en-US" sz="2000" dirty="0"/>
+              <a:t>Töötajate </a:t>
+            </a:r>
+            <a:r>
+              <a:rPr lang="en-US" sz="2000" dirty="0" err="1"/>
+              <a:t>arv</a:t>
+            </a:r>
+            <a:r>
+              <a:rPr lang="en-US" sz="2000" dirty="0"/>
+              <a:t> on </a:t>
+            </a:r>
+            <a:r>
+              <a:rPr lang="en-US" sz="2000" dirty="0" err="1"/>
+              <a:t>teisel</a:t>
+            </a:r>
+            <a:r>
+              <a:rPr lang="en-US" sz="2000" dirty="0"/>
+              <a:t> </a:t>
+            </a:r>
+            <a:r>
+              <a:rPr lang="en-US" sz="2000" dirty="0" err="1"/>
+              <a:t>juhil</a:t>
+            </a:r>
+            <a:r>
+              <a:rPr lang="en-US" sz="2000" dirty="0"/>
+              <a:t> </a:t>
+            </a:r>
+            <a:r>
+              <a:rPr lang="en-US" sz="2000" dirty="0" err="1"/>
+              <a:t>teine</a:t>
+            </a:r>
+            <a:endParaRPr lang="en-US" sz="2000" dirty="0"/>
+          </a:p>
+          <a:p>
+            <a:pPr lvl="1"/>
+            <a:r>
+              <a:rPr lang="en-US" sz="2000" dirty="0" err="1"/>
+              <a:t>Allokatsioonide</a:t>
+            </a:r>
+            <a:r>
+              <a:rPr lang="en-US" sz="2000" dirty="0"/>
+              <a:t> </a:t>
+            </a:r>
+            <a:r>
+              <a:rPr lang="en-US" sz="2000" dirty="0" err="1"/>
+              <a:t>summad</a:t>
+            </a:r>
+            <a:r>
+              <a:rPr lang="en-US" sz="2000" dirty="0"/>
+              <a:t> on </a:t>
+            </a:r>
+            <a:r>
+              <a:rPr lang="en-US" sz="2000" dirty="0" err="1"/>
+              <a:t>muutunud</a:t>
+            </a:r>
+            <a:r>
+              <a:rPr lang="en-US" sz="2000" dirty="0"/>
+              <a:t> </a:t>
+            </a:r>
+            <a:r>
+              <a:rPr lang="en-US" sz="2000" dirty="0" err="1"/>
+              <a:t>võrreldes</a:t>
+            </a:r>
+            <a:r>
+              <a:rPr lang="en-US" sz="2000" dirty="0"/>
+              <a:t> </a:t>
+            </a:r>
+            <a:r>
+              <a:rPr lang="en-US" sz="2000" dirty="0" err="1"/>
+              <a:t>eilsega</a:t>
+            </a:r>
+            <a:endParaRPr lang="et-EE" sz="2000" dirty="0"/>
           </a:p>
         </p:txBody>
       </p:sp>
     </p:spTree>
     <p:extLst>
       <p:ext uri="{BB962C8B-B14F-4D97-AF65-F5344CB8AC3E}">
-        <p14:creationId xmlns:p14="http://schemas.microsoft.com/office/powerpoint/2010/main" val="1773291844"/>
+        <p14:creationId xmlns:p14="http://schemas.microsoft.com/office/powerpoint/2010/main" val="1818135051"/>
       </p:ext>
     </p:extLst>
   </p:cSld>
@@ -42740,6 +43144,21 @@
 </file>
 
 <file path=customXml/item1.xml><?xml version="1.0" encoding="utf-8"?>
+<?mso-contentType ?>
+<FormTemplates xmlns="http://schemas.microsoft.com/sharepoint/v3/contenttype/forms">
+  <Display>DocumentLibraryForm</Display>
+  <Edit>DocumentLibraryForm</Edit>
+  <New>DocumentLibraryForm</New>
+</FormTemplates>
+</file>
+
+<file path=customXml/item2.xml><?xml version="1.0" encoding="utf-8"?>
+<p:properties xmlns:p="http://schemas.microsoft.com/office/2006/metadata/properties" xmlns:xsi="http://www.w3.org/2001/XMLSchema-instance" xmlns:pc="http://schemas.microsoft.com/office/infopath/2007/PartnerControls">
+  <documentManagement/>
+</p:properties>
+</file>
+
+<file path=customXml/item3.xml><?xml version="1.0" encoding="utf-8"?>
 <ct:contentTypeSchema xmlns:ct="http://schemas.microsoft.com/office/2006/metadata/contentType" xmlns:ma="http://schemas.microsoft.com/office/2006/metadata/properties/metaAttributes" ct:_="" ma:_="" ma:contentTypeName="Document" ma:contentTypeID="0x010100C4D27B8FA8976546BCD79313C588588D" ma:contentTypeVersion="8" ma:contentTypeDescription="Create a new document." ma:contentTypeScope="" ma:versionID="a112c56f6fe148a79025c76584832af0">
   <xsd:schema xmlns:xsd="http://www.w3.org/2001/XMLSchema" xmlns:xs="http://www.w3.org/2001/XMLSchema" xmlns:p="http://schemas.microsoft.com/office/2006/metadata/properties" xmlns:ns2="a1a2d923-8fea-42f1-bd41-9cdfff65694e" targetNamespace="http://schemas.microsoft.com/office/2006/metadata/properties" ma:root="true" ma:fieldsID="97c8655d467eaa9470a714421e7268c0" ns2:_="">
     <xsd:import namespace="a1a2d923-8fea-42f1-bd41-9cdfff65694e"/>
@@ -42907,22 +43326,24 @@
 </ct:contentTypeSchema>
 </file>
 
-<file path=customXml/item2.xml><?xml version="1.0" encoding="utf-8"?>
-<p:properties xmlns:p="http://schemas.microsoft.com/office/2006/metadata/properties" xmlns:xsi="http://www.w3.org/2001/XMLSchema-instance" xmlns:pc="http://schemas.microsoft.com/office/infopath/2007/PartnerControls">
-  <documentManagement/>
-</p:properties>
+<file path=customXml/itemProps1.xml><?xml version="1.0" encoding="utf-8"?>
+<ds:datastoreItem xmlns:ds="http://schemas.openxmlformats.org/officeDocument/2006/customXml" ds:itemID="{9DC439CA-6F1C-4005-ACA6-A52E04DEE0A7}">
+  <ds:schemaRefs>
+    <ds:schemaRef ds:uri="http://schemas.microsoft.com/sharepoint/v3/contenttype/forms"/>
+  </ds:schemaRefs>
+</ds:datastoreItem>
 </file>
 
-<file path=customXml/item3.xml><?xml version="1.0" encoding="utf-8"?>
-<?mso-contentType ?>
-<FormTemplates xmlns="http://schemas.microsoft.com/sharepoint/v3/contenttype/forms">
-  <Display>DocumentLibraryForm</Display>
-  <Edit>DocumentLibraryForm</Edit>
-  <New>DocumentLibraryForm</New>
-</FormTemplates>
+<file path=customXml/itemProps2.xml><?xml version="1.0" encoding="utf-8"?>
+<ds:datastoreItem xmlns:ds="http://schemas.openxmlformats.org/officeDocument/2006/customXml" ds:itemID="{5BDF4908-A52A-47DD-A794-6E02D71942FC}">
+  <ds:schemaRefs>
+    <ds:schemaRef ds:uri="http://schemas.microsoft.com/office/2006/metadata/properties"/>
+    <ds:schemaRef ds:uri="http://schemas.microsoft.com/office/infopath/2007/PartnerControls"/>
+  </ds:schemaRefs>
+</ds:datastoreItem>
 </file>
 
-<file path=customXml/itemProps1.xml><?xml version="1.0" encoding="utf-8"?>
+<file path=customXml/itemProps3.xml><?xml version="1.0" encoding="utf-8"?>
 <ds:datastoreItem xmlns:ds="http://schemas.openxmlformats.org/officeDocument/2006/customXml" ds:itemID="{9CF4F972-2392-44D0-AA45-41AC4FDC4A59}">
   <ds:schemaRefs>
     <ds:schemaRef ds:uri="a1a2d923-8fea-42f1-bd41-9cdfff65694e"/>
@@ -42940,23 +43361,6 @@
 </ds:datastoreItem>
 </file>
 
-<file path=customXml/itemProps2.xml><?xml version="1.0" encoding="utf-8"?>
-<ds:datastoreItem xmlns:ds="http://schemas.openxmlformats.org/officeDocument/2006/customXml" ds:itemID="{5BDF4908-A52A-47DD-A794-6E02D71942FC}">
-  <ds:schemaRefs>
-    <ds:schemaRef ds:uri="http://schemas.microsoft.com/office/2006/metadata/properties"/>
-    <ds:schemaRef ds:uri="http://schemas.microsoft.com/office/infopath/2007/PartnerControls"/>
-  </ds:schemaRefs>
-</ds:datastoreItem>
-</file>
-
-<file path=customXml/itemProps3.xml><?xml version="1.0" encoding="utf-8"?>
-<ds:datastoreItem xmlns:ds="http://schemas.openxmlformats.org/officeDocument/2006/customXml" ds:itemID="{9DC439CA-6F1C-4005-ACA6-A52E04DEE0A7}">
-  <ds:schemaRefs>
-    <ds:schemaRef ds:uri="http://schemas.microsoft.com/sharepoint/v3/contenttype/forms"/>
-  </ds:schemaRefs>
-</ds:datastoreItem>
-</file>
-
 <file path=docMetadata/LabelInfo.xml><?xml version="1.0" encoding="utf-8"?>
 <clbl:labelList xmlns:clbl="http://schemas.microsoft.com/office/2020/mipLabelMetadata">
   <clbl:label id="{4fc69ca6-ce6b-4059-8ad9-2049c3c135b3}" enabled="0" method="" siteId="{4fc69ca6-ce6b-4059-8ad9-2049c3c135b3}" removed="1"/>

--- a/Materjalid/Day2 Andmete elutsükkel Power BI/2-paev-andmetarkus-esitlus.pptx
+++ b/Materjalid/Day2 Andmete elutsükkel Power BI/2-paev-andmetarkus-esitlus.pptx
@@ -19,13 +19,13 @@
     <p:sldId id="445" r:id="rId10"/>
     <p:sldId id="635" r:id="rId11"/>
     <p:sldId id="642" r:id="rId12"/>
-    <p:sldId id="636" r:id="rId13"/>
-    <p:sldId id="637" r:id="rId14"/>
-    <p:sldId id="535" r:id="rId15"/>
-    <p:sldId id="446" r:id="rId16"/>
-    <p:sldId id="585" r:id="rId17"/>
+    <p:sldId id="643" r:id="rId13"/>
+    <p:sldId id="636" r:id="rId14"/>
+    <p:sldId id="637" r:id="rId15"/>
+    <p:sldId id="535" r:id="rId16"/>
+    <p:sldId id="446" r:id="rId17"/>
     <p:sldId id="640" r:id="rId18"/>
-    <p:sldId id="643" r:id="rId19"/>
+    <p:sldId id="585" r:id="rId19"/>
     <p:sldId id="638" r:id="rId20"/>
     <p:sldId id="639" r:id="rId21"/>
     <p:sldId id="586" r:id="rId22"/>
@@ -3501,7 +3501,7 @@
           <a:p>
             <a:fld id="{F9D2AD6E-DEDD-49A0-A4BE-7A081A9112DA}" type="datetimeFigureOut">
               <a:rPr lang="en-US" smtClean="0"/>
-              <a:t>8/28/2026</a:t>
+              <a:t>8/29/2026</a:t>
             </a:fld>
             <a:endParaRPr lang="en-US"/>
           </a:p>
@@ -3677,7 +3677,7 @@
           </a:lstStyle>
           <a:p>
             <a:fld id="{2AF9C1A6-4321-41FA-B001-4140F0E2457F}" type="datetimeFigureOut">
-              <a:t>28.08.2026</a:t>
+              <a:t>29.08.2026</a:t>
             </a:fld>
             <a:endParaRPr lang="en-US"/>
           </a:p>
@@ -4208,7 +4208,7 @@
           <a:p>
             <a:fld id="{46699514-027B-49BD-8B49-5054CA40ECF4}" type="slidenum">
               <a:rPr lang="en-US"/>
-              <a:t>13</a:t>
+              <a:t>15</a:t>
             </a:fld>
             <a:endParaRPr lang="en-US"/>
           </a:p>
@@ -16774,7 +16774,7 @@
           <a:p>
             <a:fld id="{DE840A40-73C8-4048-8140-49F5D65BB431}" type="datetimeFigureOut">
               <a:rPr lang="et-EE" smtClean="0"/>
-              <a:t>28.08.2026</a:t>
+              <a:t>29.08.2026</a:t>
             </a:fld>
             <a:endParaRPr lang="et-EE"/>
           </a:p>
@@ -28809,6 +28809,563 @@
           <p:cNvPr id="2" name="Title 1">
             <a:extLst>
               <a:ext uri="{FF2B5EF4-FFF2-40B4-BE49-F238E27FC236}">
+                <a16:creationId xmlns:a16="http://schemas.microsoft.com/office/drawing/2014/main" id="{BCC030D3-F5A0-E509-EA21-9622B5AA1524}"/>
+              </a:ext>
+            </a:extLst>
+          </p:cNvPr>
+          <p:cNvSpPr>
+            <a:spLocks noGrp="1"/>
+          </p:cNvSpPr>
+          <p:nvPr>
+            <p:ph type="ctrTitle"/>
+          </p:nvPr>
+        </p:nvSpPr>
+        <p:spPr/>
+        <p:txBody>
+          <a:bodyPr/>
+          <a:lstStyle/>
+          <a:p>
+            <a:r>
+              <a:rPr lang="en-US" dirty="0" err="1"/>
+              <a:t>Näiteid</a:t>
+            </a:r>
+            <a:r>
+              <a:rPr lang="en-US" dirty="0"/>
+              <a:t> </a:t>
+            </a:r>
+            <a:r>
+              <a:rPr lang="en-US" dirty="0" err="1"/>
+              <a:t>andmekvaliteedi</a:t>
+            </a:r>
+            <a:r>
+              <a:rPr lang="en-US" dirty="0"/>
+              <a:t> </a:t>
+            </a:r>
+            <a:r>
+              <a:rPr lang="en-US" dirty="0" err="1"/>
+              <a:t>probleemidest</a:t>
+            </a:r>
+            <a:endParaRPr lang="et-EE" dirty="0"/>
+          </a:p>
+        </p:txBody>
+      </p:sp>
+      <p:sp>
+        <p:nvSpPr>
+          <p:cNvPr id="3" name="Content Placeholder 2">
+            <a:extLst>
+              <a:ext uri="{FF2B5EF4-FFF2-40B4-BE49-F238E27FC236}">
+                <a16:creationId xmlns:a16="http://schemas.microsoft.com/office/drawing/2014/main" id="{4AE018F4-3DDC-6A2A-49CB-E48023F796D1}"/>
+              </a:ext>
+            </a:extLst>
+          </p:cNvPr>
+          <p:cNvSpPr>
+            <a:spLocks noGrp="1"/>
+          </p:cNvSpPr>
+          <p:nvPr>
+            <p:ph sz="quarter" idx="10"/>
+          </p:nvPr>
+        </p:nvSpPr>
+        <p:spPr/>
+        <p:txBody>
+          <a:bodyPr/>
+          <a:lstStyle/>
+          <a:p>
+            <a:r>
+              <a:rPr lang="en-US" sz="2000" b="1" dirty="0" err="1"/>
+              <a:t>Lähteandmete</a:t>
+            </a:r>
+            <a:r>
+              <a:rPr lang="en-US" sz="2000" dirty="0"/>
+              <a:t> </a:t>
+            </a:r>
+            <a:r>
+              <a:rPr lang="en-US" sz="2000" b="1" dirty="0" err="1"/>
+              <a:t>vead</a:t>
+            </a:r>
+            <a:endParaRPr lang="en-US" sz="2000" b="1" dirty="0"/>
+          </a:p>
+          <a:p>
+            <a:pPr lvl="1"/>
+            <a:r>
+              <a:rPr lang="en-US" sz="2000" dirty="0" err="1"/>
+              <a:t>Importfailis</a:t>
+            </a:r>
+            <a:r>
+              <a:rPr lang="en-US" sz="2000" dirty="0"/>
+              <a:t> </a:t>
+            </a:r>
+            <a:r>
+              <a:rPr lang="en-US" sz="2000" dirty="0" err="1"/>
+              <a:t>puuduvad</a:t>
+            </a:r>
+            <a:r>
+              <a:rPr lang="en-US" sz="2000" dirty="0"/>
+              <a:t> </a:t>
+            </a:r>
+            <a:r>
+              <a:rPr lang="en-US" sz="2000" dirty="0" err="1"/>
+              <a:t>vajalikud</a:t>
+            </a:r>
+            <a:r>
+              <a:rPr lang="en-US" sz="2000" dirty="0"/>
+              <a:t> </a:t>
+            </a:r>
+            <a:r>
+              <a:rPr lang="en-US" sz="2000" dirty="0" err="1"/>
+              <a:t>aastad</a:t>
+            </a:r>
+            <a:r>
+              <a:rPr lang="en-US" sz="2000" dirty="0"/>
+              <a:t> – ei </a:t>
+            </a:r>
+            <a:r>
+              <a:rPr lang="en-US" sz="2000" dirty="0" err="1"/>
+              <a:t>saa</a:t>
+            </a:r>
+            <a:r>
+              <a:rPr lang="en-US" sz="2000" dirty="0"/>
+              <a:t> </a:t>
+            </a:r>
+            <a:r>
+              <a:rPr lang="en-US" sz="2000" dirty="0" err="1"/>
+              <a:t>näitada</a:t>
+            </a:r>
+            <a:r>
+              <a:rPr lang="en-US" sz="2000" dirty="0"/>
+              <a:t> </a:t>
+            </a:r>
+            <a:r>
+              <a:rPr lang="en-US" sz="2000" dirty="0" err="1"/>
+              <a:t>muutust</a:t>
+            </a:r>
+            <a:r>
+              <a:rPr lang="en-US" sz="2000" dirty="0"/>
+              <a:t> </a:t>
+            </a:r>
+            <a:r>
+              <a:rPr lang="en-US" sz="2000" dirty="0" err="1"/>
+              <a:t>ajas</a:t>
+            </a:r>
+            <a:r>
+              <a:rPr lang="en-US" sz="2000" dirty="0"/>
+              <a:t> alates 2020</a:t>
+            </a:r>
+          </a:p>
+          <a:p>
+            <a:pPr lvl="1"/>
+            <a:r>
+              <a:rPr lang="en-US" sz="2000" dirty="0" err="1"/>
+              <a:t>Osadel</a:t>
+            </a:r>
+            <a:r>
+              <a:rPr lang="en-US" sz="2000" dirty="0"/>
+              <a:t> </a:t>
+            </a:r>
+            <a:r>
+              <a:rPr lang="en-US" sz="2000" dirty="0" err="1"/>
+              <a:t>ridadel</a:t>
+            </a:r>
+            <a:r>
+              <a:rPr lang="en-US" sz="2000" dirty="0"/>
+              <a:t> on </a:t>
+            </a:r>
+            <a:r>
+              <a:rPr lang="en-US" sz="2000" dirty="0" err="1"/>
+              <a:t>tühjad</a:t>
+            </a:r>
+            <a:r>
+              <a:rPr lang="en-US" sz="2000" dirty="0"/>
+              <a:t> </a:t>
+            </a:r>
+            <a:r>
+              <a:rPr lang="en-US" sz="2000" dirty="0" err="1"/>
+              <a:t>väärtused</a:t>
+            </a:r>
+            <a:r>
+              <a:rPr lang="en-US" sz="2000" dirty="0"/>
+              <a:t> – </a:t>
+            </a:r>
+            <a:r>
+              <a:rPr lang="en-US" sz="2000" dirty="0" err="1"/>
+              <a:t>kogused</a:t>
+            </a:r>
+            <a:r>
+              <a:rPr lang="en-US" sz="2000" dirty="0"/>
+              <a:t> pudu, </a:t>
+            </a:r>
+            <a:r>
+              <a:rPr lang="en-US" sz="2000" dirty="0" err="1"/>
+              <a:t>hinnad</a:t>
+            </a:r>
+            <a:r>
+              <a:rPr lang="en-US" sz="2000" dirty="0"/>
+              <a:t> pudu</a:t>
+            </a:r>
+            <a:endParaRPr lang="et-EE" sz="2000" dirty="0"/>
+          </a:p>
+          <a:p>
+            <a:pPr lvl="1"/>
+            <a:r>
+              <a:rPr lang="et-EE" sz="2000" dirty="0"/>
+              <a:t>Osad read on tühjad</a:t>
+            </a:r>
+            <a:endParaRPr lang="en-US" sz="2000" dirty="0"/>
+          </a:p>
+          <a:p>
+            <a:pPr lvl="1"/>
+            <a:r>
+              <a:rPr lang="en-US" sz="2000" dirty="0" err="1"/>
+              <a:t>Kuupäevad</a:t>
+            </a:r>
+            <a:r>
+              <a:rPr lang="en-US" sz="2000" dirty="0"/>
+              <a:t> ei ole </a:t>
+            </a:r>
+            <a:r>
+              <a:rPr lang="en-US" sz="2000" dirty="0" err="1"/>
+              <a:t>kuupäeva</a:t>
+            </a:r>
+            <a:r>
+              <a:rPr lang="en-US" sz="2000" dirty="0"/>
+              <a:t> </a:t>
+            </a:r>
+            <a:r>
+              <a:rPr lang="en-US" sz="2000" dirty="0" err="1"/>
+              <a:t>formaadis</a:t>
+            </a:r>
+            <a:r>
+              <a:rPr lang="en-US" sz="2000" dirty="0"/>
+              <a:t>, </a:t>
+            </a:r>
+            <a:r>
+              <a:rPr lang="en-US" sz="2000" dirty="0" err="1"/>
+              <a:t>osaliselt</a:t>
+            </a:r>
+            <a:r>
+              <a:rPr lang="en-US" sz="2000" dirty="0"/>
+              <a:t> </a:t>
+            </a:r>
+            <a:r>
+              <a:rPr lang="en-US" sz="2000" dirty="0" err="1"/>
+              <a:t>kellaajaga</a:t>
+            </a:r>
+            <a:endParaRPr lang="en-US" sz="2000" dirty="0"/>
+          </a:p>
+          <a:p>
+            <a:pPr lvl="1"/>
+            <a:r>
+              <a:rPr lang="en-US" sz="2000" dirty="0" err="1"/>
+              <a:t>Toodetel</a:t>
+            </a:r>
+            <a:r>
+              <a:rPr lang="en-US" sz="2000" dirty="0"/>
+              <a:t> pole </a:t>
+            </a:r>
+            <a:r>
+              <a:rPr lang="en-US" sz="2000" dirty="0" err="1"/>
+              <a:t>kategooriaid</a:t>
+            </a:r>
+            <a:endParaRPr lang="en-US" sz="2000" dirty="0"/>
+          </a:p>
+          <a:p>
+            <a:pPr lvl="1"/>
+            <a:r>
+              <a:rPr lang="en-US" sz="2000" dirty="0" err="1"/>
+              <a:t>Toodetel</a:t>
+            </a:r>
+            <a:r>
+              <a:rPr lang="en-US" sz="2000" dirty="0"/>
+              <a:t> on </a:t>
+            </a:r>
+            <a:r>
+              <a:rPr lang="en-US" sz="2000" dirty="0" err="1"/>
+              <a:t>valed</a:t>
+            </a:r>
+            <a:r>
+              <a:rPr lang="en-US" sz="2000" dirty="0"/>
+              <a:t> </a:t>
+            </a:r>
+            <a:r>
+              <a:rPr lang="en-US" sz="2000" dirty="0" err="1"/>
+              <a:t>kategooriad</a:t>
+            </a:r>
+            <a:endParaRPr lang="en-US" sz="2000" dirty="0"/>
+          </a:p>
+          <a:p>
+            <a:pPr lvl="1"/>
+            <a:r>
+              <a:rPr lang="en-US" sz="2000" dirty="0" err="1"/>
+              <a:t>Summad</a:t>
+            </a:r>
+            <a:r>
+              <a:rPr lang="en-US" sz="2000" dirty="0"/>
+              <a:t> </a:t>
+            </a:r>
+            <a:r>
+              <a:rPr lang="en-US" sz="2000" dirty="0" err="1"/>
+              <a:t>tulevad</a:t>
+            </a:r>
+            <a:r>
+              <a:rPr lang="en-US" sz="2000" dirty="0"/>
+              <a:t> </a:t>
+            </a:r>
+            <a:r>
+              <a:rPr lang="en-US" sz="2000" dirty="0" err="1"/>
+              <a:t>topelt</a:t>
+            </a:r>
+            <a:r>
+              <a:rPr lang="en-US" sz="2000" dirty="0"/>
+              <a:t> (</a:t>
+            </a:r>
+            <a:r>
+              <a:rPr lang="en-US" sz="2000" dirty="0" err="1"/>
+              <a:t>müügiread</a:t>
+            </a:r>
+            <a:r>
+              <a:rPr lang="en-US" sz="2000" dirty="0"/>
+              <a:t> on </a:t>
+            </a:r>
+            <a:r>
+              <a:rPr lang="en-US" sz="2000" dirty="0" err="1"/>
+              <a:t>nt</a:t>
+            </a:r>
+            <a:r>
+              <a:rPr lang="en-US" sz="2000" dirty="0"/>
+              <a:t> </a:t>
+            </a:r>
+            <a:r>
+              <a:rPr lang="en-US" sz="2000" dirty="0" err="1"/>
+              <a:t>samas</a:t>
+            </a:r>
+            <a:r>
+              <a:rPr lang="en-US" sz="2000" dirty="0"/>
+              <a:t> </a:t>
+            </a:r>
+            <a:r>
+              <a:rPr lang="en-US" sz="2000" dirty="0" err="1"/>
+              <a:t>allikas</a:t>
+            </a:r>
+            <a:r>
+              <a:rPr lang="en-US" sz="2000" dirty="0"/>
+              <a:t> </a:t>
+            </a:r>
+            <a:r>
+              <a:rPr lang="en-US" sz="2000" dirty="0" err="1"/>
+              <a:t>kahest</a:t>
+            </a:r>
+            <a:r>
+              <a:rPr lang="en-US" sz="2000" dirty="0"/>
+              <a:t> </a:t>
+            </a:r>
+            <a:r>
+              <a:rPr lang="en-US" sz="2000" dirty="0" err="1"/>
+              <a:t>erinevast</a:t>
+            </a:r>
+            <a:r>
+              <a:rPr lang="en-US" sz="2000" dirty="0"/>
+              <a:t> </a:t>
+            </a:r>
+            <a:r>
+              <a:rPr lang="en-US" sz="2000" dirty="0" err="1"/>
+              <a:t>ajavööndist</a:t>
+            </a:r>
+            <a:r>
+              <a:rPr lang="en-US" sz="2000" dirty="0"/>
+              <a:t>)</a:t>
+            </a:r>
+          </a:p>
+          <a:p>
+            <a:r>
+              <a:rPr lang="en-US" sz="2000" b="1" dirty="0"/>
+              <a:t>Andmete </a:t>
+            </a:r>
+            <a:r>
+              <a:rPr lang="en-US" sz="2000" b="1" dirty="0" err="1"/>
+              <a:t>töötlemise</a:t>
+            </a:r>
+            <a:r>
+              <a:rPr lang="en-US" sz="2000" b="1" dirty="0"/>
+              <a:t> </a:t>
+            </a:r>
+            <a:r>
+              <a:rPr lang="en-US" sz="2000" b="1" dirty="0" err="1"/>
+              <a:t>etapis</a:t>
+            </a:r>
+            <a:r>
+              <a:rPr lang="en-US" sz="2000" b="1" dirty="0"/>
+              <a:t> või </a:t>
+            </a:r>
+            <a:r>
+              <a:rPr lang="en-US" sz="2000" b="1" dirty="0" err="1"/>
+              <a:t>analüüsis</a:t>
+            </a:r>
+            <a:r>
+              <a:rPr lang="en-US" sz="2000" b="1" dirty="0"/>
+              <a:t> </a:t>
+            </a:r>
+            <a:r>
+              <a:rPr lang="en-US" sz="2000" b="1" dirty="0" err="1"/>
+              <a:t>tekkinud</a:t>
+            </a:r>
+            <a:r>
+              <a:rPr lang="en-US" sz="2000" b="1" dirty="0"/>
+              <a:t> </a:t>
+            </a:r>
+            <a:r>
+              <a:rPr lang="en-US" sz="2000" b="1" dirty="0" err="1"/>
+              <a:t>vead</a:t>
+            </a:r>
+            <a:endParaRPr lang="en-US" sz="2000" b="1" dirty="0"/>
+          </a:p>
+          <a:p>
+            <a:pPr lvl="1"/>
+            <a:r>
+              <a:rPr lang="en-US" sz="2000" dirty="0"/>
+              <a:t>Mu </a:t>
+            </a:r>
+            <a:r>
+              <a:rPr lang="en-US" sz="2000" dirty="0" err="1"/>
+              <a:t>kasumi</a:t>
+            </a:r>
+            <a:r>
+              <a:rPr lang="en-US" sz="2000" dirty="0"/>
+              <a:t> nr </a:t>
+            </a:r>
+            <a:r>
+              <a:rPr lang="en-US" sz="2000" dirty="0" err="1"/>
+              <a:t>erineb</a:t>
+            </a:r>
+            <a:r>
+              <a:rPr lang="en-US" sz="2000" dirty="0"/>
+              <a:t> </a:t>
+            </a:r>
+            <a:r>
+              <a:rPr lang="en-US" sz="2000" dirty="0" err="1"/>
+              <a:t>raamatupidamisprogrammis</a:t>
+            </a:r>
+            <a:r>
+              <a:rPr lang="en-US" sz="2000" dirty="0"/>
+              <a:t> </a:t>
+            </a:r>
+            <a:r>
+              <a:rPr lang="en-US" sz="2000" dirty="0" err="1"/>
+              <a:t>olevast</a:t>
+            </a:r>
+            <a:endParaRPr lang="en-US" sz="2000" dirty="0"/>
+          </a:p>
+          <a:p>
+            <a:pPr lvl="1"/>
+            <a:r>
+              <a:rPr lang="en-US" sz="2000" dirty="0"/>
+              <a:t>Töötajate </a:t>
+            </a:r>
+            <a:r>
+              <a:rPr lang="en-US" sz="2000" dirty="0" err="1"/>
+              <a:t>arv</a:t>
+            </a:r>
+            <a:r>
+              <a:rPr lang="en-US" sz="2000" dirty="0"/>
+              <a:t> on </a:t>
+            </a:r>
+            <a:r>
+              <a:rPr lang="en-US" sz="2000" dirty="0" err="1"/>
+              <a:t>teisel</a:t>
+            </a:r>
+            <a:r>
+              <a:rPr lang="en-US" sz="2000" dirty="0"/>
+              <a:t> </a:t>
+            </a:r>
+            <a:r>
+              <a:rPr lang="en-US" sz="2000" dirty="0" err="1"/>
+              <a:t>juhil</a:t>
+            </a:r>
+            <a:r>
+              <a:rPr lang="en-US" sz="2000" dirty="0"/>
+              <a:t> </a:t>
+            </a:r>
+            <a:r>
+              <a:rPr lang="en-US" sz="2000" dirty="0" err="1"/>
+              <a:t>teine</a:t>
+            </a:r>
+            <a:endParaRPr lang="en-US" sz="2000" dirty="0"/>
+          </a:p>
+          <a:p>
+            <a:pPr lvl="1"/>
+            <a:r>
+              <a:rPr lang="en-US" sz="2000" dirty="0" err="1"/>
+              <a:t>Allokatsioonide</a:t>
+            </a:r>
+            <a:r>
+              <a:rPr lang="en-US" sz="2000" dirty="0"/>
+              <a:t> </a:t>
+            </a:r>
+            <a:r>
+              <a:rPr lang="en-US" sz="2000" dirty="0" err="1"/>
+              <a:t>summad</a:t>
+            </a:r>
+            <a:r>
+              <a:rPr lang="en-US" sz="2000" dirty="0"/>
+              <a:t> on </a:t>
+            </a:r>
+            <a:r>
+              <a:rPr lang="en-US" sz="2000" dirty="0" err="1"/>
+              <a:t>muutunud</a:t>
+            </a:r>
+            <a:r>
+              <a:rPr lang="en-US" sz="2000" dirty="0"/>
+              <a:t> </a:t>
+            </a:r>
+            <a:r>
+              <a:rPr lang="en-US" sz="2000" dirty="0" err="1"/>
+              <a:t>võrreldes</a:t>
+            </a:r>
+            <a:r>
+              <a:rPr lang="en-US" sz="2000" dirty="0"/>
+              <a:t> </a:t>
+            </a:r>
+            <a:r>
+              <a:rPr lang="en-US" sz="2000" dirty="0" err="1"/>
+              <a:t>eilsega</a:t>
+            </a:r>
+            <a:endParaRPr lang="et-EE" sz="2000" dirty="0"/>
+          </a:p>
+        </p:txBody>
+      </p:sp>
+    </p:spTree>
+    <p:extLst>
+      <p:ext uri="{BB962C8B-B14F-4D97-AF65-F5344CB8AC3E}">
+        <p14:creationId xmlns:p14="http://schemas.microsoft.com/office/powerpoint/2010/main" val="1818135051"/>
+      </p:ext>
+    </p:extLst>
+  </p:cSld>
+  <p:clrMapOvr>
+    <a:masterClrMapping/>
+  </p:clrMapOvr>
+</p:sld>
+</file>
+
+<file path=ppt/slides/slide11.xml><?xml version="1.0" encoding="utf-8"?>
+<p:sld xmlns:a="http://schemas.openxmlformats.org/drawingml/2006/main" xmlns:r="http://schemas.openxmlformats.org/officeDocument/2006/relationships" xmlns:p="http://schemas.openxmlformats.org/presentationml/2006/main">
+  <p:cSld>
+    <p:spTree>
+      <p:nvGrpSpPr>
+        <p:cNvPr id="1" name=""/>
+        <p:cNvGrpSpPr/>
+        <p:nvPr/>
+      </p:nvGrpSpPr>
+      <p:grpSpPr>
+        <a:xfrm>
+          <a:off x="0" y="0"/>
+          <a:ext cx="0" cy="0"/>
+          <a:chOff x="0" y="0"/>
+          <a:chExt cx="0" cy="0"/>
+        </a:xfrm>
+      </p:grpSpPr>
+      <p:sp>
+        <p:nvSpPr>
+          <p:cNvPr id="2" name="Title 1">
+            <a:extLst>
+              <a:ext uri="{FF2B5EF4-FFF2-40B4-BE49-F238E27FC236}">
                 <a16:creationId xmlns:a16="http://schemas.microsoft.com/office/drawing/2014/main" id="{1CB74240-DA98-AFD1-5042-F7972DCFC4CA}"/>
               </a:ext>
             </a:extLst>
@@ -29325,7 +29882,7 @@
 </p:sld>
 </file>
 
-<file path=ppt/slides/slide11.xml><?xml version="1.0" encoding="utf-8"?>
+<file path=ppt/slides/slide12.xml><?xml version="1.0" encoding="utf-8"?>
 <p:sld xmlns:a="http://schemas.openxmlformats.org/drawingml/2006/main" xmlns:r="http://schemas.openxmlformats.org/officeDocument/2006/relationships" xmlns:p="http://schemas.openxmlformats.org/presentationml/2006/main">
   <p:cSld>
     <p:spTree>
@@ -29438,7 +29995,7 @@
 </p:sld>
 </file>
 
-<file path=ppt/slides/slide12.xml><?xml version="1.0" encoding="utf-8"?>
+<file path=ppt/slides/slide13.xml><?xml version="1.0" encoding="utf-8"?>
 <p:sld xmlns:a="http://schemas.openxmlformats.org/drawingml/2006/main" xmlns:r="http://schemas.openxmlformats.org/officeDocument/2006/relationships" xmlns:p="http://schemas.openxmlformats.org/presentationml/2006/main">
   <p:cSld>
     <p:spTree>
@@ -29705,533 +30262,6 @@
     <p:extLst>
       <p:ext uri="{BB962C8B-B14F-4D97-AF65-F5344CB8AC3E}">
         <p14:creationId xmlns:p14="http://schemas.microsoft.com/office/powerpoint/2010/main" val="394666795"/>
-      </p:ext>
-    </p:extLst>
-  </p:cSld>
-  <p:clrMapOvr>
-    <a:masterClrMapping/>
-  </p:clrMapOvr>
-</p:sld>
-</file>
-
-<file path=ppt/slides/slide13.xml><?xml version="1.0" encoding="utf-8"?>
-<p:sld xmlns:a="http://schemas.openxmlformats.org/drawingml/2006/main" xmlns:r="http://schemas.openxmlformats.org/officeDocument/2006/relationships" xmlns:p="http://schemas.openxmlformats.org/presentationml/2006/main">
-  <p:cSld>
-    <p:spTree>
-      <p:nvGrpSpPr>
-        <p:cNvPr id="1" name="">
-          <a:extLst>
-            <a:ext uri="{FF2B5EF4-FFF2-40B4-BE49-F238E27FC236}">
-              <a16:creationId xmlns:a16="http://schemas.microsoft.com/office/drawing/2014/main" id="{2E557E86-F0CD-95DC-95D0-8C87805B0EA1}"/>
-            </a:ext>
-          </a:extLst>
-        </p:cNvPr>
-        <p:cNvGrpSpPr/>
-        <p:nvPr/>
-      </p:nvGrpSpPr>
-      <p:grpSpPr>
-        <a:xfrm>
-          <a:off x="0" y="0"/>
-          <a:ext cx="0" cy="0"/>
-          <a:chOff x="0" y="0"/>
-          <a:chExt cx="0" cy="0"/>
-        </a:xfrm>
-      </p:grpSpPr>
-      <p:sp>
-        <p:nvSpPr>
-          <p:cNvPr id="2" name="Title 1">
-            <a:extLst>
-              <a:ext uri="{FF2B5EF4-FFF2-40B4-BE49-F238E27FC236}">
-                <a16:creationId xmlns:a16="http://schemas.microsoft.com/office/drawing/2014/main" id="{9DE2716E-62FE-889D-36A0-488FE686063C}"/>
-              </a:ext>
-            </a:extLst>
-          </p:cNvPr>
-          <p:cNvSpPr>
-            <a:spLocks noGrp="1"/>
-          </p:cNvSpPr>
-          <p:nvPr>
-            <p:ph type="ctrTitle"/>
-          </p:nvPr>
-        </p:nvSpPr>
-        <p:spPr/>
-        <p:txBody>
-          <a:bodyPr/>
-          <a:lstStyle/>
-          <a:p>
-            <a:r>
-              <a:rPr lang="en-US" dirty="0" err="1">
-                <a:ea typeface="+mj-lt"/>
-                <a:cs typeface="+mj-lt"/>
-              </a:rPr>
-              <a:t>Harjutus</a:t>
-            </a:r>
-            <a:r>
-              <a:rPr lang="en-US" dirty="0">
-                <a:ea typeface="+mj-lt"/>
-                <a:cs typeface="+mj-lt"/>
-              </a:rPr>
-              <a:t> 1 </a:t>
-            </a:r>
-            <a:r>
-              <a:rPr lang="en-US" dirty="0" err="1">
-                <a:ea typeface="+mj-lt"/>
-                <a:cs typeface="+mj-lt"/>
-              </a:rPr>
-              <a:t>jätk</a:t>
-            </a:r>
-            <a:br>
-              <a:rPr lang="en-US" dirty="0">
-                <a:ea typeface="+mj-lt"/>
-                <a:cs typeface="+mj-lt"/>
-              </a:rPr>
-            </a:br>
-            <a:r>
-              <a:rPr lang="en-US" dirty="0">
-                <a:ea typeface="+mj-lt"/>
-                <a:cs typeface="+mj-lt"/>
-              </a:rPr>
-              <a:t>Power BI – uue </a:t>
-            </a:r>
-            <a:r>
-              <a:rPr lang="en-US" dirty="0" err="1">
-                <a:ea typeface="+mj-lt"/>
-                <a:cs typeface="+mj-lt"/>
-              </a:rPr>
-              <a:t>andmestiku</a:t>
-            </a:r>
-            <a:r>
-              <a:rPr lang="en-US" dirty="0">
-                <a:ea typeface="+mj-lt"/>
-                <a:cs typeface="+mj-lt"/>
-              </a:rPr>
-              <a:t> </a:t>
-            </a:r>
-            <a:r>
-              <a:rPr lang="en-US" dirty="0" err="1">
-                <a:ea typeface="+mj-lt"/>
-                <a:cs typeface="+mj-lt"/>
-              </a:rPr>
-              <a:t>kvaliteedi</a:t>
-            </a:r>
-            <a:r>
-              <a:rPr lang="en-US" dirty="0">
-                <a:ea typeface="+mj-lt"/>
-                <a:cs typeface="+mj-lt"/>
-              </a:rPr>
-              <a:t> </a:t>
-            </a:r>
-            <a:r>
-              <a:rPr lang="en-US" dirty="0" err="1">
-                <a:ea typeface="+mj-lt"/>
-                <a:cs typeface="+mj-lt"/>
-              </a:rPr>
-              <a:t>kontroll</a:t>
-            </a:r>
-            <a:endParaRPr lang="en-US" dirty="0">
-              <a:ea typeface="Inter Bold"/>
-            </a:endParaRPr>
-          </a:p>
-        </p:txBody>
-      </p:sp>
-      <p:sp>
-        <p:nvSpPr>
-          <p:cNvPr id="3" name="Content Placeholder 2">
-            <a:extLst>
-              <a:ext uri="{FF2B5EF4-FFF2-40B4-BE49-F238E27FC236}">
-                <a16:creationId xmlns:a16="http://schemas.microsoft.com/office/drawing/2014/main" id="{880528B4-6D3A-26AC-5F90-5FEC55219D50}"/>
-              </a:ext>
-            </a:extLst>
-          </p:cNvPr>
-          <p:cNvSpPr>
-            <a:spLocks noGrp="1"/>
-          </p:cNvSpPr>
-          <p:nvPr>
-            <p:ph sz="quarter" idx="10"/>
-          </p:nvPr>
-        </p:nvSpPr>
-        <p:spPr>
-          <a:xfrm>
-            <a:off x="454149" y="1755728"/>
-            <a:ext cx="10941050" cy="4465637"/>
-          </a:xfrm>
-        </p:spPr>
-        <p:txBody>
-          <a:bodyPr/>
-          <a:lstStyle/>
-          <a:p>
-            <a:pPr marL="285750" indent="0">
-              <a:lnSpc>
-                <a:spcPct val="150000"/>
-              </a:lnSpc>
-              <a:buNone/>
-            </a:pPr>
-            <a:r>
-              <a:rPr lang="en-US" sz="2400" dirty="0" err="1">
-                <a:ea typeface="Inter"/>
-              </a:rPr>
-              <a:t>Võtame</a:t>
-            </a:r>
-            <a:r>
-              <a:rPr lang="en-US" sz="2400" dirty="0">
-                <a:ea typeface="Inter"/>
-              </a:rPr>
-              <a:t> alla </a:t>
-            </a:r>
-            <a:r>
-              <a:rPr lang="en-US" sz="2400" dirty="0" err="1">
-                <a:ea typeface="Inter"/>
-              </a:rPr>
-              <a:t>uued</a:t>
-            </a:r>
-            <a:r>
-              <a:rPr lang="en-US" sz="2400" dirty="0">
-                <a:ea typeface="Inter"/>
-              </a:rPr>
-              <a:t> andmed </a:t>
-            </a:r>
-            <a:r>
-              <a:rPr lang="en-US" sz="2400" dirty="0" err="1">
-                <a:ea typeface="Inter"/>
-              </a:rPr>
-              <a:t>müügiraporti</a:t>
-            </a:r>
-            <a:r>
-              <a:rPr lang="en-US" sz="2400" dirty="0">
-                <a:ea typeface="Inter"/>
-              </a:rPr>
-              <a:t> jaoks (</a:t>
-            </a:r>
-            <a:r>
-              <a:rPr lang="en-US" sz="2400" dirty="0" err="1">
-                <a:ea typeface="Inter"/>
-              </a:rPr>
-              <a:t>sama</a:t>
-            </a:r>
-            <a:r>
-              <a:rPr lang="en-US" sz="2400" dirty="0">
-                <a:ea typeface="Inter"/>
-              </a:rPr>
-              <a:t> </a:t>
-            </a:r>
-            <a:r>
-              <a:rPr lang="en-US" sz="2400" dirty="0" err="1">
-                <a:ea typeface="Inter"/>
-              </a:rPr>
-              <a:t>raport</a:t>
-            </a:r>
-            <a:r>
-              <a:rPr lang="en-US" sz="2400" dirty="0">
-                <a:ea typeface="Inter"/>
-              </a:rPr>
-              <a:t>, </a:t>
-            </a:r>
-            <a:r>
-              <a:rPr lang="en-US" sz="2400" dirty="0" err="1">
-                <a:ea typeface="Inter"/>
-              </a:rPr>
-              <a:t>kuid</a:t>
-            </a:r>
-            <a:r>
-              <a:rPr lang="en-US" sz="2400" dirty="0">
-                <a:ea typeface="Inter"/>
-              </a:rPr>
-              <a:t> </a:t>
-            </a:r>
-            <a:r>
-              <a:rPr lang="en-US" sz="2400" dirty="0" err="1">
-                <a:ea typeface="Inter"/>
-              </a:rPr>
-              <a:t>uued</a:t>
-            </a:r>
-            <a:r>
-              <a:rPr lang="en-US" sz="2400" dirty="0">
-                <a:ea typeface="Inter"/>
-              </a:rPr>
-              <a:t> </a:t>
-            </a:r>
-            <a:r>
-              <a:rPr lang="en-US" sz="2400" dirty="0" err="1">
-                <a:ea typeface="Inter"/>
-              </a:rPr>
-              <a:t>failid</a:t>
-            </a:r>
-            <a:r>
-              <a:rPr lang="en-US" sz="2400" dirty="0">
-                <a:ea typeface="Inter"/>
-              </a:rPr>
-              <a:t>)</a:t>
-            </a:r>
-          </a:p>
-          <a:p>
-            <a:pPr marL="1085850" lvl="1" indent="-342900">
-              <a:lnSpc>
-                <a:spcPct val="150000"/>
-              </a:lnSpc>
-            </a:pPr>
-            <a:r>
-              <a:rPr lang="en-US" sz="2000" dirty="0">
-                <a:ea typeface="Inter"/>
-              </a:rPr>
-              <a:t>Lae alla ZIP fail </a:t>
-            </a:r>
-            <a:r>
-              <a:rPr lang="en-US" sz="2000" dirty="0" err="1">
-                <a:ea typeface="Inter"/>
-              </a:rPr>
-              <a:t>alliktabelitega</a:t>
-            </a:r>
-            <a:r>
-              <a:rPr lang="en-US" sz="2000" dirty="0">
-                <a:ea typeface="Inter"/>
-              </a:rPr>
-              <a:t> </a:t>
-            </a:r>
-            <a:r>
-              <a:rPr lang="en-US" sz="2000" dirty="0" err="1">
-                <a:ea typeface="Inter"/>
-              </a:rPr>
-              <a:t>GitHubist</a:t>
-            </a:r>
-            <a:r>
-              <a:rPr lang="en-US" sz="2000" dirty="0">
-                <a:ea typeface="Inter"/>
-              </a:rPr>
-              <a:t>: </a:t>
-            </a:r>
-            <a:r>
-              <a:rPr lang="en-US" sz="2000" b="1" dirty="0">
-                <a:ea typeface="Inter"/>
-              </a:rPr>
-              <a:t>Day2 </a:t>
-            </a:r>
-            <a:r>
-              <a:rPr lang="en-US" sz="2000" dirty="0">
-                <a:ea typeface="Inter"/>
-              </a:rPr>
-              <a:t>--&gt; DataSources.zip</a:t>
-            </a:r>
-          </a:p>
-          <a:p>
-            <a:pPr marL="1085850" lvl="1" indent="-342900">
-              <a:lnSpc>
-                <a:spcPct val="150000"/>
-              </a:lnSpc>
-            </a:pPr>
-            <a:r>
-              <a:rPr lang="en-US" sz="2000" dirty="0">
-                <a:ea typeface="Inter"/>
-              </a:rPr>
-              <a:t>Unzip</a:t>
-            </a:r>
-          </a:p>
-          <a:p>
-            <a:pPr marL="1085850" lvl="1" indent="-342900">
-              <a:lnSpc>
-                <a:spcPct val="150000"/>
-              </a:lnSpc>
-            </a:pPr>
-            <a:r>
-              <a:rPr lang="en-US" sz="2000" dirty="0">
-                <a:ea typeface="Inter"/>
-              </a:rPr>
-              <a:t>Ava </a:t>
-            </a:r>
-            <a:r>
-              <a:rPr lang="en-US" sz="2000" dirty="0" err="1">
-                <a:ea typeface="Inter"/>
-              </a:rPr>
-              <a:t>eile</a:t>
-            </a:r>
-            <a:r>
-              <a:rPr lang="en-US" sz="2000" dirty="0">
-                <a:ea typeface="Inter"/>
-              </a:rPr>
-              <a:t> </a:t>
-            </a:r>
-            <a:r>
-              <a:rPr lang="en-US" sz="2000" dirty="0" err="1">
-                <a:ea typeface="Inter"/>
-              </a:rPr>
-              <a:t>tehtud</a:t>
-            </a:r>
-            <a:r>
-              <a:rPr lang="en-US" sz="2000" dirty="0">
-                <a:ea typeface="Inter"/>
-              </a:rPr>
-              <a:t> </a:t>
-            </a:r>
-            <a:r>
-              <a:rPr lang="en-US" sz="2000" dirty="0" err="1">
-                <a:ea typeface="Inter"/>
-              </a:rPr>
-              <a:t>PowerBI</a:t>
-            </a:r>
-            <a:r>
-              <a:rPr lang="en-US" sz="2000" dirty="0">
-                <a:ea typeface="Inter"/>
-              </a:rPr>
-              <a:t> fail --&gt; Transform Data --&gt; Change data source</a:t>
-            </a:r>
-          </a:p>
-          <a:p>
-            <a:pPr marL="1543050" lvl="2" indent="-342900">
-              <a:lnSpc>
-                <a:spcPct val="150000"/>
-              </a:lnSpc>
-            </a:pPr>
-            <a:r>
-              <a:rPr lang="en-US" sz="2000" dirty="0" err="1">
-                <a:ea typeface="Inter"/>
-              </a:rPr>
-              <a:t>Vaata</a:t>
-            </a:r>
-            <a:r>
-              <a:rPr lang="en-US" sz="2000" dirty="0">
-                <a:ea typeface="Inter"/>
-              </a:rPr>
-              <a:t> </a:t>
-            </a:r>
-            <a:r>
-              <a:rPr lang="en-US" sz="2000" dirty="0" err="1">
-                <a:ea typeface="Inter"/>
-              </a:rPr>
-              <a:t>üle</a:t>
-            </a:r>
-            <a:r>
-              <a:rPr lang="en-US" sz="2000" dirty="0">
-                <a:ea typeface="Inter"/>
-              </a:rPr>
-              <a:t> </a:t>
-            </a:r>
-            <a:r>
-              <a:rPr lang="en-US" sz="2000" dirty="0" err="1">
-                <a:ea typeface="Inter"/>
-              </a:rPr>
-              <a:t>tulpade</a:t>
-            </a:r>
-            <a:r>
-              <a:rPr lang="en-US" sz="2000" dirty="0">
-                <a:ea typeface="Inter"/>
-              </a:rPr>
-              <a:t> sisu ja </a:t>
-            </a:r>
-            <a:r>
-              <a:rPr lang="en-US" sz="2000" dirty="0" err="1">
-                <a:ea typeface="Inter"/>
-              </a:rPr>
-              <a:t>vorm</a:t>
-            </a:r>
-            <a:endParaRPr lang="en-US" sz="2000" dirty="0">
-              <a:ea typeface="Inter"/>
-            </a:endParaRPr>
-          </a:p>
-          <a:p>
-            <a:pPr marL="1543050" lvl="2" indent="-342900">
-              <a:lnSpc>
-                <a:spcPct val="150000"/>
-              </a:lnSpc>
-            </a:pPr>
-            <a:r>
-              <a:rPr lang="en-US" sz="2000" b="1" dirty="0">
-                <a:ea typeface="Inter"/>
-              </a:rPr>
-              <a:t>Kas on </a:t>
-            </a:r>
-            <a:r>
-              <a:rPr lang="en-US" sz="2000" b="1" dirty="0" err="1">
-                <a:ea typeface="Inter"/>
-              </a:rPr>
-              <a:t>väärtuseid</a:t>
-            </a:r>
-            <a:r>
-              <a:rPr lang="en-US" sz="2000" b="1" dirty="0">
-                <a:ea typeface="Inter"/>
-              </a:rPr>
-              <a:t>, mis </a:t>
-            </a:r>
-            <a:r>
-              <a:rPr lang="en-US" sz="2000" b="1" dirty="0" err="1">
-                <a:ea typeface="Inter"/>
-              </a:rPr>
-              <a:t>tunduvad</a:t>
-            </a:r>
-            <a:r>
-              <a:rPr lang="en-US" sz="2000" b="1" dirty="0">
-                <a:ea typeface="Inter"/>
-              </a:rPr>
-              <a:t> </a:t>
-            </a:r>
-            <a:r>
-              <a:rPr lang="en-US" sz="2000" b="1" dirty="0" err="1">
-                <a:ea typeface="Inter"/>
-              </a:rPr>
-              <a:t>ebaloogilised</a:t>
-            </a:r>
-            <a:r>
-              <a:rPr lang="en-US" sz="2000" b="1" dirty="0">
-                <a:ea typeface="Inter"/>
-              </a:rPr>
-              <a:t>?</a:t>
-            </a:r>
-            <a:endParaRPr lang="en-US" sz="2000" b="1" dirty="0"/>
-          </a:p>
-          <a:p>
-            <a:pPr marL="1085850" lvl="1" indent="-342900">
-              <a:lnSpc>
-                <a:spcPct val="150000"/>
-              </a:lnSpc>
-            </a:pPr>
-            <a:r>
-              <a:rPr lang="en-US" sz="2000" dirty="0" err="1">
-                <a:ea typeface="Inter"/>
-              </a:rPr>
-              <a:t>Salvesta</a:t>
-            </a:r>
-            <a:r>
-              <a:rPr lang="en-US" sz="2000" dirty="0">
-                <a:ea typeface="Inter"/>
-              </a:rPr>
-              <a:t> fail</a:t>
-            </a:r>
-            <a:endParaRPr lang="en-US" sz="2000" dirty="0"/>
-          </a:p>
-          <a:p>
-            <a:pPr marL="285750" indent="0">
-              <a:lnSpc>
-                <a:spcPct val="150000"/>
-              </a:lnSpc>
-              <a:buClr>
-                <a:srgbClr val="121212"/>
-              </a:buClr>
-              <a:buNone/>
-            </a:pPr>
-            <a:endParaRPr lang="en-US" sz="2400" dirty="0"/>
-          </a:p>
-          <a:p>
-            <a:pPr marL="514350">
-              <a:lnSpc>
-                <a:spcPct val="150000"/>
-              </a:lnSpc>
-              <a:buFont typeface="Inter"/>
-              <a:buChar char="‣"/>
-            </a:pPr>
-            <a:endParaRPr lang="en-US" sz="2800" dirty="0"/>
-          </a:p>
-          <a:p>
-            <a:pPr marL="0" indent="0">
-              <a:lnSpc>
-                <a:spcPct val="150000"/>
-              </a:lnSpc>
-              <a:buNone/>
-            </a:pPr>
-            <a:endParaRPr lang="en-US" sz="2800" dirty="0"/>
-          </a:p>
-        </p:txBody>
-      </p:sp>
-    </p:spTree>
-    <p:extLst>
-      <p:ext uri="{BB962C8B-B14F-4D97-AF65-F5344CB8AC3E}">
-        <p14:creationId xmlns:p14="http://schemas.microsoft.com/office/powerpoint/2010/main" val="2908858834"/>
       </p:ext>
     </p:extLst>
   </p:cSld>
@@ -30356,7 +30386,13 @@
   <p:cSld>
     <p:spTree>
       <p:nvGrpSpPr>
-        <p:cNvPr id="1" name=""/>
+        <p:cNvPr id="1" name="">
+          <a:extLst>
+            <a:ext uri="{FF2B5EF4-FFF2-40B4-BE49-F238E27FC236}">
+              <a16:creationId xmlns:a16="http://schemas.microsoft.com/office/drawing/2014/main" id="{2E557E86-F0CD-95DC-95D0-8C87805B0EA1}"/>
+            </a:ext>
+          </a:extLst>
+        </p:cNvPr>
         <p:cNvGrpSpPr/>
         <p:nvPr/>
       </p:nvGrpSpPr>
@@ -30373,7 +30409,7 @@
           <p:cNvPr id="2" name="Title 1">
             <a:extLst>
               <a:ext uri="{FF2B5EF4-FFF2-40B4-BE49-F238E27FC236}">
-                <a16:creationId xmlns:a16="http://schemas.microsoft.com/office/drawing/2014/main" id="{9182EFA9-113B-3F35-BA20-9FAC11E551BB}"/>
+                <a16:creationId xmlns:a16="http://schemas.microsoft.com/office/drawing/2014/main" id="{9DE2716E-62FE-889D-36A0-488FE686063C}"/>
               </a:ext>
             </a:extLst>
           </p:cNvPr>
@@ -30389,7 +30425,78 @@
           <a:bodyPr/>
           <a:lstStyle/>
           <a:p>
-            <a:endParaRPr lang="et-EE"/>
+            <a:r>
+              <a:rPr lang="en-US" dirty="0" err="1">
+                <a:ea typeface="+mj-lt"/>
+                <a:cs typeface="+mj-lt"/>
+              </a:rPr>
+              <a:t>Harjutus</a:t>
+            </a:r>
+            <a:r>
+              <a:rPr lang="en-US" dirty="0">
+                <a:ea typeface="+mj-lt"/>
+                <a:cs typeface="+mj-lt"/>
+              </a:rPr>
+              <a:t> 1 </a:t>
+            </a:r>
+            <a:r>
+              <a:rPr lang="en-US" dirty="0" err="1">
+                <a:ea typeface="+mj-lt"/>
+                <a:cs typeface="+mj-lt"/>
+              </a:rPr>
+              <a:t>jätk</a:t>
+            </a:r>
+            <a:br>
+              <a:rPr lang="en-US" dirty="0">
+                <a:ea typeface="+mj-lt"/>
+                <a:cs typeface="+mj-lt"/>
+              </a:rPr>
+            </a:br>
+            <a:r>
+              <a:rPr lang="en-US" dirty="0">
+                <a:ea typeface="+mj-lt"/>
+                <a:cs typeface="+mj-lt"/>
+              </a:rPr>
+              <a:t>Power BI – uue </a:t>
+            </a:r>
+            <a:r>
+              <a:rPr lang="en-US" dirty="0" err="1">
+                <a:ea typeface="+mj-lt"/>
+                <a:cs typeface="+mj-lt"/>
+              </a:rPr>
+              <a:t>andmestiku</a:t>
+            </a:r>
+            <a:r>
+              <a:rPr lang="en-US" dirty="0">
+                <a:ea typeface="+mj-lt"/>
+                <a:cs typeface="+mj-lt"/>
+              </a:rPr>
+              <a:t> </a:t>
+            </a:r>
+            <a:r>
+              <a:rPr lang="en-US" dirty="0" err="1">
+                <a:ea typeface="+mj-lt"/>
+                <a:cs typeface="+mj-lt"/>
+              </a:rPr>
+              <a:t>kvaliteedi</a:t>
+            </a:r>
+            <a:r>
+              <a:rPr lang="en-US" dirty="0">
+                <a:ea typeface="+mj-lt"/>
+                <a:cs typeface="+mj-lt"/>
+              </a:rPr>
+              <a:t> </a:t>
+            </a:r>
+            <a:r>
+              <a:rPr lang="en-US" dirty="0" err="1">
+                <a:ea typeface="+mj-lt"/>
+                <a:cs typeface="+mj-lt"/>
+              </a:rPr>
+              <a:t>kontroll</a:t>
+            </a:r>
+            <a:endParaRPr lang="en-US" dirty="0">
+              <a:ea typeface="Inter Bold"/>
+            </a:endParaRPr>
           </a:p>
         </p:txBody>
       </p:sp>
@@ -30398,7 +30505,7 @@
           <p:cNvPr id="3" name="Content Placeholder 2">
             <a:extLst>
               <a:ext uri="{FF2B5EF4-FFF2-40B4-BE49-F238E27FC236}">
-                <a16:creationId xmlns:a16="http://schemas.microsoft.com/office/drawing/2014/main" id="{2858F2BB-230A-4D83-62C3-1D56AFD34FFB}"/>
+                <a16:creationId xmlns:a16="http://schemas.microsoft.com/office/drawing/2014/main" id="{880528B4-6D3A-26AC-5F90-5FEC55219D50}"/>
               </a:ext>
             </a:extLst>
           </p:cNvPr>
@@ -30409,49 +30516,389 @@
             <p:ph sz="quarter" idx="10"/>
           </p:nvPr>
         </p:nvSpPr>
-        <p:spPr/>
+        <p:spPr>
+          <a:xfrm>
+            <a:off x="454149" y="1755728"/>
+            <a:ext cx="10941050" cy="4465637"/>
+          </a:xfrm>
+        </p:spPr>
         <p:txBody>
           <a:bodyPr/>
           <a:lstStyle/>
           <a:p>
-            <a:endParaRPr lang="et-EE"/>
+            <a:pPr marL="285750" indent="0">
+              <a:lnSpc>
+                <a:spcPct val="150000"/>
+              </a:lnSpc>
+              <a:buNone/>
+            </a:pPr>
+            <a:r>
+              <a:rPr lang="en-US" sz="2400" dirty="0" err="1">
+                <a:ea typeface="Inter"/>
+              </a:rPr>
+              <a:t>Võtame</a:t>
+            </a:r>
+            <a:r>
+              <a:rPr lang="en-US" sz="2400" dirty="0">
+                <a:ea typeface="Inter"/>
+              </a:rPr>
+              <a:t> alla </a:t>
+            </a:r>
+            <a:r>
+              <a:rPr lang="en-US" sz="2400" dirty="0" err="1">
+                <a:ea typeface="Inter"/>
+              </a:rPr>
+              <a:t>uued</a:t>
+            </a:r>
+            <a:r>
+              <a:rPr lang="en-US" sz="2400" dirty="0">
+                <a:ea typeface="Inter"/>
+              </a:rPr>
+              <a:t> andmed </a:t>
+            </a:r>
+            <a:r>
+              <a:rPr lang="en-US" sz="2400" dirty="0" err="1">
+                <a:ea typeface="Inter"/>
+              </a:rPr>
+              <a:t>müügiraporti</a:t>
+            </a:r>
+            <a:r>
+              <a:rPr lang="en-US" sz="2400" dirty="0">
+                <a:ea typeface="Inter"/>
+              </a:rPr>
+              <a:t> jaoks (</a:t>
+            </a:r>
+            <a:r>
+              <a:rPr lang="en-US" sz="2400" dirty="0" err="1">
+                <a:ea typeface="Inter"/>
+              </a:rPr>
+              <a:t>sama</a:t>
+            </a:r>
+            <a:r>
+              <a:rPr lang="en-US" sz="2400" dirty="0">
+                <a:ea typeface="Inter"/>
+              </a:rPr>
+              <a:t> </a:t>
+            </a:r>
+            <a:r>
+              <a:rPr lang="en-US" sz="2400" dirty="0" err="1">
+                <a:ea typeface="Inter"/>
+              </a:rPr>
+              <a:t>raport</a:t>
+            </a:r>
+            <a:r>
+              <a:rPr lang="en-US" sz="2400" dirty="0">
+                <a:ea typeface="Inter"/>
+              </a:rPr>
+              <a:t>, </a:t>
+            </a:r>
+            <a:r>
+              <a:rPr lang="en-US" sz="2400" dirty="0" err="1">
+                <a:ea typeface="Inter"/>
+              </a:rPr>
+              <a:t>kuid</a:t>
+            </a:r>
+            <a:r>
+              <a:rPr lang="en-US" sz="2400" dirty="0">
+                <a:ea typeface="Inter"/>
+              </a:rPr>
+              <a:t> </a:t>
+            </a:r>
+            <a:r>
+              <a:rPr lang="en-US" sz="2400" dirty="0" err="1">
+                <a:ea typeface="Inter"/>
+              </a:rPr>
+              <a:t>uued</a:t>
+            </a:r>
+            <a:r>
+              <a:rPr lang="en-US" sz="2400" dirty="0">
+                <a:ea typeface="Inter"/>
+              </a:rPr>
+              <a:t> </a:t>
+            </a:r>
+            <a:r>
+              <a:rPr lang="en-US" sz="2400" dirty="0" err="1">
+                <a:ea typeface="Inter"/>
+              </a:rPr>
+              <a:t>failid</a:t>
+            </a:r>
+            <a:r>
+              <a:rPr lang="en-US" sz="2400" dirty="0">
+                <a:ea typeface="Inter"/>
+              </a:rPr>
+              <a:t>)</a:t>
+            </a:r>
+          </a:p>
+          <a:p>
+            <a:pPr marL="1085850" lvl="1" indent="-342900">
+              <a:lnSpc>
+                <a:spcPct val="150000"/>
+              </a:lnSpc>
+            </a:pPr>
+            <a:r>
+              <a:rPr lang="en-US" sz="2000" dirty="0">
+                <a:ea typeface="Inter"/>
+              </a:rPr>
+              <a:t>Lae alla ZIP fail </a:t>
+            </a:r>
+            <a:r>
+              <a:rPr lang="en-US" sz="2000" dirty="0" err="1">
+                <a:ea typeface="Inter"/>
+              </a:rPr>
+              <a:t>alliktabelitega</a:t>
+            </a:r>
+            <a:r>
+              <a:rPr lang="en-US" sz="2000" dirty="0">
+                <a:ea typeface="Inter"/>
+              </a:rPr>
+              <a:t> </a:t>
+            </a:r>
+            <a:r>
+              <a:rPr lang="en-US" sz="2000" dirty="0" err="1">
+                <a:ea typeface="Inter"/>
+              </a:rPr>
+              <a:t>GitHubist</a:t>
+            </a:r>
+            <a:r>
+              <a:rPr lang="en-US" sz="2000" dirty="0">
+                <a:ea typeface="Inter"/>
+              </a:rPr>
+              <a:t>: </a:t>
+            </a:r>
+            <a:r>
+              <a:rPr lang="en-US" sz="2000" b="1" dirty="0">
+                <a:ea typeface="Inter"/>
+              </a:rPr>
+              <a:t>Day2 </a:t>
+            </a:r>
+            <a:r>
+              <a:rPr lang="en-US" sz="2000" dirty="0">
+                <a:ea typeface="Inter"/>
+              </a:rPr>
+              <a:t>--&gt; DataSources.zip</a:t>
+            </a:r>
+          </a:p>
+          <a:p>
+            <a:pPr marL="1085850" lvl="1" indent="-342900">
+              <a:lnSpc>
+                <a:spcPct val="150000"/>
+              </a:lnSpc>
+            </a:pPr>
+            <a:r>
+              <a:rPr lang="en-US" sz="2000" dirty="0">
+                <a:ea typeface="Inter"/>
+              </a:rPr>
+              <a:t>Unzip</a:t>
+            </a:r>
+          </a:p>
+          <a:p>
+            <a:pPr marL="1085850" lvl="1" indent="-342900">
+              <a:lnSpc>
+                <a:spcPct val="150000"/>
+              </a:lnSpc>
+            </a:pPr>
+            <a:r>
+              <a:rPr lang="en-US" sz="2000" dirty="0">
+                <a:ea typeface="Inter"/>
+              </a:rPr>
+              <a:t>Ava </a:t>
+            </a:r>
+            <a:r>
+              <a:rPr lang="en-US" sz="2000" dirty="0" err="1">
+                <a:ea typeface="Inter"/>
+              </a:rPr>
+              <a:t>eile</a:t>
+            </a:r>
+            <a:r>
+              <a:rPr lang="en-US" sz="2000" dirty="0">
+                <a:ea typeface="Inter"/>
+              </a:rPr>
+              <a:t> </a:t>
+            </a:r>
+            <a:r>
+              <a:rPr lang="en-US" sz="2000" dirty="0" err="1">
+                <a:ea typeface="Inter"/>
+              </a:rPr>
+              <a:t>tehtud</a:t>
+            </a:r>
+            <a:r>
+              <a:rPr lang="en-US" sz="2000" dirty="0">
+                <a:ea typeface="Inter"/>
+              </a:rPr>
+              <a:t> </a:t>
+            </a:r>
+            <a:r>
+              <a:rPr lang="en-US" sz="2000" dirty="0" err="1">
+                <a:ea typeface="Inter"/>
+              </a:rPr>
+              <a:t>PowerBI</a:t>
+            </a:r>
+            <a:r>
+              <a:rPr lang="en-US" sz="2000" dirty="0">
+                <a:ea typeface="Inter"/>
+              </a:rPr>
+              <a:t> fail --&gt; Transform Data --&gt; Change data source</a:t>
+            </a:r>
+          </a:p>
+          <a:p>
+            <a:pPr marL="1543050" lvl="2" indent="-342900">
+              <a:lnSpc>
+                <a:spcPct val="150000"/>
+              </a:lnSpc>
+            </a:pPr>
+            <a:r>
+              <a:rPr lang="en-US" sz="2000" dirty="0" err="1">
+                <a:ea typeface="Inter"/>
+              </a:rPr>
+              <a:t>Vaata</a:t>
+            </a:r>
+            <a:r>
+              <a:rPr lang="en-US" sz="2000" dirty="0">
+                <a:ea typeface="Inter"/>
+              </a:rPr>
+              <a:t> </a:t>
+            </a:r>
+            <a:r>
+              <a:rPr lang="en-US" sz="2000" dirty="0" err="1">
+                <a:ea typeface="Inter"/>
+              </a:rPr>
+              <a:t>üle</a:t>
+            </a:r>
+            <a:r>
+              <a:rPr lang="en-US" sz="2000" dirty="0">
+                <a:ea typeface="Inter"/>
+              </a:rPr>
+              <a:t> </a:t>
+            </a:r>
+            <a:r>
+              <a:rPr lang="en-US" sz="2000" dirty="0" err="1">
+                <a:ea typeface="Inter"/>
+              </a:rPr>
+              <a:t>tulpade</a:t>
+            </a:r>
+            <a:r>
+              <a:rPr lang="en-US" sz="2000" dirty="0">
+                <a:ea typeface="Inter"/>
+              </a:rPr>
+              <a:t> sisu ja </a:t>
+            </a:r>
+            <a:r>
+              <a:rPr lang="en-US" sz="2000" dirty="0" err="1">
+                <a:ea typeface="Inter"/>
+              </a:rPr>
+              <a:t>vorm</a:t>
+            </a:r>
+            <a:endParaRPr lang="en-US" sz="2000" dirty="0">
+              <a:ea typeface="Inter"/>
+            </a:endParaRPr>
+          </a:p>
+          <a:p>
+            <a:pPr marL="1543050" lvl="2" indent="-342900">
+              <a:lnSpc>
+                <a:spcPct val="150000"/>
+              </a:lnSpc>
+            </a:pPr>
+            <a:r>
+              <a:rPr lang="en-US" sz="2000" b="1" dirty="0">
+                <a:ea typeface="Inter"/>
+              </a:rPr>
+              <a:t>Kas on </a:t>
+            </a:r>
+            <a:r>
+              <a:rPr lang="en-US" sz="2000" b="1" dirty="0" err="1">
+                <a:ea typeface="Inter"/>
+              </a:rPr>
+              <a:t>väärtuseid</a:t>
+            </a:r>
+            <a:r>
+              <a:rPr lang="en-US" sz="2000" b="1" dirty="0">
+                <a:ea typeface="Inter"/>
+              </a:rPr>
+              <a:t>, mis </a:t>
+            </a:r>
+            <a:r>
+              <a:rPr lang="en-US" sz="2000" b="1" dirty="0" err="1">
+                <a:ea typeface="Inter"/>
+              </a:rPr>
+              <a:t>tunduvad</a:t>
+            </a:r>
+            <a:r>
+              <a:rPr lang="en-US" sz="2000" b="1" dirty="0">
+                <a:ea typeface="Inter"/>
+              </a:rPr>
+              <a:t> </a:t>
+            </a:r>
+            <a:r>
+              <a:rPr lang="en-US" sz="2000" b="1" dirty="0" err="1">
+                <a:ea typeface="Inter"/>
+              </a:rPr>
+              <a:t>ebaloogilised</a:t>
+            </a:r>
+            <a:r>
+              <a:rPr lang="en-US" sz="2000" b="1" dirty="0">
+                <a:ea typeface="Inter"/>
+              </a:rPr>
+              <a:t>?</a:t>
+            </a:r>
+            <a:endParaRPr lang="en-US" sz="2000" b="1" dirty="0"/>
+          </a:p>
+          <a:p>
+            <a:pPr marL="1085850" lvl="1" indent="-342900">
+              <a:lnSpc>
+                <a:spcPct val="150000"/>
+              </a:lnSpc>
+            </a:pPr>
+            <a:r>
+              <a:rPr lang="en-US" sz="2000" dirty="0" err="1">
+                <a:ea typeface="Inter"/>
+              </a:rPr>
+              <a:t>Salvesta</a:t>
+            </a:r>
+            <a:r>
+              <a:rPr lang="en-US" sz="2000" dirty="0">
+                <a:ea typeface="Inter"/>
+              </a:rPr>
+              <a:t> fail</a:t>
+            </a:r>
+            <a:endParaRPr lang="en-US" sz="2000" dirty="0"/>
+          </a:p>
+          <a:p>
+            <a:pPr marL="285750" indent="0">
+              <a:lnSpc>
+                <a:spcPct val="150000"/>
+              </a:lnSpc>
+              <a:buClr>
+                <a:srgbClr val="121212"/>
+              </a:buClr>
+              <a:buNone/>
+            </a:pPr>
+            <a:endParaRPr lang="en-US" sz="2400" dirty="0"/>
+          </a:p>
+          <a:p>
+            <a:pPr marL="514350">
+              <a:lnSpc>
+                <a:spcPct val="150000"/>
+              </a:lnSpc>
+              <a:buFont typeface="Inter"/>
+              <a:buChar char="‣"/>
+            </a:pPr>
+            <a:endParaRPr lang="en-US" sz="2800" dirty="0"/>
+          </a:p>
+          <a:p>
+            <a:pPr marL="0" indent="0">
+              <a:lnSpc>
+                <a:spcPct val="150000"/>
+              </a:lnSpc>
+              <a:buNone/>
+            </a:pPr>
+            <a:endParaRPr lang="en-US" sz="2800" dirty="0"/>
           </a:p>
         </p:txBody>
       </p:sp>
-      <p:pic>
-        <p:nvPicPr>
-          <p:cNvPr id="4" name="Picture 3" descr="50+ data science memes to fight the weekday blues">
-            <a:extLst>
-              <a:ext uri="{FF2B5EF4-FFF2-40B4-BE49-F238E27FC236}">
-                <a16:creationId xmlns:a16="http://schemas.microsoft.com/office/drawing/2014/main" id="{785876CE-F3A1-65EB-6EC2-C2990356586F}"/>
-              </a:ext>
-            </a:extLst>
-          </p:cNvPr>
-          <p:cNvPicPr>
-            <a:picLocks noChangeAspect="1"/>
-          </p:cNvPicPr>
-          <p:nvPr/>
-        </p:nvPicPr>
-        <p:blipFill>
-          <a:blip r:embed="rId2"/>
-          <a:stretch>
-            <a:fillRect/>
-          </a:stretch>
-        </p:blipFill>
-        <p:spPr>
-          <a:xfrm>
-            <a:off x="3810983" y="1144475"/>
-            <a:ext cx="4572000" cy="4572000"/>
-          </a:xfrm>
-          <a:prstGeom prst="rect">
-            <a:avLst/>
-          </a:prstGeom>
-        </p:spPr>
-      </p:pic>
     </p:spTree>
     <p:extLst>
       <p:ext uri="{BB962C8B-B14F-4D97-AF65-F5344CB8AC3E}">
-        <p14:creationId xmlns:p14="http://schemas.microsoft.com/office/powerpoint/2010/main" val="4174591945"/>
+        <p14:creationId xmlns:p14="http://schemas.microsoft.com/office/powerpoint/2010/main" val="2908858834"/>
       </p:ext>
     </p:extLst>
   </p:cSld>
@@ -41817,7 +42264,7 @@
           <p:cNvPr id="2" name="Title 1">
             <a:extLst>
               <a:ext uri="{FF2B5EF4-FFF2-40B4-BE49-F238E27FC236}">
-                <a16:creationId xmlns:a16="http://schemas.microsoft.com/office/drawing/2014/main" id="{BCC030D3-F5A0-E509-EA21-9622B5AA1524}"/>
+                <a16:creationId xmlns:a16="http://schemas.microsoft.com/office/drawing/2014/main" id="{9182EFA9-113B-3F35-BA20-9FAC11E551BB}"/>
               </a:ext>
             </a:extLst>
           </p:cNvPr>
@@ -41833,27 +42280,7 @@
           <a:bodyPr/>
           <a:lstStyle/>
           <a:p>
-            <a:r>
-              <a:rPr lang="en-US" dirty="0" err="1"/>
-              <a:t>Näiteid</a:t>
-            </a:r>
-            <a:r>
-              <a:rPr lang="en-US" dirty="0"/>
-              <a:t> </a:t>
-            </a:r>
-            <a:r>
-              <a:rPr lang="en-US" dirty="0" err="1"/>
-              <a:t>andmekvaliteedi</a:t>
-            </a:r>
-            <a:r>
-              <a:rPr lang="en-US" dirty="0"/>
-              <a:t> </a:t>
-            </a:r>
-            <a:r>
-              <a:rPr lang="en-US" dirty="0" err="1"/>
-              <a:t>probleemidest</a:t>
-            </a:r>
-            <a:endParaRPr lang="et-EE" dirty="0"/>
+            <a:endParaRPr lang="et-EE"/>
           </a:p>
         </p:txBody>
       </p:sp>
@@ -41862,7 +42289,7 @@
           <p:cNvPr id="3" name="Content Placeholder 2">
             <a:extLst>
               <a:ext uri="{FF2B5EF4-FFF2-40B4-BE49-F238E27FC236}">
-                <a16:creationId xmlns:a16="http://schemas.microsoft.com/office/drawing/2014/main" id="{4AE018F4-3DDC-6A2A-49CB-E48023F796D1}"/>
+                <a16:creationId xmlns:a16="http://schemas.microsoft.com/office/drawing/2014/main" id="{2858F2BB-230A-4D83-62C3-1D56AFD34FFB}"/>
               </a:ext>
             </a:extLst>
           </p:cNvPr>
@@ -41878,471 +42305,44 @@
           <a:bodyPr/>
           <a:lstStyle/>
           <a:p>
-            <a:r>
-              <a:rPr lang="en-US" sz="2000" b="1" dirty="0" err="1"/>
-              <a:t>Lähteandmete</a:t>
-            </a:r>
-            <a:r>
-              <a:rPr lang="en-US" sz="2000" dirty="0"/>
-              <a:t> </a:t>
-            </a:r>
-            <a:r>
-              <a:rPr lang="en-US" sz="2000" b="1" dirty="0" err="1"/>
-              <a:t>vead</a:t>
-            </a:r>
-            <a:endParaRPr lang="en-US" sz="2000" b="1" dirty="0"/>
-          </a:p>
-          <a:p>
-            <a:pPr lvl="1"/>
-            <a:r>
-              <a:rPr lang="en-US" sz="2000" dirty="0" err="1"/>
-              <a:t>Importfailis</a:t>
-            </a:r>
-            <a:r>
-              <a:rPr lang="en-US" sz="2000" dirty="0"/>
-              <a:t> </a:t>
-            </a:r>
-            <a:r>
-              <a:rPr lang="en-US" sz="2000" dirty="0" err="1"/>
-              <a:t>puuduvad</a:t>
-            </a:r>
-            <a:r>
-              <a:rPr lang="en-US" sz="2000" dirty="0"/>
-              <a:t> </a:t>
-            </a:r>
-            <a:r>
-              <a:rPr lang="en-US" sz="2000" dirty="0" err="1"/>
-              <a:t>vajalikud</a:t>
-            </a:r>
-            <a:r>
-              <a:rPr lang="en-US" sz="2000" dirty="0"/>
-              <a:t> </a:t>
-            </a:r>
-            <a:r>
-              <a:rPr lang="en-US" sz="2000" dirty="0" err="1"/>
-              <a:t>aastad</a:t>
-            </a:r>
-            <a:r>
-              <a:rPr lang="en-US" sz="2000" dirty="0"/>
-              <a:t> – ei </a:t>
-            </a:r>
-            <a:r>
-              <a:rPr lang="en-US" sz="2000" dirty="0" err="1"/>
-              <a:t>saa</a:t>
-            </a:r>
-            <a:r>
-              <a:rPr lang="en-US" sz="2000" dirty="0"/>
-              <a:t> </a:t>
-            </a:r>
-            <a:r>
-              <a:rPr lang="en-US" sz="2000" dirty="0" err="1"/>
-              <a:t>näitada</a:t>
-            </a:r>
-            <a:r>
-              <a:rPr lang="en-US" sz="2000" dirty="0"/>
-              <a:t> </a:t>
-            </a:r>
-            <a:r>
-              <a:rPr lang="en-US" sz="2000" dirty="0" err="1"/>
-              <a:t>muutust</a:t>
-            </a:r>
-            <a:r>
-              <a:rPr lang="en-US" sz="2000" dirty="0"/>
-              <a:t> </a:t>
-            </a:r>
-            <a:r>
-              <a:rPr lang="en-US" sz="2000" dirty="0" err="1"/>
-              <a:t>ajas</a:t>
-            </a:r>
-            <a:r>
-              <a:rPr lang="en-US" sz="2000" dirty="0"/>
-              <a:t> alates 2020</a:t>
-            </a:r>
-          </a:p>
-          <a:p>
-            <a:pPr lvl="1"/>
-            <a:r>
-              <a:rPr lang="en-US" sz="2000" dirty="0" err="1"/>
-              <a:t>Osadel</a:t>
-            </a:r>
-            <a:r>
-              <a:rPr lang="en-US" sz="2000" dirty="0"/>
-              <a:t> </a:t>
-            </a:r>
-            <a:r>
-              <a:rPr lang="en-US" sz="2000" dirty="0" err="1"/>
-              <a:t>ridadel</a:t>
-            </a:r>
-            <a:r>
-              <a:rPr lang="en-US" sz="2000" dirty="0"/>
-              <a:t> on </a:t>
-            </a:r>
-            <a:r>
-              <a:rPr lang="en-US" sz="2000" dirty="0" err="1"/>
-              <a:t>tühjad</a:t>
-            </a:r>
-            <a:r>
-              <a:rPr lang="en-US" sz="2000" dirty="0"/>
-              <a:t> </a:t>
-            </a:r>
-            <a:r>
-              <a:rPr lang="en-US" sz="2000" dirty="0" err="1"/>
-              <a:t>väärtused</a:t>
-            </a:r>
-            <a:r>
-              <a:rPr lang="en-US" sz="2000" dirty="0"/>
-              <a:t> – </a:t>
-            </a:r>
-            <a:r>
-              <a:rPr lang="en-US" sz="2000" dirty="0" err="1"/>
-              <a:t>kogused</a:t>
-            </a:r>
-            <a:r>
-              <a:rPr lang="en-US" sz="2000" dirty="0"/>
-              <a:t> pudu, </a:t>
-            </a:r>
-            <a:r>
-              <a:rPr lang="en-US" sz="2000" dirty="0" err="1"/>
-              <a:t>hinnad</a:t>
-            </a:r>
-            <a:r>
-              <a:rPr lang="en-US" sz="2000" dirty="0"/>
-              <a:t> pudu</a:t>
-            </a:r>
-            <a:endParaRPr lang="et-EE" sz="2000" dirty="0"/>
-          </a:p>
-          <a:p>
-            <a:pPr lvl="1"/>
-            <a:r>
-              <a:rPr lang="et-EE" sz="2000" dirty="0"/>
-              <a:t>Osad read on tühjad</a:t>
-            </a:r>
-            <a:endParaRPr lang="en-US" sz="2000" dirty="0"/>
-          </a:p>
-          <a:p>
-            <a:pPr lvl="1"/>
-            <a:r>
-              <a:rPr lang="en-US" sz="2000" dirty="0" err="1"/>
-              <a:t>Kuupäevad</a:t>
-            </a:r>
-            <a:r>
-              <a:rPr lang="en-US" sz="2000" dirty="0"/>
-              <a:t> ei ole </a:t>
-            </a:r>
-            <a:r>
-              <a:rPr lang="en-US" sz="2000" dirty="0" err="1"/>
-              <a:t>kuupäeva</a:t>
-            </a:r>
-            <a:r>
-              <a:rPr lang="en-US" sz="2000" dirty="0"/>
-              <a:t> </a:t>
-            </a:r>
-            <a:r>
-              <a:rPr lang="en-US" sz="2000" dirty="0" err="1"/>
-              <a:t>formaadis</a:t>
-            </a:r>
-            <a:r>
-              <a:rPr lang="en-US" sz="2000" dirty="0"/>
-              <a:t>, </a:t>
-            </a:r>
-            <a:r>
-              <a:rPr lang="en-US" sz="2000" dirty="0" err="1"/>
-              <a:t>osaliselt</a:t>
-            </a:r>
-            <a:r>
-              <a:rPr lang="en-US" sz="2000" dirty="0"/>
-              <a:t> </a:t>
-            </a:r>
-            <a:r>
-              <a:rPr lang="en-US" sz="2000" dirty="0" err="1"/>
-              <a:t>kellaajaga</a:t>
-            </a:r>
-            <a:endParaRPr lang="en-US" sz="2000" dirty="0"/>
-          </a:p>
-          <a:p>
-            <a:pPr lvl="1"/>
-            <a:r>
-              <a:rPr lang="en-US" sz="2000" dirty="0" err="1"/>
-              <a:t>Toodetel</a:t>
-            </a:r>
-            <a:r>
-              <a:rPr lang="en-US" sz="2000" dirty="0"/>
-              <a:t> pole </a:t>
-            </a:r>
-            <a:r>
-              <a:rPr lang="en-US" sz="2000" dirty="0" err="1"/>
-              <a:t>kategooriaid</a:t>
-            </a:r>
-            <a:endParaRPr lang="en-US" sz="2000" dirty="0"/>
-          </a:p>
-          <a:p>
-            <a:pPr lvl="1"/>
-            <a:r>
-              <a:rPr lang="en-US" sz="2000" dirty="0" err="1"/>
-              <a:t>Toodetel</a:t>
-            </a:r>
-            <a:r>
-              <a:rPr lang="en-US" sz="2000" dirty="0"/>
-              <a:t> on </a:t>
-            </a:r>
-            <a:r>
-              <a:rPr lang="en-US" sz="2000" dirty="0" err="1"/>
-              <a:t>valed</a:t>
-            </a:r>
-            <a:r>
-              <a:rPr lang="en-US" sz="2000" dirty="0"/>
-              <a:t> </a:t>
-            </a:r>
-            <a:r>
-              <a:rPr lang="en-US" sz="2000" dirty="0" err="1"/>
-              <a:t>kategooriad</a:t>
-            </a:r>
-            <a:endParaRPr lang="en-US" sz="2000" dirty="0"/>
-          </a:p>
-          <a:p>
-            <a:pPr lvl="1"/>
-            <a:r>
-              <a:rPr lang="en-US" sz="2000" dirty="0" err="1"/>
-              <a:t>Summad</a:t>
-            </a:r>
-            <a:r>
-              <a:rPr lang="en-US" sz="2000" dirty="0"/>
-              <a:t> </a:t>
-            </a:r>
-            <a:r>
-              <a:rPr lang="en-US" sz="2000" dirty="0" err="1"/>
-              <a:t>tulevad</a:t>
-            </a:r>
-            <a:r>
-              <a:rPr lang="en-US" sz="2000" dirty="0"/>
-              <a:t> </a:t>
-            </a:r>
-            <a:r>
-              <a:rPr lang="en-US" sz="2000" dirty="0" err="1"/>
-              <a:t>topelt</a:t>
-            </a:r>
-            <a:r>
-              <a:rPr lang="en-US" sz="2000" dirty="0"/>
-              <a:t> (</a:t>
-            </a:r>
-            <a:r>
-              <a:rPr lang="en-US" sz="2000" dirty="0" err="1"/>
-              <a:t>müügiread</a:t>
-            </a:r>
-            <a:r>
-              <a:rPr lang="en-US" sz="2000" dirty="0"/>
-              <a:t> on </a:t>
-            </a:r>
-            <a:r>
-              <a:rPr lang="en-US" sz="2000" dirty="0" err="1"/>
-              <a:t>nt</a:t>
-            </a:r>
-            <a:r>
-              <a:rPr lang="en-US" sz="2000" dirty="0"/>
-              <a:t> </a:t>
-            </a:r>
-            <a:r>
-              <a:rPr lang="en-US" sz="2000" dirty="0" err="1"/>
-              <a:t>samas</a:t>
-            </a:r>
-            <a:r>
-              <a:rPr lang="en-US" sz="2000" dirty="0"/>
-              <a:t> </a:t>
-            </a:r>
-            <a:r>
-              <a:rPr lang="en-US" sz="2000" dirty="0" err="1"/>
-              <a:t>allikas</a:t>
-            </a:r>
-            <a:r>
-              <a:rPr lang="en-US" sz="2000" dirty="0"/>
-              <a:t> </a:t>
-            </a:r>
-            <a:r>
-              <a:rPr lang="en-US" sz="2000" dirty="0" err="1"/>
-              <a:t>kahest</a:t>
-            </a:r>
-            <a:r>
-              <a:rPr lang="en-US" sz="2000" dirty="0"/>
-              <a:t> </a:t>
-            </a:r>
-            <a:r>
-              <a:rPr lang="en-US" sz="2000" dirty="0" err="1"/>
-              <a:t>erinevast</a:t>
-            </a:r>
-            <a:r>
-              <a:rPr lang="en-US" sz="2000" dirty="0"/>
-              <a:t> </a:t>
-            </a:r>
-            <a:r>
-              <a:rPr lang="en-US" sz="2000" dirty="0" err="1"/>
-              <a:t>ajavööndist</a:t>
-            </a:r>
-            <a:r>
-              <a:rPr lang="en-US" sz="2000" dirty="0"/>
-              <a:t>)</a:t>
-            </a:r>
-          </a:p>
-          <a:p>
-            <a:r>
-              <a:rPr lang="en-US" sz="2000" b="1" dirty="0"/>
-              <a:t>Andmete </a:t>
-            </a:r>
-            <a:r>
-              <a:rPr lang="en-US" sz="2000" b="1" dirty="0" err="1"/>
-              <a:t>töötlemise</a:t>
-            </a:r>
-            <a:r>
-              <a:rPr lang="en-US" sz="2000" b="1" dirty="0"/>
-              <a:t> </a:t>
-            </a:r>
-            <a:r>
-              <a:rPr lang="en-US" sz="2000" b="1" dirty="0" err="1"/>
-              <a:t>etapis</a:t>
-            </a:r>
-            <a:r>
-              <a:rPr lang="en-US" sz="2000" b="1" dirty="0"/>
-              <a:t> või </a:t>
-            </a:r>
-            <a:r>
-              <a:rPr lang="en-US" sz="2000" b="1" dirty="0" err="1"/>
-              <a:t>analüüsis</a:t>
-            </a:r>
-            <a:r>
-              <a:rPr lang="en-US" sz="2000" b="1" dirty="0"/>
-              <a:t> </a:t>
-            </a:r>
-            <a:r>
-              <a:rPr lang="en-US" sz="2000" b="1" dirty="0" err="1"/>
-              <a:t>tekkinud</a:t>
-            </a:r>
-            <a:r>
-              <a:rPr lang="en-US" sz="2000" b="1" dirty="0"/>
-              <a:t> </a:t>
-            </a:r>
-            <a:r>
-              <a:rPr lang="en-US" sz="2000" b="1" dirty="0" err="1"/>
-              <a:t>vead</a:t>
-            </a:r>
-            <a:endParaRPr lang="en-US" sz="2000" b="1" dirty="0"/>
-          </a:p>
-          <a:p>
-            <a:pPr lvl="1"/>
-            <a:r>
-              <a:rPr lang="en-US" sz="2000" dirty="0"/>
-              <a:t>Mu </a:t>
-            </a:r>
-            <a:r>
-              <a:rPr lang="en-US" sz="2000" dirty="0" err="1"/>
-              <a:t>kasumi</a:t>
-            </a:r>
-            <a:r>
-              <a:rPr lang="en-US" sz="2000" dirty="0"/>
-              <a:t> nr </a:t>
-            </a:r>
-            <a:r>
-              <a:rPr lang="en-US" sz="2000" dirty="0" err="1"/>
-              <a:t>erineb</a:t>
-            </a:r>
-            <a:r>
-              <a:rPr lang="en-US" sz="2000" dirty="0"/>
-              <a:t> </a:t>
-            </a:r>
-            <a:r>
-              <a:rPr lang="en-US" sz="2000" dirty="0" err="1"/>
-              <a:t>raamatupidamisprogrammis</a:t>
-            </a:r>
-            <a:r>
-              <a:rPr lang="en-US" sz="2000" dirty="0"/>
-              <a:t> </a:t>
-            </a:r>
-            <a:r>
-              <a:rPr lang="en-US" sz="2000" dirty="0" err="1"/>
-              <a:t>olevast</a:t>
-            </a:r>
-            <a:endParaRPr lang="en-US" sz="2000" dirty="0"/>
-          </a:p>
-          <a:p>
-            <a:pPr lvl="1"/>
-            <a:r>
-              <a:rPr lang="en-US" sz="2000" dirty="0"/>
-              <a:t>Töötajate </a:t>
-            </a:r>
-            <a:r>
-              <a:rPr lang="en-US" sz="2000" dirty="0" err="1"/>
-              <a:t>arv</a:t>
-            </a:r>
-            <a:r>
-              <a:rPr lang="en-US" sz="2000" dirty="0"/>
-              <a:t> on </a:t>
-            </a:r>
-            <a:r>
-              <a:rPr lang="en-US" sz="2000" dirty="0" err="1"/>
-              <a:t>teisel</a:t>
-            </a:r>
-            <a:r>
-              <a:rPr lang="en-US" sz="2000" dirty="0"/>
-              <a:t> </a:t>
-            </a:r>
-            <a:r>
-              <a:rPr lang="en-US" sz="2000" dirty="0" err="1"/>
-              <a:t>juhil</a:t>
-            </a:r>
-            <a:r>
-              <a:rPr lang="en-US" sz="2000" dirty="0"/>
-              <a:t> </a:t>
-            </a:r>
-            <a:r>
-              <a:rPr lang="en-US" sz="2000" dirty="0" err="1"/>
-              <a:t>teine</a:t>
-            </a:r>
-            <a:endParaRPr lang="en-US" sz="2000" dirty="0"/>
-          </a:p>
-          <a:p>
-            <a:pPr lvl="1"/>
-            <a:r>
-              <a:rPr lang="en-US" sz="2000" dirty="0" err="1"/>
-              <a:t>Allokatsioonide</a:t>
-            </a:r>
-            <a:r>
-              <a:rPr lang="en-US" sz="2000" dirty="0"/>
-              <a:t> </a:t>
-            </a:r>
-            <a:r>
-              <a:rPr lang="en-US" sz="2000" dirty="0" err="1"/>
-              <a:t>summad</a:t>
-            </a:r>
-            <a:r>
-              <a:rPr lang="en-US" sz="2000" dirty="0"/>
-              <a:t> on </a:t>
-            </a:r>
-            <a:r>
-              <a:rPr lang="en-US" sz="2000" dirty="0" err="1"/>
-              <a:t>muutunud</a:t>
-            </a:r>
-            <a:r>
-              <a:rPr lang="en-US" sz="2000" dirty="0"/>
-              <a:t> </a:t>
-            </a:r>
-            <a:r>
-              <a:rPr lang="en-US" sz="2000" dirty="0" err="1"/>
-              <a:t>võrreldes</a:t>
-            </a:r>
-            <a:r>
-              <a:rPr lang="en-US" sz="2000" dirty="0"/>
-              <a:t> </a:t>
-            </a:r>
-            <a:r>
-              <a:rPr lang="en-US" sz="2000" dirty="0" err="1"/>
-              <a:t>eilsega</a:t>
-            </a:r>
-            <a:endParaRPr lang="et-EE" sz="2000" dirty="0"/>
+            <a:endParaRPr lang="et-EE"/>
           </a:p>
         </p:txBody>
       </p:sp>
+      <p:pic>
+        <p:nvPicPr>
+          <p:cNvPr id="4" name="Picture 3" descr="50+ data science memes to fight the weekday blues">
+            <a:extLst>
+              <a:ext uri="{FF2B5EF4-FFF2-40B4-BE49-F238E27FC236}">
+                <a16:creationId xmlns:a16="http://schemas.microsoft.com/office/drawing/2014/main" id="{785876CE-F3A1-65EB-6EC2-C2990356586F}"/>
+              </a:ext>
+            </a:extLst>
+          </p:cNvPr>
+          <p:cNvPicPr>
+            <a:picLocks noChangeAspect="1"/>
+          </p:cNvPicPr>
+          <p:nvPr/>
+        </p:nvPicPr>
+        <p:blipFill>
+          <a:blip r:embed="rId2"/>
+          <a:stretch>
+            <a:fillRect/>
+          </a:stretch>
+        </p:blipFill>
+        <p:spPr>
+          <a:xfrm>
+            <a:off x="3810983" y="1144475"/>
+            <a:ext cx="4572000" cy="4572000"/>
+          </a:xfrm>
+          <a:prstGeom prst="rect">
+            <a:avLst/>
+          </a:prstGeom>
+        </p:spPr>
+      </p:pic>
     </p:spTree>
     <p:extLst>
       <p:ext uri="{BB962C8B-B14F-4D97-AF65-F5344CB8AC3E}">
-        <p14:creationId xmlns:p14="http://schemas.microsoft.com/office/powerpoint/2010/main" val="1818135051"/>
+        <p14:creationId xmlns:p14="http://schemas.microsoft.com/office/powerpoint/2010/main" val="4174591945"/>
       </p:ext>
     </p:extLst>
   </p:cSld>
@@ -43144,21 +43144,6 @@
 </file>
 
 <file path=customXml/item1.xml><?xml version="1.0" encoding="utf-8"?>
-<?mso-contentType ?>
-<FormTemplates xmlns="http://schemas.microsoft.com/sharepoint/v3/contenttype/forms">
-  <Display>DocumentLibraryForm</Display>
-  <Edit>DocumentLibraryForm</Edit>
-  <New>DocumentLibraryForm</New>
-</FormTemplates>
-</file>
-
-<file path=customXml/item2.xml><?xml version="1.0" encoding="utf-8"?>
-<p:properties xmlns:p="http://schemas.microsoft.com/office/2006/metadata/properties" xmlns:xsi="http://www.w3.org/2001/XMLSchema-instance" xmlns:pc="http://schemas.microsoft.com/office/infopath/2007/PartnerControls">
-  <documentManagement/>
-</p:properties>
-</file>
-
-<file path=customXml/item3.xml><?xml version="1.0" encoding="utf-8"?>
 <ct:contentTypeSchema xmlns:ct="http://schemas.microsoft.com/office/2006/metadata/contentType" xmlns:ma="http://schemas.microsoft.com/office/2006/metadata/properties/metaAttributes" ct:_="" ma:_="" ma:contentTypeName="Document" ma:contentTypeID="0x010100C4D27B8FA8976546BCD79313C588588D" ma:contentTypeVersion="8" ma:contentTypeDescription="Create a new document." ma:contentTypeScope="" ma:versionID="a112c56f6fe148a79025c76584832af0">
   <xsd:schema xmlns:xsd="http://www.w3.org/2001/XMLSchema" xmlns:xs="http://www.w3.org/2001/XMLSchema" xmlns:p="http://schemas.microsoft.com/office/2006/metadata/properties" xmlns:ns2="a1a2d923-8fea-42f1-bd41-9cdfff65694e" targetNamespace="http://schemas.microsoft.com/office/2006/metadata/properties" ma:root="true" ma:fieldsID="97c8655d467eaa9470a714421e7268c0" ns2:_="">
     <xsd:import namespace="a1a2d923-8fea-42f1-bd41-9cdfff65694e"/>
@@ -43326,24 +43311,22 @@
 </ct:contentTypeSchema>
 </file>
 
-<file path=customXml/itemProps1.xml><?xml version="1.0" encoding="utf-8"?>
-<ds:datastoreItem xmlns:ds="http://schemas.openxmlformats.org/officeDocument/2006/customXml" ds:itemID="{9DC439CA-6F1C-4005-ACA6-A52E04DEE0A7}">
-  <ds:schemaRefs>
-    <ds:schemaRef ds:uri="http://schemas.microsoft.com/sharepoint/v3/contenttype/forms"/>
-  </ds:schemaRefs>
-</ds:datastoreItem>
+<file path=customXml/item2.xml><?xml version="1.0" encoding="utf-8"?>
+<?mso-contentType ?>
+<FormTemplates xmlns="http://schemas.microsoft.com/sharepoint/v3/contenttype/forms">
+  <Display>DocumentLibraryForm</Display>
+  <Edit>DocumentLibraryForm</Edit>
+  <New>DocumentLibraryForm</New>
+</FormTemplates>
 </file>
 
-<file path=customXml/itemProps2.xml><?xml version="1.0" encoding="utf-8"?>
-<ds:datastoreItem xmlns:ds="http://schemas.openxmlformats.org/officeDocument/2006/customXml" ds:itemID="{5BDF4908-A52A-47DD-A794-6E02D71942FC}">
-  <ds:schemaRefs>
-    <ds:schemaRef ds:uri="http://schemas.microsoft.com/office/2006/metadata/properties"/>
-    <ds:schemaRef ds:uri="http://schemas.microsoft.com/office/infopath/2007/PartnerControls"/>
-  </ds:schemaRefs>
-</ds:datastoreItem>
+<file path=customXml/item3.xml><?xml version="1.0" encoding="utf-8"?>
+<p:properties xmlns:p="http://schemas.microsoft.com/office/2006/metadata/properties" xmlns:xsi="http://www.w3.org/2001/XMLSchema-instance" xmlns:pc="http://schemas.microsoft.com/office/infopath/2007/PartnerControls">
+  <documentManagement/>
+</p:properties>
 </file>
 
-<file path=customXml/itemProps3.xml><?xml version="1.0" encoding="utf-8"?>
+<file path=customXml/itemProps1.xml><?xml version="1.0" encoding="utf-8"?>
 <ds:datastoreItem xmlns:ds="http://schemas.openxmlformats.org/officeDocument/2006/customXml" ds:itemID="{9CF4F972-2392-44D0-AA45-41AC4FDC4A59}">
   <ds:schemaRefs>
     <ds:schemaRef ds:uri="a1a2d923-8fea-42f1-bd41-9cdfff65694e"/>
@@ -43361,6 +43344,23 @@
 </ds:datastoreItem>
 </file>
 
+<file path=customXml/itemProps2.xml><?xml version="1.0" encoding="utf-8"?>
+<ds:datastoreItem xmlns:ds="http://schemas.openxmlformats.org/officeDocument/2006/customXml" ds:itemID="{9DC439CA-6F1C-4005-ACA6-A52E04DEE0A7}">
+  <ds:schemaRefs>
+    <ds:schemaRef ds:uri="http://schemas.microsoft.com/sharepoint/v3/contenttype/forms"/>
+  </ds:schemaRefs>
+</ds:datastoreItem>
+</file>
+
+<file path=customXml/itemProps3.xml><?xml version="1.0" encoding="utf-8"?>
+<ds:datastoreItem xmlns:ds="http://schemas.openxmlformats.org/officeDocument/2006/customXml" ds:itemID="{5BDF4908-A52A-47DD-A794-6E02D71942FC}">
+  <ds:schemaRefs>
+    <ds:schemaRef ds:uri="http://schemas.microsoft.com/office/2006/metadata/properties"/>
+    <ds:schemaRef ds:uri="http://schemas.microsoft.com/office/infopath/2007/PartnerControls"/>
+  </ds:schemaRefs>
+</ds:datastoreItem>
+</file>
+
 <file path=docMetadata/LabelInfo.xml><?xml version="1.0" encoding="utf-8"?>
 <clbl:labelList xmlns:clbl="http://schemas.microsoft.com/office/2020/mipLabelMetadata">
   <clbl:label id="{4fc69ca6-ce6b-4059-8ad9-2049c3c135b3}" enabled="0" method="" siteId="{4fc69ca6-ce6b-4059-8ad9-2049c3c135b3}" removed="1"/>
